--- a/doc/Presentazione_Progetto_KNN.pptx
+++ b/doc/Presentazione_Progetto_KNN.pptx
@@ -4,6 +4,9 @@
   <p:sldMasterIdLst>
     <p:sldMasterId id="2147483648" r:id="rId1"/>
   </p:sldMasterIdLst>
+  <p:notesMasterIdLst>
+    <p:notesMasterId r:id="rId16"/>
+  </p:notesMasterIdLst>
   <p:sldIdLst>
     <p:sldId id="256" r:id="rId2"/>
     <p:sldId id="257" r:id="rId3"/>
@@ -20,9 +23,6 @@
     <p:sldId id="268" r:id="rId14"/>
     <p:sldId id="269" r:id="rId15"/>
   </p:sldIdLst>
-  <p:notesMasterIdLst>
-    <p:notesMasterId r:id="rId16"/>
-  </p:notesMasterIdLst>
   <p:sldSz cx="12192000" cy="6858000"/>
   <p:notesSz cx="6858000" cy="12192000"/>
   <p:defaultTextStyle>
@@ -117,13 +117,20 @@
       </a:defRPr>
     </a:lvl9pPr>
   </p:defaultTextStyle>
+  <p:extLst>
+    <p:ext uri="{EFAFB233-063F-42B5-8137-9DF3F51BA10A}">
+      <p15:sldGuideLst xmlns:p15="http://schemas.microsoft.com/office/powerpoint/2012/main"/>
+    </p:ext>
+  </p:extLst>
 </p:presentation>
 </file>
 
 <file path=ppt/charts/chart1.xml><?xml version="1.0" encoding="utf-8"?>
-<c:chartSpace xmlns:c="http://schemas.openxmlformats.org/drawingml/2006/chart" xmlns:a="http://schemas.openxmlformats.org/drawingml/2006/main" xmlns:r="http://schemas.openxmlformats.org/officeDocument/2006/relationships">
+<c:chartSpace xmlns:c="http://schemas.openxmlformats.org/drawingml/2006/chart" xmlns:a="http://schemas.openxmlformats.org/drawingml/2006/main" xmlns:r="http://schemas.openxmlformats.org/officeDocument/2006/relationships" xmlns:c16r2="http://schemas.microsoft.com/office/drawing/2015/06/chart">
   <c:date1904 val="0"/>
+  <c:lang val="it-IT"/>
   <c:roundedCorners val="1"/>
+  <c:style val="2"/>
   <c:chart>
     <c:autoTitleDeleted val="1"/>
     <c:plotArea>
@@ -155,18 +162,26 @@
           <c:invertIfNegative val="0"/>
           <c:dLbls>
             <c:numFmt formatCode="#,##0" sourceLinked="0"/>
+            <c:spPr>
+              <a:noFill/>
+              <a:ln>
+                <a:noFill/>
+              </a:ln>
+              <a:effectLst/>
+            </c:spPr>
             <c:txPr>
               <a:bodyPr/>
               <a:lstStyle/>
               <a:p>
                 <a:pPr>
-                  <a:defRPr b="0" i="0" strike="noStrike" sz="1050" u="none">
+                  <a:defRPr sz="1050" b="0" i="0" u="none" strike="noStrike">
                     <a:solidFill>
                       <a:srgbClr val="171A20"/>
                     </a:solidFill>
                     <a:latin typeface="Calibri"/>
                   </a:defRPr>
                 </a:pPr>
+                <a:endParaRPr lang="it-IT"/>
               </a:p>
             </c:txPr>
             <c:showLegendKey val="0"/>
@@ -176,28 +191,31 @@
             <c:showPercent val="0"/>
             <c:showBubbleSize val="0"/>
             <c:showLeaderLines val="0"/>
+            <c:extLst>
+              <c:ext xmlns:c15="http://schemas.microsoft.com/office/drawing/2012/chart" uri="{CE6537A1-D6FC-4f65-9D91-7224C49458BB}">
+                <c15:showLeaderLines val="0"/>
+              </c:ext>
+            </c:extLst>
           </c:dLbls>
           <c:cat>
-            <c:multiLvlStrRef>
+            <c:strRef>
               <c:f>Sheet1!$A$2:$A$5</c:f>
-              <c:multiLvlStrCache>
+              <c:strCache>
                 <c:ptCount val="4"/>
-                <c:lvl>
-                  <c:pt idx="0">
-                    <c:v>Scalare C</c:v>
-                  </c:pt>
-                  <c:pt idx="1">
-                    <c:v>Intrinseci</c:v>
-                  </c:pt>
-                  <c:pt idx="2">
-                    <c:v>Assembly</c:v>
-                  </c:pt>
-                  <c:pt idx="3">
-                    <c:v>Asm + OpenMP</c:v>
-                  </c:pt>
-                </c:lvl>
-              </c:multiLvlStrCache>
-            </c:multiLvlStrRef>
+                <c:pt idx="0">
+                  <c:v>Scalare C</c:v>
+                </c:pt>
+                <c:pt idx="1">
+                  <c:v>Intrinseci</c:v>
+                </c:pt>
+                <c:pt idx="2">
+                  <c:v>Assembly</c:v>
+                </c:pt>
+                <c:pt idx="3">
+                  <c:v>Asm + OpenMP</c:v>
+                </c:pt>
+              </c:strCache>
+            </c:strRef>
           </c:cat>
           <c:val>
             <c:numRef>
@@ -220,6 +238,11 @@
               </c:numCache>
             </c:numRef>
           </c:val>
+          <c:extLst>
+            <c:ext xmlns:c16="http://schemas.microsoft.com/office/drawing/2014/chart" uri="{C3380CC4-5D6E-409C-BE32-E72D297353CC}">
+              <c16:uniqueId val="{00000000-AA55-4C22-8D4C-9C8DBF6E3706}"/>
+            </c:ext>
+          </c:extLst>
         </c:ser>
         <c:ser>
           <c:idx val="1"/>
@@ -244,18 +267,26 @@
           <c:invertIfNegative val="0"/>
           <c:dLbls>
             <c:numFmt formatCode="#,##0" sourceLinked="0"/>
+            <c:spPr>
+              <a:noFill/>
+              <a:ln>
+                <a:noFill/>
+              </a:ln>
+              <a:effectLst/>
+            </c:spPr>
             <c:txPr>
               <a:bodyPr/>
               <a:lstStyle/>
               <a:p>
                 <a:pPr>
-                  <a:defRPr b="0" i="0" strike="noStrike" sz="1050" u="none">
+                  <a:defRPr sz="1050" b="0" i="0" u="none" strike="noStrike">
                     <a:solidFill>
                       <a:srgbClr val="171A20"/>
                     </a:solidFill>
                     <a:latin typeface="Calibri"/>
                   </a:defRPr>
                 </a:pPr>
+                <a:endParaRPr lang="it-IT"/>
               </a:p>
             </c:txPr>
             <c:showLegendKey val="0"/>
@@ -265,28 +296,31 @@
             <c:showPercent val="0"/>
             <c:showBubbleSize val="0"/>
             <c:showLeaderLines val="0"/>
+            <c:extLst>
+              <c:ext xmlns:c15="http://schemas.microsoft.com/office/drawing/2012/chart" uri="{CE6537A1-D6FC-4f65-9D91-7224C49458BB}">
+                <c15:showLeaderLines val="0"/>
+              </c:ext>
+            </c:extLst>
           </c:dLbls>
           <c:cat>
-            <c:multiLvlStrRef>
+            <c:strRef>
               <c:f>Sheet1!$A$2:$A$5</c:f>
-              <c:multiLvlStrCache>
+              <c:strCache>
                 <c:ptCount val="4"/>
-                <c:lvl>
-                  <c:pt idx="0">
-                    <c:v>Scalare C</c:v>
-                  </c:pt>
-                  <c:pt idx="1">
-                    <c:v>Intrinseci</c:v>
-                  </c:pt>
-                  <c:pt idx="2">
-                    <c:v>Assembly</c:v>
-                  </c:pt>
-                  <c:pt idx="3">
-                    <c:v>Asm + OpenMP</c:v>
-                  </c:pt>
-                </c:lvl>
-              </c:multiLvlStrCache>
-            </c:multiLvlStrRef>
+                <c:pt idx="0">
+                  <c:v>Scalare C</c:v>
+                </c:pt>
+                <c:pt idx="1">
+                  <c:v>Intrinseci</c:v>
+                </c:pt>
+                <c:pt idx="2">
+                  <c:v>Assembly</c:v>
+                </c:pt>
+                <c:pt idx="3">
+                  <c:v>Asm + OpenMP</c:v>
+                </c:pt>
+              </c:strCache>
+            </c:strRef>
           </c:cat>
           <c:val>
             <c:numRef>
@@ -309,36 +343,23 @@
               </c:numCache>
             </c:numRef>
           </c:val>
+          <c:extLst>
+            <c:ext xmlns:c16="http://schemas.microsoft.com/office/drawing/2014/chart" uri="{C3380CC4-5D6E-409C-BE32-E72D297353CC}">
+              <c16:uniqueId val="{00000001-AA55-4C22-8D4C-9C8DBF6E3706}"/>
+            </c:ext>
+          </c:extLst>
         </c:ser>
         <c:dLbls>
-          <c:numFmt formatCode="#,##0" sourceLinked="0"/>
-          <c:txPr>
-            <a:bodyPr/>
-            <a:lstStyle/>
-            <a:p>
-              <a:pPr>
-                <a:defRPr b="0" i="0" strike="noStrike" sz="1050" u="none">
-                  <a:solidFill>
-                    <a:srgbClr val="171A20"/>
-                  </a:solidFill>
-                  <a:latin typeface="Calibri"/>
-                </a:defRPr>
-              </a:pPr>
-            </a:p>
-          </c:txPr>
           <c:showLegendKey val="0"/>
           <c:showVal val="1"/>
           <c:showCatName val="0"/>
           <c:showSerName val="0"/>
           <c:showPercent val="0"/>
           <c:showBubbleSize val="0"/>
-          <c:showLeaderLines val="0"/>
         </c:dLbls>
         <c:gapWidth val="150"/>
-        <c:overlap val="0"/>
         <c:axId val="2094734554"/>
         <c:axId val="2094734552"/>
-        <c:axId val="2094734556"/>
       </c:barChart>
       <c:catAx>
         <c:axId val="2094734554"/>
@@ -379,6 +400,7 @@
         <c:crosses val="autoZero"/>
         <c:auto val="1"/>
         <c:lblAlgn val="ctr"/>
+        <c:lblOffset val="100"/>
         <c:noMultiLvlLbl val="1"/>
       </c:catAx>
       <c:valAx>
@@ -414,7 +436,7 @@
                   </a:defRPr>
                 </a:pPr>
                 <a:r>
-                  <a:rPr sz="1100" b="0" i="0" u="none" strike="noStrike">
+                  <a:rPr lang="it-IT" sz="1100" b="0" i="0" u="none" strike="noStrike">
                     <a:solidFill>
                       <a:srgbClr val="59616C"/>
                     </a:solidFill>
@@ -425,7 +447,6 @@
               </a:p>
             </c:rich>
           </c:tx>
-          <c:layout/>
           <c:overlay val="0"/>
         </c:title>
         <c:numFmt formatCode="General" sourceLinked="0"/>
@@ -490,6 +511,7 @@
     </c:legend>
     <c:plotVisOnly val="1"/>
     <c:dispBlanksAs val="span"/>
+    <c:showDLblsOverMax val="1"/>
   </c:chart>
   <c:spPr>
     <a:solidFill>
@@ -528,234 +550,10 @@
           <a:chExt cx="0" cy="0"/>
         </a:xfrm>
       </p:grpSpPr>
-      <p:sp>
-        <p:nvSpPr>
-          <p:cNvPr id="2" name="Header Placeholder 1"/>
-          <p:cNvSpPr>
-            <a:spLocks noGrp="1"/>
-          </p:cNvSpPr>
-          <p:nvPr>
-            <p:ph type="hdr" sz="quarter"/>
-          </p:nvPr>
-        </p:nvSpPr>
-        <p:spPr>
-          <a:xfrm>
-            <a:off x="0" y="0"/>
-            <a:ext cx="2971800" cy="458788"/>
-          </a:xfrm>
-          <a:prstGeom prst="rect">
-            <a:avLst/>
-          </a:prstGeom>
-        </p:spPr>
-        <p:txBody>
-          <a:bodyPr vert="horz" lIns="91440" tIns="45720" rIns="91440" bIns="45720" rtlCol="0"/>
-          <a:lstStyle>
-            <a:lvl1pPr algn="l">
-              <a:defRPr sz="1200"/>
-            </a:lvl1pPr>
-          </a:lstStyle>
-          <a:p>
-            <a:endParaRPr lang="en-US"/>
-          </a:p>
-        </p:txBody>
-      </p:sp>
-      <p:sp>
-        <p:nvSpPr>
-          <p:cNvPr id="3" name="Date Placeholder 2"/>
-          <p:cNvSpPr>
-            <a:spLocks noGrp="1"/>
-          </p:cNvSpPr>
-          <p:nvPr>
-            <p:ph type="dt" idx="1"/>
-          </p:nvPr>
-        </p:nvSpPr>
-        <p:spPr>
-          <a:xfrm>
-            <a:off x="3884613" y="0"/>
-            <a:ext cx="2971800" cy="458788"/>
-          </a:xfrm>
-          <a:prstGeom prst="rect">
-            <a:avLst/>
-          </a:prstGeom>
-        </p:spPr>
-        <p:txBody>
-          <a:bodyPr vert="horz" lIns="91440" tIns="45720" rIns="91440" bIns="45720" rtlCol="0"/>
-          <a:lstStyle>
-            <a:lvl1pPr algn="r">
-              <a:defRPr sz="1200"/>
-            </a:lvl1pPr>
-          </a:lstStyle>
-          <a:p>
-            <a:fld id="{5282F153-3F37-0F45-9E97-73ACFA13230C}" type="datetimeFigureOut">
-              <a:rPr lang="en-US"/>
-              <a:t>7/23/19</a:t>
-            </a:fld>
-            <a:endParaRPr lang="en-US"/>
-          </a:p>
-        </p:txBody>
-      </p:sp>
-      <p:sp>
-        <p:nvSpPr>
-          <p:cNvPr id="4" name="Slide Image Placeholder 3"/>
-          <p:cNvSpPr>
-            <a:spLocks noGrp="1" noRot="1" noChangeAspect="1"/>
-          </p:cNvSpPr>
-          <p:nvPr>
-            <p:ph type="sldImg" idx="2"/>
-          </p:nvPr>
-        </p:nvSpPr>
-        <p:spPr>
-          <a:xfrm>
-            <a:off x="685800" y="1143000"/>
-            <a:ext cx="5486400" cy="3086100"/>
-          </a:xfrm>
-          <a:prstGeom prst="rect">
-            <a:avLst/>
-          </a:prstGeom>
-          <a:noFill/>
-          <a:ln w="12700">
-            <a:solidFill>
-              <a:prstClr val="black"/>
-            </a:solidFill>
-          </a:ln>
-        </p:spPr>
-        <p:txBody>
-          <a:bodyPr vert="horz" lIns="91440" tIns="45720" rIns="91440" bIns="45720" rtlCol="0" anchor="ctr"/>
-          <a:lstStyle/>
-          <a:p>
-            <a:endParaRPr lang="en-US"/>
-          </a:p>
-        </p:txBody>
-      </p:sp>
-      <p:sp>
-        <p:nvSpPr>
-          <p:cNvPr id="5" name="Notes Placeholder 4"/>
-          <p:cNvSpPr>
-            <a:spLocks noGrp="1"/>
-          </p:cNvSpPr>
-          <p:nvPr>
-            <p:ph type="body" sz="quarter" idx="3"/>
-          </p:nvPr>
-        </p:nvSpPr>
-        <p:spPr>
-          <a:xfrm>
-            <a:off x="685800" y="4400550"/>
-            <a:ext cx="5486400" cy="3600450"/>
-          </a:xfrm>
-          <a:prstGeom prst="rect">
-            <a:avLst/>
-          </a:prstGeom>
-        </p:spPr>
-        <p:txBody>
-          <a:bodyPr vert="horz" lIns="91440" tIns="45720" rIns="91440" bIns="45720" rtlCol="0"/>
-          <a:lstStyle/>
-          <a:p>
-            <a:pPr lvl="0"/>
-            <a:r>
-              <a:rPr lang="en-US"/>
-              <a:t>Click to edit Master text styles</a:t>
-            </a:r>
-          </a:p>
-          <a:p>
-            <a:pPr lvl="1"/>
-            <a:r>
-              <a:rPr lang="en-US"/>
-              <a:t>Second level</a:t>
-            </a:r>
-          </a:p>
-          <a:p>
-            <a:pPr lvl="2"/>
-            <a:r>
-              <a:rPr lang="en-US"/>
-              <a:t>Third level</a:t>
-            </a:r>
-          </a:p>
-          <a:p>
-            <a:pPr lvl="3"/>
-            <a:r>
-              <a:rPr lang="en-US"/>
-              <a:t>Fourth level</a:t>
-            </a:r>
-          </a:p>
-          <a:p>
-            <a:pPr lvl="4"/>
-            <a:r>
-              <a:rPr lang="en-US"/>
-              <a:t>Fifth level</a:t>
-            </a:r>
-          </a:p>
-        </p:txBody>
-      </p:sp>
-      <p:sp>
-        <p:nvSpPr>
-          <p:cNvPr id="6" name="Footer Placeholder 5"/>
-          <p:cNvSpPr>
-            <a:spLocks noGrp="1"/>
-          </p:cNvSpPr>
-          <p:nvPr>
-            <p:ph type="ftr" sz="quarter" idx="4"/>
-          </p:nvPr>
-        </p:nvSpPr>
-        <p:spPr>
-          <a:xfrm>
-            <a:off x="0" y="8685213"/>
-            <a:ext cx="2971800" cy="458787"/>
-          </a:xfrm>
-          <a:prstGeom prst="rect">
-            <a:avLst/>
-          </a:prstGeom>
-        </p:spPr>
-        <p:txBody>
-          <a:bodyPr vert="horz" lIns="91440" tIns="45720" rIns="91440" bIns="45720" rtlCol="0" anchor="b"/>
-          <a:lstStyle>
-            <a:lvl1pPr algn="l">
-              <a:defRPr sz="1200"/>
-            </a:lvl1pPr>
-          </a:lstStyle>
-          <a:p>
-            <a:endParaRPr lang="en-US"/>
-          </a:p>
-        </p:txBody>
-      </p:sp>
-      <p:sp>
-        <p:nvSpPr>
-          <p:cNvPr id="7" name="Slide Number Placeholder 6"/>
-          <p:cNvSpPr>
-            <a:spLocks noGrp="1"/>
-          </p:cNvSpPr>
-          <p:nvPr>
-            <p:ph type="sldNum" sz="quarter" idx="5"/>
-          </p:nvPr>
-        </p:nvSpPr>
-        <p:spPr>
-          <a:xfrm>
-            <a:off x="3884613" y="8685213"/>
-            <a:ext cx="2971800" cy="458787"/>
-          </a:xfrm>
-          <a:prstGeom prst="rect">
-            <a:avLst/>
-          </a:prstGeom>
-        </p:spPr>
-        <p:txBody>
-          <a:bodyPr vert="horz" lIns="91440" tIns="45720" rIns="91440" bIns="45720" rtlCol="0" anchor="b"/>
-          <a:lstStyle>
-            <a:lvl1pPr algn="r">
-              <a:defRPr sz="1200"/>
-            </a:lvl1pPr>
-          </a:lstStyle>
-          <a:p>
-            <a:fld id="{CE5E9CC1-C706-0F49-92D6-E571CC5EEA8F}" type="slidenum">
-              <a:rPr lang="en-US"/>
-              <a:t>‹#›</a:t>
-            </a:fld>
-            <a:endParaRPr lang="en-US"/>
-          </a:p>
-        </p:txBody>
-      </p:sp>
     </p:spTree>
     <p:extLst>
       <p:ext uri="{BB962C8B-B14F-4D97-AF65-F5344CB8AC3E}">
-        <p14:creationId xmlns:p14="http://schemas.microsoft.com/office/powerpoint/2010/main" val="1024086991"/>
+        <p14:creationId xmlns:p14="http://schemas.microsoft.com/office/powerpoint/2010/main" val="1362931722"/>
       </p:ext>
     </p:extLst>
   </p:cSld>
@@ -883,6 +681,13 @@
           </p:nvPr>
         </p:nvSpPr>
         <p:spPr/>
+        <p:txBody>
+          <a:bodyPr/>
+          <a:lstStyle/>
+          <a:p>
+            <a:endParaRPr lang="it-IT"/>
+          </a:p>
+        </p:txBody>
       </p:sp>
       <p:sp>
         <p:nvSpPr>
@@ -903,7 +708,6 @@
               <a:rPr lang="en-US" dirty="0"/>
               <a:t>Buongiorno. Il progetto implementa la ricerca approssimata dei K vicini richiesta dalla traccia: quantizzazione binaria dei vettori, distanza approssimata, indice a pivot. Il focus del corso e del progetto: la stessa identica logica algoritmica portata da C scalare fino ad assembly SIMD scritto a mano e OpenMP, misurando ogni passo. In chiusura: il tutto e' anche un pacchetto Python installabile.</a:t>
             </a:r>
-            <a:endParaRPr lang="en-US" dirty="0"/>
           </a:p>
         </p:txBody>
       </p:sp>
@@ -971,6 +775,13 @@
           </p:nvPr>
         </p:nvSpPr>
         <p:spPr/>
+        <p:txBody>
+          <a:bodyPr/>
+          <a:lstStyle/>
+          <a:p>
+            <a:endParaRPr lang="it-IT"/>
+          </a:p>
+        </p:txBody>
       </p:sp>
       <p:sp>
         <p:nvSpPr>
@@ -991,7 +802,6 @@
               <a:rPr lang="en-US" dirty="0"/>
               <a:t>I numeri, misurati dal launcher automatico e committati nel repository: a 32 bit la query passa da 4352 ms scalari a 2357 con gli intrinseci, 334 con l'assembly, 88 con OpenMP -- 49 volte e mezzo. A 64 bit: 4840, 2542, 706, 109 -- 44 volte. Il salto grande e' l'assembly; OpenMP scala quasi linearmente sui core.</a:t>
             </a:r>
-            <a:endParaRPr lang="en-US" dirty="0"/>
           </a:p>
         </p:txBody>
       </p:sp>
@@ -1059,6 +869,13 @@
           </p:nvPr>
         </p:nvSpPr>
         <p:spPr/>
+        <p:txBody>
+          <a:bodyPr/>
+          <a:lstStyle/>
+          <a:p>
+            <a:endParaRPr lang="it-IT"/>
+          </a:p>
+        </p:txBody>
       </p:sp>
       <p:sp>
         <p:nvSpPr>
@@ -1079,7 +896,6 @@
               <a:rPr lang="en-US" dirty="0"/>
               <a:t>Quattro letture oneste. Uno: il grosso del guadagno e' il cambio di motore verso l'assembly. Due: OpenMP scala quasi linearmente perche' il problema e' perfetto per il multithreading. Tre: effetto Amdahl -- ora build e query costano uguale, la prossima ottimizzazione dovrebbe puntare alla quantizzazione. Quattro, da dire prima che lo chiedano: i target scalare e intrinseci compilano senza -O3, quindi il rapporto asm/intrinseci e' in parte gonfiato dalla mancata ottimizzazione del compilatore; lo dichiariamo in relazione come nota metodologica.</a:t>
             </a:r>
-            <a:endParaRPr lang="en-US" dirty="0"/>
           </a:p>
         </p:txBody>
       </p:sp>
@@ -1147,6 +963,13 @@
           </p:nvPr>
         </p:nvSpPr>
         <p:spPr/>
+        <p:txBody>
+          <a:bodyPr/>
+          <a:lstStyle/>
+          <a:p>
+            <a:endParaRPr lang="it-IT"/>
+          </a:p>
+        </p:txBody>
       </p:sp>
       <p:sp>
         <p:nvSpPr>
@@ -1167,7 +990,6 @@
               <a:rPr lang="en-US" dirty="0"/>
               <a:t>Il pacchetto Python non reimplementa nulla: tre strati sottili portano gli array NumPy fino allo stesso nucleo C+assembly degli eseguibili, per puntatore e senza copie. La memoria dei risultati e' allocata in C e adottata dagli array NumPy con PyCapsule: niente leak. Il build richiede MinGW perche' i file assembly sono GAS con flag GCC; una build_ext personalizzata li registra e forza mingw32. Il wheel finale e' autosufficiente grazie a delvewheel: l'utente fa pip install e basta. Con OpenMP attivo il GIL non e' un problema: il parallelismo vive nello strato C.</a:t>
             </a:r>
-            <a:endParaRPr lang="en-US" dirty="0"/>
           </a:p>
         </p:txBody>
       </p:sp>
@@ -1235,6 +1057,13 @@
           </p:nvPr>
         </p:nvSpPr>
         <p:spPr/>
+        <p:txBody>
+          <a:bodyPr/>
+          <a:lstStyle/>
+          <a:p>
+            <a:endParaRPr lang="it-IT"/>
+          </a:p>
+        </p:txBody>
       </p:sp>
       <p:sp>
         <p:nvSpPr>
@@ -1255,7 +1084,6 @@
               <a:rPr lang="en-US" dirty="0"/>
               <a:t>La correttezza non e' 'sembra giusto': tre gambe. I file di riferimento ufficiali, confrontati automaticamente a fine esecuzione. Una reimplementazione completamente indipendente in NumPy, scritta partendo dalla specifica e non dal C, che riproduce gli stessi 2000 su 2000 risultati. E il test end-to-end del pacchetto Python, che attraversa tutta la catena fino all'assembly. In piu': niente pareggi nei dati, quindi il determinismo e' garantito.</a:t>
             </a:r>
-            <a:endParaRPr lang="en-US" dirty="0"/>
           </a:p>
         </p:txBody>
       </p:sp>
@@ -1323,6 +1151,13 @@
           </p:nvPr>
         </p:nvSpPr>
         <p:spPr/>
+        <p:txBody>
+          <a:bodyPr/>
+          <a:lstStyle/>
+          <a:p>
+            <a:endParaRPr lang="it-IT"/>
+          </a:p>
+        </p:txBody>
       </p:sp>
       <p:sp>
         <p:nvSpPr>
@@ -1343,7 +1178,6 @@
               <a:rPr lang="en-US" dirty="0"/>
               <a:t>Chiusura: il progetto dimostra la tesi del corso nel modo piu' concreto -- quasi 50x senza toccare la logica. Tre messaggi: ottimizzare solo dove il tempo si consuma davvero (e saperlo misurare), sfruttare il parallelismo naturale del problema, e dichiarare i limiti: la natura di similarita' di d~, l'asimmetria di -O3 nel benchmark, i percorsi assembly generici non esercitati dal workload. Domande?</a:t>
             </a:r>
-            <a:endParaRPr lang="en-US" dirty="0"/>
           </a:p>
         </p:txBody>
       </p:sp>
@@ -1411,6 +1245,13 @@
           </p:nvPr>
         </p:nvSpPr>
         <p:spPr/>
+        <p:txBody>
+          <a:bodyPr/>
+          <a:lstStyle/>
+          <a:p>
+            <a:endParaRPr lang="it-IT"/>
+          </a:p>
+        </p:txBody>
       </p:sp>
       <p:sp>
         <p:nvSpPr>
@@ -1431,7 +1272,6 @@
               <a:rPr lang="en-US" dirty="0"/>
               <a:t>Numeri del workload di riferimento: n=2000, D=256, 2000 query, h=16 pivot, k=8, x=64. Il naive fa 4 milioni di distanze euclidee, circa 3 miliardi di FLOP. Le due leve della traccia: quantizzazione (riduce il costo della singola distanza) e pivot (riduce quante distanze si calcolano).</a:t>
             </a:r>
-            <a:endParaRPr lang="en-US" dirty="0"/>
           </a:p>
         </p:txBody>
       </p:sp>
@@ -1499,6 +1339,13 @@
           </p:nvPr>
         </p:nvSpPr>
         <p:spPr/>
+        <p:txBody>
+          <a:bodyPr/>
+          <a:lstStyle/>
+          <a:p>
+            <a:endParaRPr lang="it-IT"/>
+          </a:p>
+        </p:txBody>
       </p:sp>
       <p:sp>
         <p:nvSpPr>
@@ -1519,7 +1366,6 @@
               <a:rPr lang="en-US" dirty="0"/>
               <a:t>Esempio direttamente dalla traccia: v = [2.3, 1.5, -6.7, 4.5] con x=2. I due moduli piu' grandi sono -6.7 e 4.5: -6.7 e' negativo quindi accende v- in posizione 2; 4.5 positivo accende v+ in posizione 3. Nel progetto reale x=64 su D=256. Si butta la magnitudine, si tengono posizione e segno delle componenti dominanti. Implementazione con qsort su coppie (modulo, indice). Nota importante: abbiamo verificato che nei dati non ci sono pareggi, quindi nessuna ambiguita' dal qsort instabile.</a:t>
             </a:r>
-            <a:endParaRPr lang="en-US" dirty="0"/>
           </a:p>
         </p:txBody>
       </p:sp>
@@ -1587,6 +1433,13 @@
           </p:nvPr>
         </p:nvSpPr>
         <p:spPr/>
+        <p:txBody>
+          <a:bodyPr/>
+          <a:lstStyle/>
+          <a:p>
+            <a:endParaRPr lang="it-IT"/>
+          </a:p>
+        </p:txBody>
       </p:sp>
       <p:sp>
         <p:nvSpPr>
@@ -1607,7 +1460,6 @@
               <a:rPr lang="en-US" dirty="0"/>
               <a:t>La distanza approssimata conta accordi meno disaccordi tra le impronte: pp e nn sono accordi (contributo positivo), pn e np disaccordi (negativo). E' un intero tra -x e +x. Punto delicato da conoscere: per vettori identici vale +x, il massimo -- quindi formalmente e' una similarita'. La traccia la tratta come distanza e ci costruisce sopra il pruning con la disuguaglianza triangolare, che per d~ non vale in senso stretto. E' un'euristica: conforme alla specifica, riproduce esattamente i file golden. Se il docente chiede 'e' una metrica?': no, e sappiamo perche'.</a:t>
             </a:r>
-            <a:endParaRPr lang="en-US" dirty="0"/>
           </a:p>
         </p:txBody>
       </p:sp>
@@ -1675,6 +1527,13 @@
           </p:nvPr>
         </p:nvSpPr>
         <p:spPr/>
+        <p:txBody>
+          <a:bodyPr/>
+          <a:lstStyle/>
+          <a:p>
+            <a:endParaRPr lang="it-IT"/>
+          </a:p>
+        </p:txBody>
       </p:sp>
       <p:sp>
         <p:nvSpPr>
@@ -1695,7 +1554,6 @@
               <a:rPr lang="en-US" dirty="0"/>
               <a:t>La selezione dei pivot e' quella prescritta: passo n/h. Il build: quantizzazione dell'intero dataset, copia delle maschere dei pivot in buffer contigui, matrice delle 32.000 distanze approssimate punto-pivot. Nota di design: tutta la struttura sta in circa 1.1 MB, quindi in cache -- e' uno dei motivi per cui la fase di query scala cosi' bene. Il costo di build e' 67-193 ms, una tantum.</a:t>
             </a:r>
-            <a:endParaRPr lang="en-US" dirty="0"/>
           </a:p>
         </p:txBody>
       </p:sp>
@@ -1763,6 +1621,13 @@
           </p:nvPr>
         </p:nvSpPr>
         <p:spPr/>
+        <p:txBody>
+          <a:bodyPr/>
+          <a:lstStyle/>
+          <a:p>
+            <a:endParaRPr lang="it-IT"/>
+          </a:p>
+        </p:txBody>
       </p:sp>
       <p:sp>
         <p:nvSpPr>
@@ -1783,7 +1648,6 @@
               <a:rPr lang="en-US" dirty="0"/>
               <a:t>La query: si quantizza q, si calcolano le 16 distanze dai pivot, poi per ognuno dei 2000 punti: primo filtro con soli interi pre-calcolati (scarta il 39.3%); per i sopravvissuti la distanza approssimata completa -- circa 2.43 milioni di chiamate, e' il collo di bottiglia dove abbiamo investito SIMD e assembly; alla fine l'euclidea vera solo per gli 8 finalisti. Da 4 milioni di euclidee a 16 mila: 250 volte di meno.</a:t>
             </a:r>
-            <a:endParaRPr lang="en-US" dirty="0"/>
           </a:p>
         </p:txBody>
       </p:sp>
@@ -1851,6 +1715,13 @@
           </p:nvPr>
         </p:nvSpPr>
         <p:spPr/>
+        <p:txBody>
+          <a:bodyPr/>
+          <a:lstStyle/>
+          <a:p>
+            <a:endParaRPr lang="it-IT"/>
+          </a:p>
+        </p:txBody>
       </p:sp>
       <p:sp>
         <p:nvSpPr>
@@ -1871,7 +1742,6 @@
               <a:rPr lang="en-US" dirty="0"/>
               <a:t>Scelta architetturale chiave: la logica esiste in una sola versione; il motore della distanza approssimata si commuta con macro. Cosi' il confronto prestazionale e' pulito: cambiamo solo la funzione critica. Otto target di build piu' il Benchmark_Report che lancia tutti gli eseguibili e produce la tabella comparativa txt+html.</a:t>
             </a:r>
-            <a:endParaRPr lang="en-US" dirty="0"/>
           </a:p>
         </p:txBody>
       </p:sp>
@@ -1939,6 +1809,13 @@
           </p:nvPr>
         </p:nvSpPr>
         <p:spPr/>
+        <p:txBody>
+          <a:bodyPr/>
+          <a:lstStyle/>
+          <a:p>
+            <a:endParaRPr lang="it-IT"/>
+          </a:p>
+        </p:txBody>
       </p:sp>
       <p:sp>
         <p:nvSpPr>
@@ -1959,7 +1836,6 @@
               <a:rPr lang="en-US" dirty="0"/>
               <a:t>Il cuore dell'assembly: ogni prodotto scalare tra maschere si riduce a un AND piu' una PSADBW. PSADBW contro il registro zero somma orizzontalmente i byte -- su vettori 0/1 e' esattamente un population count, e resta tutto nei registri vettoriali. Scelte di contorno: fast path completamente srotolato per D=256 (il caso reale), rispetto rigoroso dell'ABI Win64 con salvataggio dei registri non volatili (fondamentale: la funzione e' chiamata milioni di volte anche da thread OpenMP), load non allineate per non imporre vincoli ai chiamanti. Differenza SSE2/AVX2: la SSE2 normalizza difensivamente i byte prima del conteggio, l'AVX2 si fida del contratto 0/1 -- tre istruzioni in meno per termine.</a:t>
             </a:r>
-            <a:endParaRPr lang="en-US" dirty="0"/>
           </a:p>
         </p:txBody>
       </p:sp>
@@ -2027,6 +1903,13 @@
           </p:nvPr>
         </p:nvSpPr>
         <p:spPr/>
+        <p:txBody>
+          <a:bodyPr/>
+          <a:lstStyle/>
+          <a:p>
+            <a:endParaRPr lang="it-IT"/>
+          </a:p>
+        </p:txBody>
       </p:sp>
       <p:sp>
         <p:nvSpPr>
@@ -2047,7 +1930,6 @@
               <a:rPr lang="en-US" dirty="0"/>
               <a:t>Il problema e' imbarazzantemente parallelo: ogni query legge strutture immutabili e scrive nel suo segmento. Un pragma e basta. Schedule dynamic perche' il pruning rende il costo per query variabile. Dettaglio da citare: misuriamo con omp_get_wtime, non clock() -- clock() in multithread puo' sommare i tempi CPU dei thread e far sembrare il parallelo piu' lento. I due parallelismi si moltiplicano: thread sulle query, SIMD dentro la singola distanza.</a:t>
             </a:r>
-            <a:endParaRPr lang="en-US" dirty="0"/>
           </a:p>
         </p:txBody>
       </p:sp>
@@ -2120,6 +2002,11 @@
 <file path=ppt/slideMasters/slideMaster1.xml><?xml version="1.0" encoding="utf-8"?>
 <p:sldMaster xmlns:a="http://schemas.openxmlformats.org/drawingml/2006/main" xmlns:r="http://schemas.openxmlformats.org/officeDocument/2006/relationships" xmlns:p="http://schemas.openxmlformats.org/presentationml/2006/main">
   <p:cSld>
+    <p:bg>
+      <p:bgRef idx="1001">
+        <a:schemeClr val="bg1"/>
+      </p:bgRef>
+    </p:bg>
     <p:spTree>
       <p:nvGrpSpPr>
         <p:cNvPr id="1" name=""/>
@@ -2402,6 +2289,7 @@
         <a:solidFill>
           <a:srgbClr val="171A20"/>
         </a:solidFill>
+        <a:effectLst/>
       </p:bgPr>
     </p:bg>
     <p:spTree>
@@ -2439,11 +2327,11 @@
           <a:bodyPr wrap="square" lIns="0" tIns="0" rIns="0" bIns="0" rtlCol="0" anchor="ctr"/>
           <a:lstStyle/>
           <a:p>
-            <a:pPr indent="0" marL="0">
-              <a:buNone/>
-            </a:pPr>
-            <a:r>
-              <a:rPr lang="en-US" sz="1300" b="1" spc="400" kern="0" dirty="0">
+            <a:pPr marL="0" indent="0">
+              <a:buNone/>
+            </a:pPr>
+            <a:r>
+              <a:rPr lang="en-US" sz="1300" b="1" kern="0" spc="400" dirty="0">
                 <a:solidFill>
                   <a:srgbClr val="0B7A63"/>
                 </a:solidFill>
@@ -2478,7 +2366,7 @@
           <a:bodyPr wrap="square" lIns="0" tIns="0" rIns="0" bIns="0" rtlCol="0" anchor="ctr"/>
           <a:lstStyle/>
           <a:p>
-            <a:pPr indent="0" marL="0">
+            <a:pPr marL="0" indent="0">
               <a:buNone/>
             </a:pPr>
             <a:r>
@@ -2517,7 +2405,7 @@
           <a:bodyPr wrap="square" lIns="0" tIns="0" rIns="0" bIns="0" rtlCol="0" anchor="ctr"/>
           <a:lstStyle/>
           <a:p>
-            <a:pPr indent="0" marL="0">
+            <a:pPr marL="0" indent="0">
               <a:buNone/>
             </a:pPr>
             <a:r>
@@ -2534,7 +2422,7 @@
             <a:endParaRPr lang="en-US" sz="1900" dirty="0"/>
           </a:p>
           <a:p>
-            <a:pPr indent="0" marL="0">
+            <a:pPr marL="0" indent="0">
               <a:buNone/>
             </a:pPr>
             <a:r>
@@ -2573,7 +2461,7 @@
           <a:bodyPr wrap="square" lIns="0" tIns="0" rIns="0" bIns="0" rtlCol="0" anchor="ctr"/>
           <a:lstStyle/>
           <a:p>
-            <a:pPr algn="r" indent="0" marL="0">
+            <a:pPr marL="0" indent="0" algn="r">
               <a:buNone/>
             </a:pPr>
             <a:r>
@@ -2617,6 +2505,13 @@
             <a:prstDash val="solid"/>
           </a:ln>
         </p:spPr>
+        <p:txBody>
+          <a:bodyPr/>
+          <a:lstStyle/>
+          <a:p>
+            <a:endParaRPr lang="it-IT"/>
+          </a:p>
+        </p:txBody>
       </p:sp>
       <p:sp>
         <p:nvSpPr>
@@ -2639,7 +2534,7 @@
           <a:bodyPr wrap="square" lIns="0" tIns="0" rIns="0" bIns="0" rtlCol="0" anchor="ctr"/>
           <a:lstStyle/>
           <a:p>
-            <a:pPr algn="ctr" indent="0" marL="0">
+            <a:pPr marL="0" indent="0" algn="ctr">
               <a:buNone/>
             </a:pPr>
             <a:r>
@@ -2683,6 +2578,13 @@
             <a:prstDash val="solid"/>
           </a:ln>
         </p:spPr>
+        <p:txBody>
+          <a:bodyPr/>
+          <a:lstStyle/>
+          <a:p>
+            <a:endParaRPr lang="it-IT"/>
+          </a:p>
+        </p:txBody>
       </p:sp>
       <p:sp>
         <p:nvSpPr>
@@ -2705,7 +2607,7 @@
           <a:bodyPr wrap="square" lIns="0" tIns="0" rIns="0" bIns="0" rtlCol="0" anchor="ctr"/>
           <a:lstStyle/>
           <a:p>
-            <a:pPr algn="ctr" indent="0" marL="0">
+            <a:pPr marL="0" indent="0" algn="ctr">
               <a:buNone/>
             </a:pPr>
             <a:r>
@@ -2749,6 +2651,13 @@
             <a:prstDash val="solid"/>
           </a:ln>
         </p:spPr>
+        <p:txBody>
+          <a:bodyPr/>
+          <a:lstStyle/>
+          <a:p>
+            <a:endParaRPr lang="it-IT"/>
+          </a:p>
+        </p:txBody>
       </p:sp>
       <p:sp>
         <p:nvSpPr>
@@ -2771,7 +2680,7 @@
           <a:bodyPr wrap="square" lIns="0" tIns="0" rIns="0" bIns="0" rtlCol="0" anchor="ctr"/>
           <a:lstStyle/>
           <a:p>
-            <a:pPr algn="ctr" indent="0" marL="0">
+            <a:pPr marL="0" indent="0" algn="ctr">
               <a:buNone/>
             </a:pPr>
             <a:r>
@@ -2815,6 +2724,13 @@
             <a:prstDash val="solid"/>
           </a:ln>
         </p:spPr>
+        <p:txBody>
+          <a:bodyPr/>
+          <a:lstStyle/>
+          <a:p>
+            <a:endParaRPr lang="it-IT"/>
+          </a:p>
+        </p:txBody>
       </p:sp>
       <p:sp>
         <p:nvSpPr>
@@ -2837,7 +2753,7 @@
           <a:bodyPr wrap="square" lIns="0" tIns="0" rIns="0" bIns="0" rtlCol="0" anchor="ctr"/>
           <a:lstStyle/>
           <a:p>
-            <a:pPr algn="ctr" indent="0" marL="0">
+            <a:pPr marL="0" indent="0" algn="ctr">
               <a:buNone/>
             </a:pPr>
             <a:r>
@@ -2881,6 +2797,13 @@
             <a:prstDash val="solid"/>
           </a:ln>
         </p:spPr>
+        <p:txBody>
+          <a:bodyPr/>
+          <a:lstStyle/>
+          <a:p>
+            <a:endParaRPr lang="it-IT"/>
+          </a:p>
+        </p:txBody>
       </p:sp>
       <p:sp>
         <p:nvSpPr>
@@ -2903,7 +2826,7 @@
           <a:bodyPr wrap="square" lIns="0" tIns="0" rIns="0" bIns="0" rtlCol="0" anchor="ctr"/>
           <a:lstStyle/>
           <a:p>
-            <a:pPr algn="ctr" indent="0" marL="0">
+            <a:pPr marL="0" indent="0" algn="ctr">
               <a:buNone/>
             </a:pPr>
             <a:r>
@@ -2947,6 +2870,13 @@
             <a:prstDash val="solid"/>
           </a:ln>
         </p:spPr>
+        <p:txBody>
+          <a:bodyPr/>
+          <a:lstStyle/>
+          <a:p>
+            <a:endParaRPr lang="it-IT"/>
+          </a:p>
+        </p:txBody>
       </p:sp>
       <p:sp>
         <p:nvSpPr>
@@ -2969,7 +2899,7 @@
           <a:bodyPr wrap="square" lIns="0" tIns="0" rIns="0" bIns="0" rtlCol="0" anchor="ctr"/>
           <a:lstStyle/>
           <a:p>
-            <a:pPr algn="ctr" indent="0" marL="0">
+            <a:pPr marL="0" indent="0" algn="ctr">
               <a:buNone/>
             </a:pPr>
             <a:r>
@@ -3013,6 +2943,13 @@
             <a:prstDash val="solid"/>
           </a:ln>
         </p:spPr>
+        <p:txBody>
+          <a:bodyPr/>
+          <a:lstStyle/>
+          <a:p>
+            <a:endParaRPr lang="it-IT"/>
+          </a:p>
+        </p:txBody>
       </p:sp>
       <p:sp>
         <p:nvSpPr>
@@ -3035,7 +2972,7 @@
           <a:bodyPr wrap="square" lIns="0" tIns="0" rIns="0" bIns="0" rtlCol="0" anchor="ctr"/>
           <a:lstStyle/>
           <a:p>
-            <a:pPr algn="ctr" indent="0" marL="0">
+            <a:pPr marL="0" indent="0" algn="ctr">
               <a:buNone/>
             </a:pPr>
             <a:r>
@@ -3079,6 +3016,13 @@
             <a:prstDash val="solid"/>
           </a:ln>
         </p:spPr>
+        <p:txBody>
+          <a:bodyPr/>
+          <a:lstStyle/>
+          <a:p>
+            <a:endParaRPr lang="it-IT"/>
+          </a:p>
+        </p:txBody>
       </p:sp>
       <p:sp>
         <p:nvSpPr>
@@ -3101,7 +3045,7 @@
           <a:bodyPr wrap="square" lIns="0" tIns="0" rIns="0" bIns="0" rtlCol="0" anchor="ctr"/>
           <a:lstStyle/>
           <a:p>
-            <a:pPr algn="ctr" indent="0" marL="0">
+            <a:pPr marL="0" indent="0" algn="ctr">
               <a:buNone/>
             </a:pPr>
             <a:r>
@@ -3145,6 +3089,13 @@
             <a:prstDash val="solid"/>
           </a:ln>
         </p:spPr>
+        <p:txBody>
+          <a:bodyPr/>
+          <a:lstStyle/>
+          <a:p>
+            <a:endParaRPr lang="it-IT"/>
+          </a:p>
+        </p:txBody>
       </p:sp>
       <p:sp>
         <p:nvSpPr>
@@ -3167,7 +3118,7 @@
           <a:bodyPr wrap="square" lIns="0" tIns="0" rIns="0" bIns="0" rtlCol="0" anchor="ctr"/>
           <a:lstStyle/>
           <a:p>
-            <a:pPr algn="ctr" indent="0" marL="0">
+            <a:pPr marL="0" indent="0" algn="ctr">
               <a:buNone/>
             </a:pPr>
             <a:r>
@@ -3211,6 +3162,13 @@
             <a:prstDash val="solid"/>
           </a:ln>
         </p:spPr>
+        <p:txBody>
+          <a:bodyPr/>
+          <a:lstStyle/>
+          <a:p>
+            <a:endParaRPr lang="it-IT"/>
+          </a:p>
+        </p:txBody>
       </p:sp>
       <p:sp>
         <p:nvSpPr>
@@ -3233,7 +3191,7 @@
           <a:bodyPr wrap="square" lIns="0" tIns="0" rIns="0" bIns="0" rtlCol="0" anchor="ctr"/>
           <a:lstStyle/>
           <a:p>
-            <a:pPr algn="ctr" indent="0" marL="0">
+            <a:pPr marL="0" indent="0" algn="ctr">
               <a:buNone/>
             </a:pPr>
             <a:r>
@@ -3277,6 +3235,13 @@
             <a:prstDash val="solid"/>
           </a:ln>
         </p:spPr>
+        <p:txBody>
+          <a:bodyPr/>
+          <a:lstStyle/>
+          <a:p>
+            <a:endParaRPr lang="it-IT"/>
+          </a:p>
+        </p:txBody>
       </p:sp>
       <p:sp>
         <p:nvSpPr>
@@ -3299,7 +3264,7 @@
           <a:bodyPr wrap="square" lIns="0" tIns="0" rIns="0" bIns="0" rtlCol="0" anchor="ctr"/>
           <a:lstStyle/>
           <a:p>
-            <a:pPr algn="ctr" indent="0" marL="0">
+            <a:pPr marL="0" indent="0" algn="ctr">
               <a:buNone/>
             </a:pPr>
             <a:r>
@@ -3343,6 +3308,13 @@
             <a:prstDash val="solid"/>
           </a:ln>
         </p:spPr>
+        <p:txBody>
+          <a:bodyPr/>
+          <a:lstStyle/>
+          <a:p>
+            <a:endParaRPr lang="it-IT"/>
+          </a:p>
+        </p:txBody>
       </p:sp>
       <p:sp>
         <p:nvSpPr>
@@ -3365,7 +3337,7 @@
           <a:bodyPr wrap="square" lIns="0" tIns="0" rIns="0" bIns="0" rtlCol="0" anchor="ctr"/>
           <a:lstStyle/>
           <a:p>
-            <a:pPr algn="ctr" indent="0" marL="0">
+            <a:pPr marL="0" indent="0" algn="ctr">
               <a:buNone/>
             </a:pPr>
             <a:r>
@@ -3409,6 +3381,13 @@
             <a:prstDash val="solid"/>
           </a:ln>
         </p:spPr>
+        <p:txBody>
+          <a:bodyPr/>
+          <a:lstStyle/>
+          <a:p>
+            <a:endParaRPr lang="it-IT"/>
+          </a:p>
+        </p:txBody>
       </p:sp>
       <p:sp>
         <p:nvSpPr>
@@ -3431,7 +3410,7 @@
           <a:bodyPr wrap="square" lIns="0" tIns="0" rIns="0" bIns="0" rtlCol="0" anchor="ctr"/>
           <a:lstStyle/>
           <a:p>
-            <a:pPr algn="ctr" indent="0" marL="0">
+            <a:pPr marL="0" indent="0" algn="ctr">
               <a:buNone/>
             </a:pPr>
             <a:r>
@@ -3475,6 +3454,13 @@
             <a:prstDash val="solid"/>
           </a:ln>
         </p:spPr>
+        <p:txBody>
+          <a:bodyPr/>
+          <a:lstStyle/>
+          <a:p>
+            <a:endParaRPr lang="it-IT"/>
+          </a:p>
+        </p:txBody>
       </p:sp>
       <p:sp>
         <p:nvSpPr>
@@ -3497,7 +3483,7 @@
           <a:bodyPr wrap="square" lIns="0" tIns="0" rIns="0" bIns="0" rtlCol="0" anchor="ctr"/>
           <a:lstStyle/>
           <a:p>
-            <a:pPr algn="ctr" indent="0" marL="0">
+            <a:pPr marL="0" indent="0" algn="ctr">
               <a:buNone/>
             </a:pPr>
             <a:r>
@@ -3541,6 +3527,13 @@
             <a:prstDash val="solid"/>
           </a:ln>
         </p:spPr>
+        <p:txBody>
+          <a:bodyPr/>
+          <a:lstStyle/>
+          <a:p>
+            <a:endParaRPr lang="it-IT"/>
+          </a:p>
+        </p:txBody>
       </p:sp>
       <p:sp>
         <p:nvSpPr>
@@ -3563,7 +3556,7 @@
           <a:bodyPr wrap="square" lIns="0" tIns="0" rIns="0" bIns="0" rtlCol="0" anchor="ctr"/>
           <a:lstStyle/>
           <a:p>
-            <a:pPr algn="ctr" indent="0" marL="0">
+            <a:pPr marL="0" indent="0" algn="ctr">
               <a:buNone/>
             </a:pPr>
             <a:r>
@@ -3607,6 +3600,13 @@
             <a:prstDash val="solid"/>
           </a:ln>
         </p:spPr>
+        <p:txBody>
+          <a:bodyPr/>
+          <a:lstStyle/>
+          <a:p>
+            <a:endParaRPr lang="it-IT"/>
+          </a:p>
+        </p:txBody>
       </p:sp>
       <p:sp>
         <p:nvSpPr>
@@ -3629,7 +3629,7 @@
           <a:bodyPr wrap="square" lIns="0" tIns="0" rIns="0" bIns="0" rtlCol="0" anchor="ctr"/>
           <a:lstStyle/>
           <a:p>
-            <a:pPr algn="ctr" indent="0" marL="0">
+            <a:pPr marL="0" indent="0" algn="ctr">
               <a:buNone/>
             </a:pPr>
             <a:r>
@@ -3668,7 +3668,7 @@
           <a:bodyPr wrap="square" lIns="0" tIns="0" rIns="0" bIns="0" rtlCol="0" anchor="ctr"/>
           <a:lstStyle/>
           <a:p>
-            <a:pPr algn="r" indent="0" marL="0">
+            <a:pPr marL="0" indent="0" algn="r">
               <a:buNone/>
             </a:pPr>
             <a:r>
@@ -3712,6 +3712,13 @@
             <a:prstDash val="solid"/>
           </a:ln>
         </p:spPr>
+        <p:txBody>
+          <a:bodyPr/>
+          <a:lstStyle/>
+          <a:p>
+            <a:endParaRPr lang="it-IT"/>
+          </a:p>
+        </p:txBody>
       </p:sp>
       <p:sp>
         <p:nvSpPr>
@@ -3734,7 +3741,7 @@
           <a:bodyPr wrap="square" lIns="0" tIns="0" rIns="0" bIns="0" rtlCol="0" anchor="ctr"/>
           <a:lstStyle/>
           <a:p>
-            <a:pPr algn="ctr" indent="0" marL="0">
+            <a:pPr marL="0" indent="0" algn="ctr">
               <a:buNone/>
             </a:pPr>
             <a:r>
@@ -3778,6 +3785,13 @@
             <a:prstDash val="solid"/>
           </a:ln>
         </p:spPr>
+        <p:txBody>
+          <a:bodyPr/>
+          <a:lstStyle/>
+          <a:p>
+            <a:endParaRPr lang="it-IT"/>
+          </a:p>
+        </p:txBody>
       </p:sp>
       <p:sp>
         <p:nvSpPr>
@@ -3800,7 +3814,7 @@
           <a:bodyPr wrap="square" lIns="0" tIns="0" rIns="0" bIns="0" rtlCol="0" anchor="ctr"/>
           <a:lstStyle/>
           <a:p>
-            <a:pPr algn="ctr" indent="0" marL="0">
+            <a:pPr marL="0" indent="0" algn="ctr">
               <a:buNone/>
             </a:pPr>
             <a:r>
@@ -3844,6 +3858,13 @@
             <a:prstDash val="solid"/>
           </a:ln>
         </p:spPr>
+        <p:txBody>
+          <a:bodyPr/>
+          <a:lstStyle/>
+          <a:p>
+            <a:endParaRPr lang="it-IT"/>
+          </a:p>
+        </p:txBody>
       </p:sp>
       <p:sp>
         <p:nvSpPr>
@@ -3866,7 +3887,7 @@
           <a:bodyPr wrap="square" lIns="0" tIns="0" rIns="0" bIns="0" rtlCol="0" anchor="ctr"/>
           <a:lstStyle/>
           <a:p>
-            <a:pPr algn="ctr" indent="0" marL="0">
+            <a:pPr marL="0" indent="0" algn="ctr">
               <a:buNone/>
             </a:pPr>
             <a:r>
@@ -3910,6 +3931,13 @@
             <a:prstDash val="solid"/>
           </a:ln>
         </p:spPr>
+        <p:txBody>
+          <a:bodyPr/>
+          <a:lstStyle/>
+          <a:p>
+            <a:endParaRPr lang="it-IT"/>
+          </a:p>
+        </p:txBody>
       </p:sp>
       <p:sp>
         <p:nvSpPr>
@@ -3932,7 +3960,7 @@
           <a:bodyPr wrap="square" lIns="0" tIns="0" rIns="0" bIns="0" rtlCol="0" anchor="ctr"/>
           <a:lstStyle/>
           <a:p>
-            <a:pPr algn="ctr" indent="0" marL="0">
+            <a:pPr marL="0" indent="0" algn="ctr">
               <a:buNone/>
             </a:pPr>
             <a:r>
@@ -3976,6 +4004,13 @@
             <a:prstDash val="solid"/>
           </a:ln>
         </p:spPr>
+        <p:txBody>
+          <a:bodyPr/>
+          <a:lstStyle/>
+          <a:p>
+            <a:endParaRPr lang="it-IT"/>
+          </a:p>
+        </p:txBody>
       </p:sp>
       <p:sp>
         <p:nvSpPr>
@@ -3998,7 +4033,7 @@
           <a:bodyPr wrap="square" lIns="0" tIns="0" rIns="0" bIns="0" rtlCol="0" anchor="ctr"/>
           <a:lstStyle/>
           <a:p>
-            <a:pPr algn="ctr" indent="0" marL="0">
+            <a:pPr marL="0" indent="0" algn="ctr">
               <a:buNone/>
             </a:pPr>
             <a:r>
@@ -4042,6 +4077,13 @@
             <a:prstDash val="solid"/>
           </a:ln>
         </p:spPr>
+        <p:txBody>
+          <a:bodyPr/>
+          <a:lstStyle/>
+          <a:p>
+            <a:endParaRPr lang="it-IT"/>
+          </a:p>
+        </p:txBody>
       </p:sp>
       <p:sp>
         <p:nvSpPr>
@@ -4064,7 +4106,7 @@
           <a:bodyPr wrap="square" lIns="0" tIns="0" rIns="0" bIns="0" rtlCol="0" anchor="ctr"/>
           <a:lstStyle/>
           <a:p>
-            <a:pPr algn="ctr" indent="0" marL="0">
+            <a:pPr marL="0" indent="0" algn="ctr">
               <a:buNone/>
             </a:pPr>
             <a:r>
@@ -4108,6 +4150,13 @@
             <a:prstDash val="solid"/>
           </a:ln>
         </p:spPr>
+        <p:txBody>
+          <a:bodyPr/>
+          <a:lstStyle/>
+          <a:p>
+            <a:endParaRPr lang="it-IT"/>
+          </a:p>
+        </p:txBody>
       </p:sp>
       <p:sp>
         <p:nvSpPr>
@@ -4130,7 +4179,7 @@
           <a:bodyPr wrap="square" lIns="0" tIns="0" rIns="0" bIns="0" rtlCol="0" anchor="ctr"/>
           <a:lstStyle/>
           <a:p>
-            <a:pPr algn="ctr" indent="0" marL="0">
+            <a:pPr marL="0" indent="0" algn="ctr">
               <a:buNone/>
             </a:pPr>
             <a:r>
@@ -4174,6 +4223,13 @@
             <a:prstDash val="solid"/>
           </a:ln>
         </p:spPr>
+        <p:txBody>
+          <a:bodyPr/>
+          <a:lstStyle/>
+          <a:p>
+            <a:endParaRPr lang="it-IT"/>
+          </a:p>
+        </p:txBody>
       </p:sp>
       <p:sp>
         <p:nvSpPr>
@@ -4196,7 +4252,7 @@
           <a:bodyPr wrap="square" lIns="0" tIns="0" rIns="0" bIns="0" rtlCol="0" anchor="ctr"/>
           <a:lstStyle/>
           <a:p>
-            <a:pPr algn="ctr" indent="0" marL="0">
+            <a:pPr marL="0" indent="0" algn="ctr">
               <a:buNone/>
             </a:pPr>
             <a:r>
@@ -4240,6 +4296,13 @@
             <a:prstDash val="solid"/>
           </a:ln>
         </p:spPr>
+        <p:txBody>
+          <a:bodyPr/>
+          <a:lstStyle/>
+          <a:p>
+            <a:endParaRPr lang="it-IT"/>
+          </a:p>
+        </p:txBody>
       </p:sp>
       <p:sp>
         <p:nvSpPr>
@@ -4262,7 +4325,7 @@
           <a:bodyPr wrap="square" lIns="0" tIns="0" rIns="0" bIns="0" rtlCol="0" anchor="ctr"/>
           <a:lstStyle/>
           <a:p>
-            <a:pPr algn="ctr" indent="0" marL="0">
+            <a:pPr marL="0" indent="0" algn="ctr">
               <a:buNone/>
             </a:pPr>
             <a:r>
@@ -4306,6 +4369,13 @@
             <a:prstDash val="solid"/>
           </a:ln>
         </p:spPr>
+        <p:txBody>
+          <a:bodyPr/>
+          <a:lstStyle/>
+          <a:p>
+            <a:endParaRPr lang="it-IT"/>
+          </a:p>
+        </p:txBody>
       </p:sp>
       <p:sp>
         <p:nvSpPr>
@@ -4328,7 +4398,7 @@
           <a:bodyPr wrap="square" lIns="0" tIns="0" rIns="0" bIns="0" rtlCol="0" anchor="ctr"/>
           <a:lstStyle/>
           <a:p>
-            <a:pPr algn="ctr" indent="0" marL="0">
+            <a:pPr marL="0" indent="0" algn="ctr">
               <a:buNone/>
             </a:pPr>
             <a:r>
@@ -4372,6 +4442,13 @@
             <a:prstDash val="solid"/>
           </a:ln>
         </p:spPr>
+        <p:txBody>
+          <a:bodyPr/>
+          <a:lstStyle/>
+          <a:p>
+            <a:endParaRPr lang="it-IT"/>
+          </a:p>
+        </p:txBody>
       </p:sp>
       <p:sp>
         <p:nvSpPr>
@@ -4394,7 +4471,7 @@
           <a:bodyPr wrap="square" lIns="0" tIns="0" rIns="0" bIns="0" rtlCol="0" anchor="ctr"/>
           <a:lstStyle/>
           <a:p>
-            <a:pPr algn="ctr" indent="0" marL="0">
+            <a:pPr marL="0" indent="0" algn="ctr">
               <a:buNone/>
             </a:pPr>
             <a:r>
@@ -4438,6 +4515,13 @@
             <a:prstDash val="solid"/>
           </a:ln>
         </p:spPr>
+        <p:txBody>
+          <a:bodyPr/>
+          <a:lstStyle/>
+          <a:p>
+            <a:endParaRPr lang="it-IT"/>
+          </a:p>
+        </p:txBody>
       </p:sp>
       <p:sp>
         <p:nvSpPr>
@@ -4460,7 +4544,7 @@
           <a:bodyPr wrap="square" lIns="0" tIns="0" rIns="0" bIns="0" rtlCol="0" anchor="ctr"/>
           <a:lstStyle/>
           <a:p>
-            <a:pPr algn="ctr" indent="0" marL="0">
+            <a:pPr marL="0" indent="0" algn="ctr">
               <a:buNone/>
             </a:pPr>
             <a:r>
@@ -4504,6 +4588,13 @@
             <a:prstDash val="solid"/>
           </a:ln>
         </p:spPr>
+        <p:txBody>
+          <a:bodyPr/>
+          <a:lstStyle/>
+          <a:p>
+            <a:endParaRPr lang="it-IT"/>
+          </a:p>
+        </p:txBody>
       </p:sp>
       <p:sp>
         <p:nvSpPr>
@@ -4526,7 +4617,7 @@
           <a:bodyPr wrap="square" lIns="0" tIns="0" rIns="0" bIns="0" rtlCol="0" anchor="ctr"/>
           <a:lstStyle/>
           <a:p>
-            <a:pPr algn="ctr" indent="0" marL="0">
+            <a:pPr marL="0" indent="0" algn="ctr">
               <a:buNone/>
             </a:pPr>
             <a:r>
@@ -4570,6 +4661,13 @@
             <a:prstDash val="solid"/>
           </a:ln>
         </p:spPr>
+        <p:txBody>
+          <a:bodyPr/>
+          <a:lstStyle/>
+          <a:p>
+            <a:endParaRPr lang="it-IT"/>
+          </a:p>
+        </p:txBody>
       </p:sp>
       <p:sp>
         <p:nvSpPr>
@@ -4592,7 +4690,7 @@
           <a:bodyPr wrap="square" lIns="0" tIns="0" rIns="0" bIns="0" rtlCol="0" anchor="ctr"/>
           <a:lstStyle/>
           <a:p>
-            <a:pPr algn="ctr" indent="0" marL="0">
+            <a:pPr marL="0" indent="0" algn="ctr">
               <a:buNone/>
             </a:pPr>
             <a:r>
@@ -4636,6 +4734,13 @@
             <a:prstDash val="solid"/>
           </a:ln>
         </p:spPr>
+        <p:txBody>
+          <a:bodyPr/>
+          <a:lstStyle/>
+          <a:p>
+            <a:endParaRPr lang="it-IT"/>
+          </a:p>
+        </p:txBody>
       </p:sp>
       <p:sp>
         <p:nvSpPr>
@@ -4658,7 +4763,7 @@
           <a:bodyPr wrap="square" lIns="0" tIns="0" rIns="0" bIns="0" rtlCol="0" anchor="ctr"/>
           <a:lstStyle/>
           <a:p>
-            <a:pPr algn="ctr" indent="0" marL="0">
+            <a:pPr marL="0" indent="0" algn="ctr">
               <a:buNone/>
             </a:pPr>
             <a:r>
@@ -4702,6 +4807,13 @@
             <a:prstDash val="solid"/>
           </a:ln>
         </p:spPr>
+        <p:txBody>
+          <a:bodyPr/>
+          <a:lstStyle/>
+          <a:p>
+            <a:endParaRPr lang="it-IT"/>
+          </a:p>
+        </p:txBody>
       </p:sp>
       <p:sp>
         <p:nvSpPr>
@@ -4724,7 +4836,7 @@
           <a:bodyPr wrap="square" lIns="0" tIns="0" rIns="0" bIns="0" rtlCol="0" anchor="ctr"/>
           <a:lstStyle/>
           <a:p>
-            <a:pPr algn="ctr" indent="0" marL="0">
+            <a:pPr marL="0" indent="0" algn="ctr">
               <a:buNone/>
             </a:pPr>
             <a:r>
@@ -4763,7 +4875,7 @@
           <a:bodyPr wrap="square" lIns="0" tIns="0" rIns="0" bIns="0" rtlCol="0" anchor="ctr"/>
           <a:lstStyle/>
           <a:p>
-            <a:pPr indent="0" marL="0">
+            <a:pPr marL="0" indent="0">
               <a:buNone/>
             </a:pPr>
             <a:r>
@@ -4802,7 +4914,7 @@
           <a:bodyPr wrap="square" lIns="0" tIns="0" rIns="0" bIns="0" rtlCol="0" anchor="ctr"/>
           <a:lstStyle/>
           <a:p>
-            <a:pPr indent="0" marL="0">
+            <a:pPr marL="0" indent="0">
               <a:buNone/>
             </a:pPr>
             <a:r>
@@ -4814,7 +4926,18 @@
                 <a:ea typeface="Calibri" pitchFamily="34" charset="-122"/>
                 <a:cs typeface="Calibri" pitchFamily="34" charset="-120"/>
               </a:rPr>
-              <a:t>Costanza Ferrari  ·  Michele De Fusco  ·  Luca Cuconato</a:t>
+              <a:t>Costanza Ferrari  ·  Michele </a:t>
+            </a:r>
+            <a:r>
+              <a:rPr lang="en-US" sz="1500" b="1">
+                <a:solidFill>
+                  <a:srgbClr val="C9D1D9"/>
+                </a:solidFill>
+                <a:latin typeface="Calibri" pitchFamily="34" charset="0"/>
+                <a:ea typeface="Calibri" pitchFamily="34" charset="-122"/>
+                <a:cs typeface="Calibri" pitchFamily="34" charset="-120"/>
+              </a:rPr>
+              <a:t>De Fusco</a:t>
             </a:r>
             <a:endParaRPr lang="en-US" sz="1500" dirty="0"/>
           </a:p>
@@ -4841,7 +4964,7 @@
           <a:bodyPr wrap="square" lIns="0" tIns="0" rIns="0" bIns="0" rtlCol="0" anchor="ctr"/>
           <a:lstStyle/>
           <a:p>
-            <a:pPr indent="0" marL="0">
+            <a:pPr marL="0" indent="0">
               <a:buNone/>
             </a:pPr>
             <a:r>
@@ -4875,6 +4998,7 @@
         <a:solidFill>
           <a:srgbClr val="FFFFFF"/>
         </a:solidFill>
+        <a:effectLst/>
       </p:bgPr>
     </p:bg>
     <p:spTree>
@@ -4912,11 +5036,11 @@
           <a:bodyPr wrap="square" lIns="0" tIns="0" rIns="0" bIns="0" rtlCol="0" anchor="ctr"/>
           <a:lstStyle/>
           <a:p>
-            <a:pPr indent="0" marL="0">
-              <a:buNone/>
-            </a:pPr>
-            <a:r>
-              <a:rPr lang="en-US" sz="1100" b="1" spc="300" kern="0" dirty="0">
+            <a:pPr marL="0" indent="0">
+              <a:buNone/>
+            </a:pPr>
+            <a:r>
+              <a:rPr lang="en-US" sz="1100" b="1" kern="0" spc="300" dirty="0">
                 <a:solidFill>
                   <a:srgbClr val="0B7A63"/>
                 </a:solidFill>
@@ -4951,7 +5075,7 @@
           <a:bodyPr wrap="square" lIns="0" tIns="0" rIns="0" bIns="0" rtlCol="0" anchor="ctr"/>
           <a:lstStyle/>
           <a:p>
-            <a:pPr indent="0" marL="0">
+            <a:pPr marL="0" indent="0">
               <a:buNone/>
             </a:pPr>
             <a:r>
@@ -4971,7 +5095,7 @@
       </p:sp>
       <p:graphicFrame>
         <p:nvGraphicFramePr>
-          <p:cNvPr id="4" name="Chart 0" descr=""/>
+          <p:cNvPr id="4" name="Chart 0"/>
           <p:cNvGraphicFramePr/>
           <p:nvPr/>
         </p:nvGraphicFramePr>
@@ -4979,9 +5103,9 @@
           <a:off x="594360" y="1554480"/>
           <a:ext cx="7406640" cy="4480560"/>
         </p:xfrm>
-        <a:graphic xmlns:a="http://schemas.openxmlformats.org/drawingml/2006/main">
+        <a:graphic>
           <a:graphicData uri="http://schemas.openxmlformats.org/drawingml/2006/chart">
-            <c:chart xmlns:c="http://schemas.openxmlformats.org/drawingml/2006/chart" r:id="rId1"/>
+            <c:chart xmlns:c="http://schemas.openxmlformats.org/drawingml/2006/chart" xmlns:r="http://schemas.openxmlformats.org/officeDocument/2006/relationships" r:id="rId3"/>
           </a:graphicData>
         </a:graphic>
       </p:graphicFrame>
@@ -5011,13 +5135,20 @@
             <a:prstDash val="solid"/>
           </a:ln>
           <a:effectLst>
-            <a:outerShdw sx="100000" sy="100000" kx="0" ky="0" algn="bl" rotWithShape="0" blurRad="88900" dist="25400" dir="2700000">
+            <a:outerShdw blurRad="88900" dist="25400" dir="2700000" algn="bl" rotWithShape="0">
               <a:srgbClr val="000000">
                 <a:alpha val="13000"/>
               </a:srgbClr>
             </a:outerShdw>
           </a:effectLst>
         </p:spPr>
+        <p:txBody>
+          <a:bodyPr/>
+          <a:lstStyle/>
+          <a:p>
+            <a:endParaRPr lang="it-IT"/>
+          </a:p>
+        </p:txBody>
       </p:sp>
       <p:sp>
         <p:nvSpPr>
@@ -5040,7 +5171,7 @@
           <a:bodyPr wrap="square" lIns="0" tIns="0" rIns="0" bIns="0" rtlCol="0" anchor="ctr"/>
           <a:lstStyle/>
           <a:p>
-            <a:pPr indent="0" marL="0">
+            <a:pPr marL="0" indent="0">
               <a:buNone/>
             </a:pPr>
             <a:r>
@@ -5079,7 +5210,7 @@
           <a:bodyPr wrap="square" lIns="0" tIns="0" rIns="0" bIns="0" rtlCol="0" anchor="ctr"/>
           <a:lstStyle/>
           <a:p>
-            <a:pPr indent="0" marL="0">
+            <a:pPr marL="0" indent="0">
               <a:buNone/>
             </a:pPr>
             <a:r>
@@ -5096,7 +5227,7 @@
             <a:endParaRPr lang="en-US" sz="1200" dirty="0"/>
           </a:p>
           <a:p>
-            <a:pPr indent="0" marL="0">
+            <a:pPr marL="0" indent="0">
               <a:buNone/>
             </a:pPr>
             <a:r>
@@ -5140,13 +5271,20 @@
             <a:prstDash val="solid"/>
           </a:ln>
           <a:effectLst>
-            <a:outerShdw sx="100000" sy="100000" kx="0" ky="0" algn="bl" rotWithShape="0" blurRad="88900" dist="25400" dir="2700000">
+            <a:outerShdw blurRad="88900" dist="25400" dir="2700000" algn="bl" rotWithShape="0">
               <a:srgbClr val="000000">
                 <a:alpha val="13000"/>
               </a:srgbClr>
             </a:outerShdw>
           </a:effectLst>
         </p:spPr>
+        <p:txBody>
+          <a:bodyPr/>
+          <a:lstStyle/>
+          <a:p>
+            <a:endParaRPr lang="it-IT"/>
+          </a:p>
+        </p:txBody>
       </p:sp>
       <p:sp>
         <p:nvSpPr>
@@ -5169,7 +5307,7 @@
           <a:bodyPr wrap="square" lIns="0" tIns="0" rIns="0" bIns="0" rtlCol="0" anchor="ctr"/>
           <a:lstStyle/>
           <a:p>
-            <a:pPr indent="0" marL="0">
+            <a:pPr marL="0" indent="0">
               <a:buNone/>
             </a:pPr>
             <a:r>
@@ -5208,7 +5346,7 @@
           <a:bodyPr wrap="square" lIns="0" tIns="0" rIns="0" bIns="0" rtlCol="0" anchor="ctr"/>
           <a:lstStyle/>
           <a:p>
-            <a:pPr indent="0" marL="0">
+            <a:pPr marL="0" indent="0">
               <a:buNone/>
             </a:pPr>
             <a:r>
@@ -5225,7 +5363,7 @@
             <a:endParaRPr lang="en-US" sz="1200" dirty="0"/>
           </a:p>
           <a:p>
-            <a:pPr indent="0" marL="0">
+            <a:pPr marL="0" indent="0">
               <a:buNone/>
             </a:pPr>
             <a:r>
@@ -5264,7 +5402,7 @@
           <a:bodyPr wrap="square" lIns="0" tIns="0" rIns="0" bIns="0" rtlCol="0" anchor="ctr"/>
           <a:lstStyle/>
           <a:p>
-            <a:pPr indent="0" marL="0">
+            <a:pPr marL="0" indent="0">
               <a:buNone/>
             </a:pPr>
             <a:r>
@@ -5276,7 +5414,7 @@
                 <a:ea typeface="Calibri" pitchFamily="34" charset="-122"/>
                 <a:cs typeface="Calibri" pitchFamily="34" charset="-120"/>
               </a:rPr>
-              <a:t>Workload: 2000 query × 2000 punti, D = 256, h = 16, k = 8, x = 64 — valori da report_completo.txt (generato dal launcher automatico).</a:t>
+              <a:t>Workload: 2000 query × 2000 punti, D = 256, h = 16, k = 8, x = 64 — valori da report_completo.txt.</a:t>
             </a:r>
             <a:endParaRPr lang="en-US" sz="1150" dirty="0"/>
           </a:p>
@@ -5298,6 +5436,7 @@
         <a:solidFill>
           <a:srgbClr val="FFFFFF"/>
         </a:solidFill>
+        <a:effectLst/>
       </p:bgPr>
     </p:bg>
     <p:spTree>
@@ -5335,11 +5474,11 @@
           <a:bodyPr wrap="square" lIns="0" tIns="0" rIns="0" bIns="0" rtlCol="0" anchor="ctr"/>
           <a:lstStyle/>
           <a:p>
-            <a:pPr indent="0" marL="0">
-              <a:buNone/>
-            </a:pPr>
-            <a:r>
-              <a:rPr lang="en-US" sz="1100" b="1" spc="300" kern="0" dirty="0">
+            <a:pPr marL="0" indent="0">
+              <a:buNone/>
+            </a:pPr>
+            <a:r>
+              <a:rPr lang="en-US" sz="1100" b="1" kern="0" spc="300" dirty="0">
                 <a:solidFill>
                   <a:srgbClr val="0B7A63"/>
                 </a:solidFill>
@@ -5374,7 +5513,7 @@
           <a:bodyPr wrap="square" lIns="0" tIns="0" rIns="0" bIns="0" rtlCol="0" anchor="ctr"/>
           <a:lstStyle/>
           <a:p>
-            <a:pPr indent="0" marL="0">
+            <a:pPr marL="0" indent="0">
               <a:buNone/>
             </a:pPr>
             <a:r>
@@ -5418,13 +5557,20 @@
             <a:prstDash val="solid"/>
           </a:ln>
           <a:effectLst>
-            <a:outerShdw sx="100000" sy="100000" kx="0" ky="0" algn="bl" rotWithShape="0" blurRad="88900" dist="25400" dir="2700000">
+            <a:outerShdw blurRad="88900" dist="25400" dir="2700000" algn="bl" rotWithShape="0">
               <a:srgbClr val="000000">
                 <a:alpha val="13000"/>
               </a:srgbClr>
             </a:outerShdw>
           </a:effectLst>
         </p:spPr>
+        <p:txBody>
+          <a:bodyPr/>
+          <a:lstStyle/>
+          <a:p>
+            <a:endParaRPr lang="it-IT"/>
+          </a:p>
+        </p:txBody>
       </p:sp>
       <p:sp>
         <p:nvSpPr>
@@ -5447,7 +5593,7 @@
           <a:bodyPr wrap="square" lIns="0" tIns="0" rIns="0" bIns="0" rtlCol="0" anchor="ctr"/>
           <a:lstStyle/>
           <a:p>
-            <a:pPr indent="0" marL="0">
+            <a:pPr marL="0" indent="0">
               <a:buNone/>
             </a:pPr>
             <a:r>
@@ -5486,7 +5632,7 @@
           <a:bodyPr wrap="square" lIns="0" tIns="0" rIns="0" bIns="0" rtlCol="0" anchor="ctr"/>
           <a:lstStyle/>
           <a:p>
-            <a:pPr indent="0" marL="0">
+            <a:pPr marL="0" indent="0">
               <a:buNone/>
             </a:pPr>
             <a:r>
@@ -5498,7 +5644,29 @@
                 <a:ea typeface="Calibri" pitchFamily="34" charset="-122"/>
                 <a:cs typeface="Calibri" pitchFamily="34" charset="-120"/>
               </a:rPr>
-              <a:t>13× (32 bit) e 6,9× (64 bit) sul solo cambio di motore: PSADBW batte la catena unpack+somme degli intrinseci, e il fast path D=256 elimina il controllo di ciclo.</a:t>
+              <a:t>13× (32 bit) e 6,9× (64 bit) sul solo cambio di motore: PSADBW batte la catena unpack+somme degli intrinseci, e il fast path D=256 </a:t>
+            </a:r>
+            <a:r>
+              <a:rPr lang="en-US" sz="1300" dirty="0" err="1">
+                <a:solidFill>
+                  <a:srgbClr val="171A20"/>
+                </a:solidFill>
+                <a:latin typeface="Calibri" pitchFamily="34" charset="0"/>
+                <a:ea typeface="Calibri" pitchFamily="34" charset="-122"/>
+                <a:cs typeface="Calibri" pitchFamily="34" charset="-120"/>
+              </a:rPr>
+              <a:t>elimina</a:t>
+            </a:r>
+            <a:r>
+              <a:rPr lang="en-US" sz="1300" dirty="0">
+                <a:solidFill>
+                  <a:srgbClr val="171A20"/>
+                </a:solidFill>
+                <a:latin typeface="Calibri" pitchFamily="34" charset="0"/>
+                <a:ea typeface="Calibri" pitchFamily="34" charset="-122"/>
+                <a:cs typeface="Calibri" pitchFamily="34" charset="-120"/>
+              </a:rPr>
+              <a:t> il controllo di ciclo.</a:t>
             </a:r>
             <a:endParaRPr lang="en-US" sz="1300" dirty="0"/>
           </a:p>
@@ -5530,13 +5698,20 @@
             <a:prstDash val="solid"/>
           </a:ln>
           <a:effectLst>
-            <a:outerShdw sx="100000" sy="100000" kx="0" ky="0" algn="bl" rotWithShape="0" blurRad="88900" dist="25400" dir="2700000">
+            <a:outerShdw blurRad="88900" dist="25400" dir="2700000" algn="bl" rotWithShape="0">
               <a:srgbClr val="000000">
                 <a:alpha val="13000"/>
               </a:srgbClr>
             </a:outerShdw>
           </a:effectLst>
         </p:spPr>
+        <p:txBody>
+          <a:bodyPr/>
+          <a:lstStyle/>
+          <a:p>
+            <a:endParaRPr lang="it-IT"/>
+          </a:p>
+        </p:txBody>
       </p:sp>
       <p:sp>
         <p:nvSpPr>
@@ -5559,7 +5734,7 @@
           <a:bodyPr wrap="square" lIns="0" tIns="0" rIns="0" bIns="0" rtlCol="0" anchor="ctr"/>
           <a:lstStyle/>
           <a:p>
-            <a:pPr indent="0" marL="0">
+            <a:pPr marL="0" indent="0">
               <a:buNone/>
             </a:pPr>
             <a:r>
@@ -5598,7 +5773,7 @@
           <a:bodyPr wrap="square" lIns="0" tIns="0" rIns="0" bIns="0" rtlCol="0" anchor="ctr"/>
           <a:lstStyle/>
           <a:p>
-            <a:pPr indent="0" marL="0">
+            <a:pPr marL="0" indent="0">
               <a:buNone/>
             </a:pPr>
             <a:r>
@@ -5642,13 +5817,20 @@
             <a:prstDash val="solid"/>
           </a:ln>
           <a:effectLst>
-            <a:outerShdw sx="100000" sy="100000" kx="0" ky="0" algn="bl" rotWithShape="0" blurRad="88900" dist="25400" dir="2700000">
+            <a:outerShdw blurRad="88900" dist="25400" dir="2700000" algn="bl" rotWithShape="0">
               <a:srgbClr val="000000">
                 <a:alpha val="13000"/>
               </a:srgbClr>
             </a:outerShdw>
           </a:effectLst>
         </p:spPr>
+        <p:txBody>
+          <a:bodyPr/>
+          <a:lstStyle/>
+          <a:p>
+            <a:endParaRPr lang="it-IT"/>
+          </a:p>
+        </p:txBody>
       </p:sp>
       <p:sp>
         <p:nvSpPr>
@@ -5671,7 +5853,7 @@
           <a:bodyPr wrap="square" lIns="0" tIns="0" rIns="0" bIns="0" rtlCol="0" anchor="ctr"/>
           <a:lstStyle/>
           <a:p>
-            <a:pPr indent="0" marL="0">
+            <a:pPr marL="0" indent="0">
               <a:buNone/>
             </a:pPr>
             <a:r>
@@ -5710,7 +5892,7 @@
           <a:bodyPr wrap="square" lIns="0" tIns="0" rIns="0" bIns="0" rtlCol="0" anchor="ctr"/>
           <a:lstStyle/>
           <a:p>
-            <a:pPr indent="0" marL="0">
+            <a:pPr marL="0" indent="0">
               <a:buNone/>
             </a:pPr>
             <a:r>
@@ -5754,13 +5936,20 @@
             <a:prstDash val="solid"/>
           </a:ln>
           <a:effectLst>
-            <a:outerShdw sx="100000" sy="100000" kx="0" ky="0" algn="bl" rotWithShape="0" blurRad="88900" dist="25400" dir="2700000">
+            <a:outerShdw blurRad="88900" dist="25400" dir="2700000" algn="bl" rotWithShape="0">
               <a:srgbClr val="000000">
                 <a:alpha val="13000"/>
               </a:srgbClr>
             </a:outerShdw>
           </a:effectLst>
         </p:spPr>
+        <p:txBody>
+          <a:bodyPr/>
+          <a:lstStyle/>
+          <a:p>
+            <a:endParaRPr lang="it-IT"/>
+          </a:p>
+        </p:txBody>
       </p:sp>
       <p:sp>
         <p:nvSpPr>
@@ -5783,7 +5972,7 @@
           <a:bodyPr wrap="square" lIns="0" tIns="0" rIns="0" bIns="0" rtlCol="0" anchor="ctr"/>
           <a:lstStyle/>
           <a:p>
-            <a:pPr indent="0" marL="0">
+            <a:pPr marL="0" indent="0">
               <a:buNone/>
             </a:pPr>
             <a:r>
@@ -5795,7 +5984,7 @@
                 <a:ea typeface="Arial" pitchFamily="34" charset="-122"/>
                 <a:cs typeface="Arial" pitchFamily="34" charset="-120"/>
               </a:rPr>
-              <a:t>4 · Nota metodologica</a:t>
+              <a:t>4 · Nota bene</a:t>
             </a:r>
             <a:endParaRPr lang="en-US" sz="1650" dirty="0"/>
           </a:p>
@@ -5822,7 +6011,7 @@
           <a:bodyPr wrap="square" lIns="0" tIns="0" rIns="0" bIns="0" rtlCol="0" anchor="ctr"/>
           <a:lstStyle/>
           <a:p>
-            <a:pPr indent="0" marL="0">
+            <a:pPr marL="0" indent="0">
               <a:buNone/>
             </a:pPr>
             <a:r>
@@ -5856,6 +6045,7 @@
         <a:solidFill>
           <a:srgbClr val="FFFFFF"/>
         </a:solidFill>
+        <a:effectLst/>
       </p:bgPr>
     </p:bg>
     <p:spTree>
@@ -5893,11 +6083,11 @@
           <a:bodyPr wrap="square" lIns="0" tIns="0" rIns="0" bIns="0" rtlCol="0" anchor="ctr"/>
           <a:lstStyle/>
           <a:p>
-            <a:pPr indent="0" marL="0">
-              <a:buNone/>
-            </a:pPr>
-            <a:r>
-              <a:rPr lang="en-US" sz="1100" b="1" spc="300" kern="0" dirty="0">
+            <a:pPr marL="0" indent="0">
+              <a:buNone/>
+            </a:pPr>
+            <a:r>
+              <a:rPr lang="en-US" sz="1100" b="1" kern="0" spc="300" dirty="0">
                 <a:solidFill>
                   <a:srgbClr val="0B7A63"/>
                 </a:solidFill>
@@ -5932,7 +6122,7 @@
           <a:bodyPr wrap="square" lIns="0" tIns="0" rIns="0" bIns="0" rtlCol="0" anchor="ctr"/>
           <a:lstStyle/>
           <a:p>
-            <a:pPr indent="0" marL="0">
+            <a:pPr marL="0" indent="0">
               <a:buNone/>
             </a:pPr>
             <a:r>
@@ -5976,13 +6166,20 @@
             <a:prstDash val="solid"/>
           </a:ln>
           <a:effectLst>
-            <a:outerShdw sx="100000" sy="100000" kx="0" ky="0" algn="bl" rotWithShape="0" blurRad="88900" dist="25400" dir="2700000">
+            <a:outerShdw blurRad="88900" dist="25400" dir="2700000" algn="bl" rotWithShape="0">
               <a:srgbClr val="000000">
                 <a:alpha val="13000"/>
               </a:srgbClr>
             </a:outerShdw>
           </a:effectLst>
         </p:spPr>
+        <p:txBody>
+          <a:bodyPr/>
+          <a:lstStyle/>
+          <a:p>
+            <a:endParaRPr lang="it-IT"/>
+          </a:p>
+        </p:txBody>
       </p:sp>
       <p:sp>
         <p:nvSpPr>
@@ -6005,7 +6202,7 @@
           <a:bodyPr wrap="square" lIns="0" tIns="0" rIns="0" bIns="0" rtlCol="0" anchor="ctr"/>
           <a:lstStyle/>
           <a:p>
-            <a:pPr indent="0" marL="0">
+            <a:pPr marL="0" indent="0">
               <a:buNone/>
             </a:pPr>
             <a:r>
@@ -6044,7 +6241,7 @@
           <a:bodyPr wrap="square" lIns="0" tIns="0" rIns="0" bIns="0" rtlCol="0" anchor="ctr"/>
           <a:lstStyle/>
           <a:p>
-            <a:pPr indent="0" marL="0">
+            <a:pPr marL="0" indent="0">
               <a:buNone/>
             </a:pPr>
             <a:r>
@@ -6083,7 +6280,7 @@
           <a:bodyPr wrap="square" lIns="0" tIns="0" rIns="0" bIns="0" rtlCol="0" anchor="ctr"/>
           <a:lstStyle/>
           <a:p>
-            <a:pPr algn="ctr" indent="0" marL="0">
+            <a:pPr marL="0" indent="0" algn="ctr">
               <a:buNone/>
             </a:pPr>
             <a:r>
@@ -6127,13 +6324,20 @@
             <a:prstDash val="solid"/>
           </a:ln>
           <a:effectLst>
-            <a:outerShdw sx="100000" sy="100000" kx="0" ky="0" algn="bl" rotWithShape="0" blurRad="88900" dist="25400" dir="2700000">
+            <a:outerShdw blurRad="88900" dist="25400" dir="2700000" algn="bl" rotWithShape="0">
               <a:srgbClr val="000000">
                 <a:alpha val="13000"/>
               </a:srgbClr>
             </a:outerShdw>
           </a:effectLst>
         </p:spPr>
+        <p:txBody>
+          <a:bodyPr/>
+          <a:lstStyle/>
+          <a:p>
+            <a:endParaRPr lang="it-IT"/>
+          </a:p>
+        </p:txBody>
       </p:sp>
       <p:sp>
         <p:nvSpPr>
@@ -6156,7 +6360,7 @@
           <a:bodyPr wrap="square" lIns="0" tIns="0" rIns="0" bIns="0" rtlCol="0" anchor="ctr"/>
           <a:lstStyle/>
           <a:p>
-            <a:pPr indent="0" marL="0">
+            <a:pPr marL="0" indent="0">
               <a:buNone/>
             </a:pPr>
             <a:r>
@@ -6195,7 +6399,7 @@
           <a:bodyPr wrap="square" lIns="0" tIns="0" rIns="0" bIns="0" rtlCol="0" anchor="ctr"/>
           <a:lstStyle/>
           <a:p>
-            <a:pPr indent="0" marL="0">
+            <a:pPr marL="0" indent="0">
               <a:buNone/>
             </a:pPr>
             <a:r>
@@ -6234,7 +6438,7 @@
           <a:bodyPr wrap="square" lIns="0" tIns="0" rIns="0" bIns="0" rtlCol="0" anchor="ctr"/>
           <a:lstStyle/>
           <a:p>
-            <a:pPr algn="ctr" indent="0" marL="0">
+            <a:pPr marL="0" indent="0" algn="ctr">
               <a:buNone/>
             </a:pPr>
             <a:r>
@@ -6278,13 +6482,20 @@
             <a:prstDash val="solid"/>
           </a:ln>
           <a:effectLst>
-            <a:outerShdw sx="100000" sy="100000" kx="0" ky="0" algn="bl" rotWithShape="0" blurRad="88900" dist="25400" dir="2700000">
+            <a:outerShdw blurRad="88900" dist="25400" dir="2700000" algn="bl" rotWithShape="0">
               <a:srgbClr val="000000">
                 <a:alpha val="13000"/>
               </a:srgbClr>
             </a:outerShdw>
           </a:effectLst>
         </p:spPr>
+        <p:txBody>
+          <a:bodyPr/>
+          <a:lstStyle/>
+          <a:p>
+            <a:endParaRPr lang="it-IT"/>
+          </a:p>
+        </p:txBody>
       </p:sp>
       <p:sp>
         <p:nvSpPr>
@@ -6307,7 +6518,7 @@
           <a:bodyPr wrap="square" lIns="0" tIns="0" rIns="0" bIns="0" rtlCol="0" anchor="ctr"/>
           <a:lstStyle/>
           <a:p>
-            <a:pPr indent="0" marL="0">
+            <a:pPr marL="0" indent="0">
               <a:buNone/>
             </a:pPr>
             <a:r>
@@ -6346,7 +6557,7 @@
           <a:bodyPr wrap="square" lIns="0" tIns="0" rIns="0" bIns="0" rtlCol="0" anchor="ctr"/>
           <a:lstStyle/>
           <a:p>
-            <a:pPr indent="0" marL="0">
+            <a:pPr marL="0" indent="0">
               <a:buNone/>
             </a:pPr>
             <a:r>
@@ -6385,7 +6596,7 @@
           <a:bodyPr wrap="square" lIns="0" tIns="0" rIns="0" bIns="0" rtlCol="0" anchor="ctr"/>
           <a:lstStyle/>
           <a:p>
-            <a:pPr algn="ctr" indent="0" marL="0">
+            <a:pPr marL="0" indent="0" algn="ctr">
               <a:buNone/>
             </a:pPr>
             <a:r>
@@ -6429,13 +6640,20 @@
             <a:prstDash val="solid"/>
           </a:ln>
           <a:effectLst>
-            <a:outerShdw sx="100000" sy="100000" kx="0" ky="0" algn="bl" rotWithShape="0" blurRad="88900" dist="25400" dir="2700000">
+            <a:outerShdw blurRad="88900" dist="25400" dir="2700000" algn="bl" rotWithShape="0">
               <a:srgbClr val="000000">
                 <a:alpha val="13000"/>
               </a:srgbClr>
             </a:outerShdw>
           </a:effectLst>
         </p:spPr>
+        <p:txBody>
+          <a:bodyPr/>
+          <a:lstStyle/>
+          <a:p>
+            <a:endParaRPr lang="it-IT"/>
+          </a:p>
+        </p:txBody>
       </p:sp>
       <p:sp>
         <p:nvSpPr>
@@ -6458,7 +6676,7 @@
           <a:bodyPr wrap="square" lIns="0" tIns="0" rIns="0" bIns="0" rtlCol="0" anchor="ctr"/>
           <a:lstStyle/>
           <a:p>
-            <a:pPr indent="0" marL="0">
+            <a:pPr marL="0" indent="0">
               <a:buNone/>
             </a:pPr>
             <a:r>
@@ -6497,7 +6715,7 @@
           <a:bodyPr wrap="square" lIns="0" tIns="0" rIns="0" bIns="0" rtlCol="0" anchor="ctr"/>
           <a:lstStyle/>
           <a:p>
-            <a:pPr indent="0" marL="0">
+            <a:pPr marL="0" indent="0">
               <a:buNone/>
             </a:pPr>
             <a:r>
@@ -6536,7 +6754,7 @@
           <a:bodyPr wrap="square" lIns="0" tIns="0" rIns="0" bIns="0" rtlCol="0" anchor="ctr"/>
           <a:lstStyle/>
           <a:p>
-            <a:pPr indent="0" marL="0">
+            <a:pPr marL="0" indent="0">
               <a:buNone/>
             </a:pPr>
             <a:r>
@@ -6580,6 +6798,13 @@
             <a:prstDash val="solid"/>
           </a:ln>
         </p:spPr>
+        <p:txBody>
+          <a:bodyPr/>
+          <a:lstStyle/>
+          <a:p>
+            <a:endParaRPr lang="it-IT"/>
+          </a:p>
+        </p:txBody>
       </p:sp>
       <p:sp>
         <p:nvSpPr>
@@ -6602,7 +6827,7 @@
           <a:bodyPr wrap="square" lIns="0" tIns="0" rIns="0" bIns="0" rtlCol="0" anchor="ctr"/>
           <a:lstStyle/>
           <a:p>
-            <a:pPr indent="0" marL="0">
+            <a:pPr marL="0" indent="0">
               <a:buNone/>
             </a:pPr>
             <a:r>
@@ -6619,7 +6844,7 @@
             <a:endParaRPr lang="en-US" sz="1250" dirty="0"/>
           </a:p>
           <a:p>
-            <a:pPr indent="0" marL="0">
+            <a:pPr marL="0" indent="0">
               <a:buNone/>
             </a:pPr>
             <a:r>
@@ -6636,13 +6861,13 @@
             <a:endParaRPr lang="en-US" sz="1250" dirty="0"/>
           </a:p>
           <a:p>
-            <a:pPr indent="0" marL="0">
+            <a:pPr marL="0" indent="0">
               <a:buNone/>
             </a:pPr>
             <a:endParaRPr lang="en-US" sz="1250" dirty="0"/>
           </a:p>
           <a:p>
-            <a:pPr indent="0" marL="0">
+            <a:pPr marL="0" indent="0">
               <a:buNone/>
             </a:pPr>
             <a:r>
@@ -6659,7 +6884,7 @@
             <a:endParaRPr lang="en-US" sz="1250" dirty="0"/>
           </a:p>
           <a:p>
-            <a:pPr indent="0" marL="0">
+            <a:pPr marL="0" indent="0">
               <a:buNone/>
             </a:pPr>
             <a:r>
@@ -6703,13 +6928,20 @@
             <a:prstDash val="solid"/>
           </a:ln>
           <a:effectLst>
-            <a:outerShdw sx="100000" sy="100000" kx="0" ky="0" algn="bl" rotWithShape="0" blurRad="88900" dist="25400" dir="2700000">
+            <a:outerShdw blurRad="88900" dist="25400" dir="2700000" algn="bl" rotWithShape="0">
               <a:srgbClr val="000000">
                 <a:alpha val="13000"/>
               </a:srgbClr>
             </a:outerShdw>
           </a:effectLst>
         </p:spPr>
+        <p:txBody>
+          <a:bodyPr/>
+          <a:lstStyle/>
+          <a:p>
+            <a:endParaRPr lang="it-IT"/>
+          </a:p>
+        </p:txBody>
       </p:sp>
       <p:sp>
         <p:nvSpPr>
@@ -6732,7 +6964,7 @@
           <a:bodyPr wrap="square" lIns="0" tIns="0" rIns="0" bIns="0" rtlCol="0" anchor="ctr"/>
           <a:lstStyle/>
           <a:p>
-            <a:pPr indent="0" marL="0">
+            <a:pPr marL="0" indent="0">
               <a:buNone/>
             </a:pPr>
             <a:r>
@@ -6771,7 +7003,7 @@
           <a:bodyPr wrap="square" lIns="0" tIns="0" rIns="0" bIns="0" rtlCol="0" anchor="ctr"/>
           <a:lstStyle/>
           <a:p>
-            <a:pPr indent="0" marL="0">
+            <a:pPr marL="0" indent="0">
               <a:buNone/>
             </a:pPr>
             <a:r>
@@ -6815,13 +7047,20 @@
             <a:prstDash val="solid"/>
           </a:ln>
           <a:effectLst>
-            <a:outerShdw sx="100000" sy="100000" kx="0" ky="0" algn="bl" rotWithShape="0" blurRad="88900" dist="25400" dir="2700000">
+            <a:outerShdw blurRad="88900" dist="25400" dir="2700000" algn="bl" rotWithShape="0">
               <a:srgbClr val="000000">
                 <a:alpha val="13000"/>
               </a:srgbClr>
             </a:outerShdw>
           </a:effectLst>
         </p:spPr>
+        <p:txBody>
+          <a:bodyPr/>
+          <a:lstStyle/>
+          <a:p>
+            <a:endParaRPr lang="it-IT"/>
+          </a:p>
+        </p:txBody>
       </p:sp>
       <p:sp>
         <p:nvSpPr>
@@ -6844,7 +7083,7 @@
           <a:bodyPr wrap="square" lIns="0" tIns="0" rIns="0" bIns="0" rtlCol="0" anchor="ctr"/>
           <a:lstStyle/>
           <a:p>
-            <a:pPr indent="0" marL="0">
+            <a:pPr marL="0" indent="0">
               <a:buNone/>
             </a:pPr>
             <a:r>
@@ -6883,7 +7122,7 @@
           <a:bodyPr wrap="square" lIns="0" tIns="0" rIns="0" bIns="0" rtlCol="0" anchor="ctr"/>
           <a:lstStyle/>
           <a:p>
-            <a:pPr indent="0" marL="0">
+            <a:pPr marL="0" indent="0">
               <a:buNone/>
             </a:pPr>
             <a:r>
@@ -6917,6 +7156,7 @@
         <a:solidFill>
           <a:srgbClr val="FFFFFF"/>
         </a:solidFill>
+        <a:effectLst/>
       </p:bgPr>
     </p:bg>
     <p:spTree>
@@ -6954,11 +7194,11 @@
           <a:bodyPr wrap="square" lIns="0" tIns="0" rIns="0" bIns="0" rtlCol="0" anchor="ctr"/>
           <a:lstStyle/>
           <a:p>
-            <a:pPr indent="0" marL="0">
-              <a:buNone/>
-            </a:pPr>
-            <a:r>
-              <a:rPr lang="en-US" sz="1100" b="1" spc="300" kern="0" dirty="0">
+            <a:pPr marL="0" indent="0">
+              <a:buNone/>
+            </a:pPr>
+            <a:r>
+              <a:rPr lang="en-US" sz="1100" b="1" kern="0" spc="300" dirty="0">
                 <a:solidFill>
                   <a:srgbClr val="0B7A63"/>
                 </a:solidFill>
@@ -6993,7 +7233,7 @@
           <a:bodyPr wrap="square" lIns="0" tIns="0" rIns="0" bIns="0" rtlCol="0" anchor="ctr"/>
           <a:lstStyle/>
           <a:p>
-            <a:pPr indent="0" marL="0">
+            <a:pPr marL="0" indent="0">
               <a:buNone/>
             </a:pPr>
             <a:r>
@@ -7032,7 +7272,7 @@
           <a:bodyPr wrap="square" lIns="0" tIns="0" rIns="0" bIns="0" rtlCol="0" anchor="ctr"/>
           <a:lstStyle/>
           <a:p>
-            <a:pPr algn="ctr" indent="0" marL="0">
+            <a:pPr marL="0" indent="0" algn="ctr">
               <a:buNone/>
             </a:pPr>
             <a:r>
@@ -7071,7 +7311,7 @@
           <a:bodyPr wrap="square" lIns="0" tIns="0" rIns="0" bIns="0" rtlCol="0" anchor="ctr"/>
           <a:lstStyle/>
           <a:p>
-            <a:pPr algn="ctr" indent="0" marL="0">
+            <a:pPr marL="0" indent="0" algn="ctr">
               <a:buNone/>
             </a:pPr>
             <a:r>
@@ -7115,13 +7355,20 @@
             <a:prstDash val="solid"/>
           </a:ln>
           <a:effectLst>
-            <a:outerShdw sx="100000" sy="100000" kx="0" ky="0" algn="bl" rotWithShape="0" blurRad="88900" dist="25400" dir="2700000">
+            <a:outerShdw blurRad="88900" dist="25400" dir="2700000" algn="bl" rotWithShape="0">
               <a:srgbClr val="000000">
                 <a:alpha val="13000"/>
               </a:srgbClr>
             </a:outerShdw>
           </a:effectLst>
         </p:spPr>
+        <p:txBody>
+          <a:bodyPr/>
+          <a:lstStyle/>
+          <a:p>
+            <a:endParaRPr lang="it-IT"/>
+          </a:p>
+        </p:txBody>
       </p:sp>
       <p:sp>
         <p:nvSpPr>
@@ -7144,7 +7391,7 @@
           <a:bodyPr wrap="square" lIns="0" tIns="0" rIns="0" bIns="0" rtlCol="0" anchor="ctr"/>
           <a:lstStyle/>
           <a:p>
-            <a:pPr indent="0" marL="0">
+            <a:pPr marL="0" indent="0">
               <a:buNone/>
             </a:pPr>
             <a:r>
@@ -7183,7 +7430,7 @@
           <a:bodyPr wrap="square" lIns="0" tIns="0" rIns="0" bIns="0" rtlCol="0" anchor="ctr"/>
           <a:lstStyle/>
           <a:p>
-            <a:pPr indent="0" marL="0">
+            <a:pPr marL="0" indent="0">
               <a:buNone/>
             </a:pPr>
             <a:r>
@@ -7227,13 +7474,20 @@
             <a:prstDash val="solid"/>
           </a:ln>
           <a:effectLst>
-            <a:outerShdw sx="100000" sy="100000" kx="0" ky="0" algn="bl" rotWithShape="0" blurRad="88900" dist="25400" dir="2700000">
+            <a:outerShdw blurRad="88900" dist="25400" dir="2700000" algn="bl" rotWithShape="0">
               <a:srgbClr val="000000">
                 <a:alpha val="13000"/>
               </a:srgbClr>
             </a:outerShdw>
           </a:effectLst>
         </p:spPr>
+        <p:txBody>
+          <a:bodyPr/>
+          <a:lstStyle/>
+          <a:p>
+            <a:endParaRPr lang="it-IT"/>
+          </a:p>
+        </p:txBody>
       </p:sp>
       <p:sp>
         <p:nvSpPr>
@@ -7256,7 +7510,7 @@
           <a:bodyPr wrap="square" lIns="0" tIns="0" rIns="0" bIns="0" rtlCol="0" anchor="ctr"/>
           <a:lstStyle/>
           <a:p>
-            <a:pPr indent="0" marL="0">
+            <a:pPr marL="0" indent="0">
               <a:buNone/>
             </a:pPr>
             <a:r>
@@ -7295,7 +7549,7 @@
           <a:bodyPr wrap="square" lIns="0" tIns="0" rIns="0" bIns="0" rtlCol="0" anchor="ctr"/>
           <a:lstStyle/>
           <a:p>
-            <a:pPr indent="0" marL="0">
+            <a:pPr marL="0" indent="0">
               <a:buNone/>
             </a:pPr>
             <a:r>
@@ -7339,13 +7593,20 @@
             <a:prstDash val="solid"/>
           </a:ln>
           <a:effectLst>
-            <a:outerShdw sx="100000" sy="100000" kx="0" ky="0" algn="bl" rotWithShape="0" blurRad="88900" dist="25400" dir="2700000">
+            <a:outerShdw blurRad="88900" dist="25400" dir="2700000" algn="bl" rotWithShape="0">
               <a:srgbClr val="000000">
                 <a:alpha val="13000"/>
               </a:srgbClr>
             </a:outerShdw>
           </a:effectLst>
         </p:spPr>
+        <p:txBody>
+          <a:bodyPr/>
+          <a:lstStyle/>
+          <a:p>
+            <a:endParaRPr lang="it-IT"/>
+          </a:p>
+        </p:txBody>
       </p:sp>
       <p:sp>
         <p:nvSpPr>
@@ -7368,7 +7629,7 @@
           <a:bodyPr wrap="square" lIns="0" tIns="0" rIns="0" bIns="0" rtlCol="0" anchor="ctr"/>
           <a:lstStyle/>
           <a:p>
-            <a:pPr indent="0" marL="0">
+            <a:pPr marL="0" indent="0">
               <a:buNone/>
             </a:pPr>
             <a:r>
@@ -7407,7 +7668,7 @@
           <a:bodyPr wrap="square" lIns="0" tIns="0" rIns="0" bIns="0" rtlCol="0" anchor="ctr"/>
           <a:lstStyle/>
           <a:p>
-            <a:pPr indent="0" marL="0">
+            <a:pPr marL="0" indent="0">
               <a:buNone/>
             </a:pPr>
             <a:r>
@@ -7446,7 +7707,7 @@
           <a:bodyPr wrap="square" lIns="0" tIns="0" rIns="0" bIns="0" rtlCol="0" anchor="ctr"/>
           <a:lstStyle/>
           <a:p>
-            <a:pPr algn="ctr" indent="0" marL="0">
+            <a:pPr marL="0" indent="0" algn="ctr">
               <a:buNone/>
             </a:pPr>
             <a:r>
@@ -7480,6 +7741,7 @@
         <a:solidFill>
           <a:srgbClr val="171A20"/>
         </a:solidFill>
+        <a:effectLst/>
       </p:bgPr>
     </p:bg>
     <p:spTree>
@@ -7517,11 +7779,11 @@
           <a:bodyPr wrap="square" lIns="0" tIns="0" rIns="0" bIns="0" rtlCol="0" anchor="ctr"/>
           <a:lstStyle/>
           <a:p>
-            <a:pPr indent="0" marL="0">
-              <a:buNone/>
-            </a:pPr>
-            <a:r>
-              <a:rPr lang="en-US" sz="1100" b="1" spc="300" kern="0" dirty="0">
+            <a:pPr marL="0" indent="0">
+              <a:buNone/>
+            </a:pPr>
+            <a:r>
+              <a:rPr lang="en-US" sz="1100" b="1" kern="0" spc="300" dirty="0">
                 <a:solidFill>
                   <a:srgbClr val="0B7A63"/>
                 </a:solidFill>
@@ -7556,7 +7818,7 @@
           <a:bodyPr wrap="square" lIns="0" tIns="0" rIns="0" bIns="0" rtlCol="0" anchor="ctr"/>
           <a:lstStyle/>
           <a:p>
-            <a:pPr indent="0" marL="0">
+            <a:pPr marL="0" indent="0">
               <a:buNone/>
             </a:pPr>
             <a:r>
@@ -7571,9 +7833,6 @@
               <a:t>Stesso algoritmo, stessa logica:
 </a:t>
             </a:r>
-            <a:pPr indent="0" marL="0">
-              <a:buNone/>
-            </a:pPr>
             <a:r>
               <a:rPr lang="en-US" sz="4300" b="1" dirty="0">
                 <a:solidFill>
@@ -7610,7 +7869,7 @@
           <a:bodyPr wrap="square" lIns="0" tIns="0" rIns="0" bIns="0" rtlCol="0" anchor="ctr"/>
           <a:lstStyle/>
           <a:p>
-            <a:pPr indent="0" marL="0">
+            <a:pPr marL="0" indent="0">
               <a:buNone/>
             </a:pPr>
             <a:r>
@@ -7649,7 +7908,7 @@
           <a:bodyPr wrap="square" lIns="0" tIns="0" rIns="0" bIns="0" rtlCol="0" anchor="ctr"/>
           <a:lstStyle/>
           <a:p>
-            <a:pPr indent="0" marL="0">
+            <a:pPr marL="0" indent="0">
               <a:buNone/>
             </a:pPr>
             <a:r>
@@ -7688,7 +7947,7 @@
           <a:bodyPr wrap="square" lIns="0" tIns="0" rIns="0" bIns="0" rtlCol="0" anchor="ctr"/>
           <a:lstStyle/>
           <a:p>
-            <a:pPr indent="0" marL="0">
+            <a:pPr marL="0" indent="0">
               <a:buNone/>
             </a:pPr>
             <a:r>
@@ -7727,7 +7986,7 @@
           <a:bodyPr wrap="square" lIns="0" tIns="0" rIns="0" bIns="0" rtlCol="0" anchor="ctr"/>
           <a:lstStyle/>
           <a:p>
-            <a:pPr indent="0" marL="0">
+            <a:pPr marL="0" indent="0">
               <a:buNone/>
             </a:pPr>
             <a:r>
@@ -7766,7 +8025,7 @@
           <a:bodyPr wrap="square" lIns="0" tIns="0" rIns="0" bIns="0" rtlCol="0" anchor="ctr"/>
           <a:lstStyle/>
           <a:p>
-            <a:pPr indent="0" marL="0">
+            <a:pPr marL="0" indent="0">
               <a:buNone/>
             </a:pPr>
             <a:r>
@@ -7805,7 +8064,7 @@
           <a:bodyPr wrap="square" lIns="0" tIns="0" rIns="0" bIns="0" rtlCol="0" anchor="ctr"/>
           <a:lstStyle/>
           <a:p>
-            <a:pPr indent="0" marL="0">
+            <a:pPr marL="0" indent="0">
               <a:buNone/>
             </a:pPr>
             <a:r>
@@ -7844,7 +8103,7 @@
           <a:bodyPr wrap="square" lIns="0" tIns="0" rIns="0" bIns="0" rtlCol="0" anchor="ctr"/>
           <a:lstStyle/>
           <a:p>
-            <a:pPr indent="0" marL="0">
+            <a:pPr marL="0" indent="0">
               <a:buNone/>
             </a:pPr>
             <a:r>
@@ -7856,7 +8115,18 @@
                 <a:ea typeface="Arial" pitchFamily="34" charset="-122"/>
                 <a:cs typeface="Arial" pitchFamily="34" charset="-120"/>
               </a:rPr>
-              <a:t>Grazie — domande?</a:t>
+              <a:t>Grazie per </a:t>
+            </a:r>
+            <a:r>
+              <a:rPr lang="en-US" sz="2200" b="1" dirty="0" err="1">
+                <a:solidFill>
+                  <a:srgbClr val="FFFFFF"/>
+                </a:solidFill>
+                <a:latin typeface="Arial" pitchFamily="34" charset="0"/>
+                <a:ea typeface="Arial" pitchFamily="34" charset="-122"/>
+                <a:cs typeface="Arial" pitchFamily="34" charset="-120"/>
+              </a:rPr>
+              <a:t>l’attenzione</a:t>
             </a:r>
             <a:endParaRPr lang="en-US" sz="2200" dirty="0"/>
           </a:p>
@@ -7883,7 +8153,7 @@
           <a:bodyPr wrap="square" lIns="0" tIns="0" rIns="0" bIns="0" rtlCol="0" anchor="ctr"/>
           <a:lstStyle/>
           <a:p>
-            <a:pPr algn="r" indent="0" marL="0">
+            <a:pPr marL="0" indent="0" algn="r">
               <a:buNone/>
             </a:pPr>
             <a:r>
@@ -7895,7 +8165,7 @@
                 <a:ea typeface="Calibri" pitchFamily="34" charset="-122"/>
                 <a:cs typeface="Calibri" pitchFamily="34" charset="-120"/>
               </a:rPr>
-              <a:t>Ferrari · De Fusco · Cuconato — Architetture 2025</a:t>
+              <a:t>Ferrari · De Fusco — Architetture 2025</a:t>
             </a:r>
             <a:endParaRPr lang="en-US" sz="1200" dirty="0"/>
           </a:p>
@@ -7917,6 +8187,7 @@
         <a:solidFill>
           <a:srgbClr val="FFFFFF"/>
         </a:solidFill>
+        <a:effectLst/>
       </p:bgPr>
     </p:bg>
     <p:spTree>
@@ -7954,11 +8225,11 @@
           <a:bodyPr wrap="square" lIns="0" tIns="0" rIns="0" bIns="0" rtlCol="0" anchor="ctr"/>
           <a:lstStyle/>
           <a:p>
-            <a:pPr indent="0" marL="0">
-              <a:buNone/>
-            </a:pPr>
-            <a:r>
-              <a:rPr lang="en-US" sz="1100" b="1" spc="300" kern="0" dirty="0">
+            <a:pPr marL="0" indent="0">
+              <a:buNone/>
+            </a:pPr>
+            <a:r>
+              <a:rPr lang="en-US" sz="1100" b="1" kern="0" spc="300" dirty="0">
                 <a:solidFill>
                   <a:srgbClr val="0B7A63"/>
                 </a:solidFill>
@@ -7993,7 +8264,7 @@
           <a:bodyPr wrap="square" lIns="0" tIns="0" rIns="0" bIns="0" rtlCol="0" anchor="ctr"/>
           <a:lstStyle/>
           <a:p>
-            <a:pPr indent="0" marL="0">
+            <a:pPr marL="0" indent="0">
               <a:buNone/>
             </a:pPr>
             <a:r>
@@ -8032,7 +8303,7 @@
           <a:bodyPr wrap="square" lIns="0" tIns="0" rIns="0" bIns="0" rtlCol="0" anchor="t"/>
           <a:lstStyle/>
           <a:p>
-            <a:pPr indent="0" marL="0">
+            <a:pPr marL="0" indent="0">
               <a:buNone/>
             </a:pPr>
             <a:r>
@@ -8046,9 +8317,6 @@
               </a:rPr>
               <a:t>Dato un dataset DS di n punti in ℝ</a:t>
             </a:r>
-            <a:pPr indent="0" marL="0">
-              <a:buNone/>
-            </a:pPr>
             <a:r>
               <a:rPr lang="en-US" sz="1600" baseline="30000" dirty="0">
                 <a:solidFill>
@@ -8060,9 +8328,6 @@
               </a:rPr>
               <a:t>D</a:t>
             </a:r>
-            <a:pPr indent="0" marL="0">
-              <a:buNone/>
-            </a:pPr>
             <a:r>
               <a:rPr lang="en-US" sz="1600" dirty="0">
                 <a:solidFill>
@@ -8077,13 +8342,13 @@
             <a:endParaRPr lang="en-US" sz="1600" dirty="0"/>
           </a:p>
           <a:p>
-            <a:pPr indent="0" marL="0">
+            <a:pPr marL="0" indent="0">
               <a:buNone/>
             </a:pPr>
             <a:endParaRPr lang="en-US" sz="1600" dirty="0"/>
           </a:p>
           <a:p>
-            <a:pPr indent="0" marL="0">
+            <a:pPr marL="0" indent="0">
               <a:buNone/>
             </a:pPr>
             <a:r>
@@ -8127,13 +8392,20 @@
             <a:prstDash val="solid"/>
           </a:ln>
           <a:effectLst>
-            <a:outerShdw sx="100000" sy="100000" kx="0" ky="0" algn="bl" rotWithShape="0" blurRad="88900" dist="25400" dir="2700000">
+            <a:outerShdw blurRad="88900" dist="25400" dir="2700000" algn="bl" rotWithShape="0">
               <a:srgbClr val="000000">
                 <a:alpha val="13000"/>
               </a:srgbClr>
             </a:outerShdw>
           </a:effectLst>
         </p:spPr>
+        <p:txBody>
+          <a:bodyPr/>
+          <a:lstStyle/>
+          <a:p>
+            <a:endParaRPr lang="it-IT"/>
+          </a:p>
+        </p:txBody>
       </p:sp>
       <p:sp>
         <p:nvSpPr>
@@ -8156,7 +8428,7 @@
           <a:bodyPr wrap="square" lIns="0" tIns="0" rIns="0" bIns="0" rtlCol="0" anchor="ctr"/>
           <a:lstStyle/>
           <a:p>
-            <a:pPr indent="0" marL="0">
+            <a:pPr marL="0" indent="0">
               <a:buNone/>
             </a:pPr>
             <a:r>
@@ -8195,7 +8467,7 @@
           <a:bodyPr wrap="square" lIns="0" tIns="0" rIns="0" bIns="0" rtlCol="0" anchor="ctr"/>
           <a:lstStyle/>
           <a:p>
-            <a:pPr indent="0" marL="0">
+            <a:pPr marL="0" indent="0">
               <a:buNone/>
             </a:pPr>
             <a:r>
@@ -8239,13 +8511,20 @@
             <a:prstDash val="solid"/>
           </a:ln>
           <a:effectLst>
-            <a:outerShdw sx="100000" sy="100000" kx="0" ky="0" algn="bl" rotWithShape="0" blurRad="88900" dist="25400" dir="2700000">
+            <a:outerShdw blurRad="88900" dist="25400" dir="2700000" algn="bl" rotWithShape="0">
               <a:srgbClr val="000000">
                 <a:alpha val="13000"/>
               </a:srgbClr>
             </a:outerShdw>
           </a:effectLst>
         </p:spPr>
+        <p:txBody>
+          <a:bodyPr/>
+          <a:lstStyle/>
+          <a:p>
+            <a:endParaRPr lang="it-IT"/>
+          </a:p>
+        </p:txBody>
       </p:sp>
       <p:sp>
         <p:nvSpPr>
@@ -8268,7 +8547,7 @@
           <a:bodyPr wrap="square" lIns="0" tIns="0" rIns="0" bIns="0" rtlCol="0" anchor="ctr"/>
           <a:lstStyle/>
           <a:p>
-            <a:pPr indent="0" marL="0">
+            <a:pPr marL="0" indent="0">
               <a:buNone/>
             </a:pPr>
             <a:r>
@@ -8307,7 +8586,7 @@
           <a:bodyPr wrap="square" lIns="0" tIns="0" rIns="0" bIns="0" rtlCol="0" anchor="ctr"/>
           <a:lstStyle/>
           <a:p>
-            <a:pPr indent="0" marL="0">
+            <a:pPr marL="0" indent="0">
               <a:buNone/>
             </a:pPr>
             <a:r>
@@ -8346,7 +8625,7 @@
           <a:bodyPr wrap="square" lIns="0" tIns="0" rIns="0" bIns="0" rtlCol="0" anchor="ctr"/>
           <a:lstStyle/>
           <a:p>
-            <a:pPr indent="0" marL="0">
+            <a:pPr marL="0" indent="0">
               <a:buNone/>
             </a:pPr>
             <a:r>
@@ -8390,13 +8669,20 @@
             <a:prstDash val="solid"/>
           </a:ln>
           <a:effectLst>
-            <a:outerShdw sx="100000" sy="100000" kx="0" ky="0" algn="bl" rotWithShape="0" blurRad="88900" dist="25400" dir="2700000">
+            <a:outerShdw blurRad="88900" dist="25400" dir="2700000" algn="bl" rotWithShape="0">
               <a:srgbClr val="000000">
                 <a:alpha val="13000"/>
               </a:srgbClr>
             </a:outerShdw>
           </a:effectLst>
         </p:spPr>
+        <p:txBody>
+          <a:bodyPr/>
+          <a:lstStyle/>
+          <a:p>
+            <a:endParaRPr lang="it-IT"/>
+          </a:p>
+        </p:txBody>
       </p:sp>
       <p:sp>
         <p:nvSpPr>
@@ -8419,7 +8705,7 @@
           <a:bodyPr wrap="square" lIns="0" tIns="0" rIns="0" bIns="0" rtlCol="0" anchor="ctr"/>
           <a:lstStyle/>
           <a:p>
-            <a:pPr indent="0" marL="0">
+            <a:pPr marL="0" indent="0">
               <a:buNone/>
             </a:pPr>
             <a:r>
@@ -8458,7 +8744,7 @@
           <a:bodyPr wrap="square" lIns="0" tIns="0" rIns="0" bIns="0" rtlCol="0" anchor="ctr"/>
           <a:lstStyle/>
           <a:p>
-            <a:pPr indent="0" marL="0">
+            <a:pPr marL="0" indent="0">
               <a:buNone/>
             </a:pPr>
             <a:r>
@@ -8475,7 +8761,7 @@
             <a:endParaRPr lang="en-US" sz="1350" dirty="0"/>
           </a:p>
           <a:p>
-            <a:pPr indent="0" marL="0">
+            <a:pPr marL="0" indent="0">
               <a:buNone/>
             </a:pPr>
             <a:r>
@@ -8519,13 +8805,20 @@
             <a:prstDash val="solid"/>
           </a:ln>
           <a:effectLst>
-            <a:outerShdw sx="100000" sy="100000" kx="0" ky="0" algn="bl" rotWithShape="0" blurRad="88900" dist="25400" dir="2700000">
+            <a:outerShdw blurRad="88900" dist="25400" dir="2700000" algn="bl" rotWithShape="0">
               <a:srgbClr val="000000">
                 <a:alpha val="13000"/>
               </a:srgbClr>
             </a:outerShdw>
           </a:effectLst>
         </p:spPr>
+        <p:txBody>
+          <a:bodyPr/>
+          <a:lstStyle/>
+          <a:p>
+            <a:endParaRPr lang="it-IT"/>
+          </a:p>
+        </p:txBody>
       </p:sp>
       <p:sp>
         <p:nvSpPr>
@@ -8548,7 +8841,7 @@
           <a:bodyPr wrap="square" lIns="0" tIns="0" rIns="0" bIns="0" rtlCol="0" anchor="ctr"/>
           <a:lstStyle/>
           <a:p>
-            <a:pPr indent="0" marL="0">
+            <a:pPr marL="0" indent="0">
               <a:buNone/>
             </a:pPr>
             <a:r>
@@ -8587,7 +8880,7 @@
           <a:bodyPr wrap="square" lIns="0" tIns="0" rIns="0" bIns="0" rtlCol="0" anchor="ctr"/>
           <a:lstStyle/>
           <a:p>
-            <a:pPr indent="0" marL="0">
+            <a:pPr marL="0" indent="0">
               <a:buNone/>
             </a:pPr>
             <a:r>
@@ -8604,7 +8897,7 @@
             <a:endParaRPr lang="en-US" sz="1350" dirty="0"/>
           </a:p>
           <a:p>
-            <a:pPr indent="0" marL="0">
+            <a:pPr marL="0" indent="0">
               <a:buNone/>
             </a:pPr>
             <a:r>
@@ -8638,6 +8931,7 @@
         <a:solidFill>
           <a:srgbClr val="FFFFFF"/>
         </a:solidFill>
+        <a:effectLst/>
       </p:bgPr>
     </p:bg>
     <p:spTree>
@@ -8675,11 +8969,11 @@
           <a:bodyPr wrap="square" lIns="0" tIns="0" rIns="0" bIns="0" rtlCol="0" anchor="ctr"/>
           <a:lstStyle/>
           <a:p>
-            <a:pPr indent="0" marL="0">
-              <a:buNone/>
-            </a:pPr>
-            <a:r>
-              <a:rPr lang="en-US" sz="1100" b="1" spc="300" kern="0" dirty="0">
+            <a:pPr marL="0" indent="0">
+              <a:buNone/>
+            </a:pPr>
+            <a:r>
+              <a:rPr lang="en-US" sz="1100" b="1" kern="0" spc="300" dirty="0">
                 <a:solidFill>
                   <a:srgbClr val="0B7A63"/>
                 </a:solidFill>
@@ -8687,7 +8981,7 @@
                 <a:ea typeface="Courier New" pitchFamily="34" charset="-122"/>
                 <a:cs typeface="Courier New" pitchFamily="34" charset="-120"/>
               </a:rPr>
-              <a:t>§ 2 · PRIMA LEVA</a:t>
+              <a:t>§ 2 · PRIMO INTERVENTO</a:t>
             </a:r>
             <a:endParaRPr lang="en-US" sz="1100" dirty="0"/>
           </a:p>
@@ -8714,7 +9008,7 @@
           <a:bodyPr wrap="square" lIns="0" tIns="0" rIns="0" bIns="0" rtlCol="0" anchor="ctr"/>
           <a:lstStyle/>
           <a:p>
-            <a:pPr indent="0" marL="0">
+            <a:pPr marL="0" indent="0">
               <a:buNone/>
             </a:pPr>
             <a:r>
@@ -8753,7 +9047,7 @@
           <a:bodyPr wrap="square" lIns="0" tIns="0" rIns="0" bIns="0" rtlCol="0" anchor="ctr"/>
           <a:lstStyle/>
           <a:p>
-            <a:pPr indent="0" marL="0">
+            <a:pPr marL="0" indent="0">
               <a:buNone/>
             </a:pPr>
             <a:r>
@@ -8767,9 +9061,6 @@
               </a:rPr>
               <a:t>Delle </a:t>
             </a:r>
-            <a:pPr indent="0" marL="0">
-              <a:buNone/>
-            </a:pPr>
             <a:r>
               <a:rPr lang="en-US" sz="1600" b="1" dirty="0">
                 <a:solidFill>
@@ -8781,9 +9072,6 @@
               </a:rPr>
               <a:t>x componenti con |valore| massimo</a:t>
             </a:r>
-            <a:pPr indent="0" marL="0">
-              <a:buNone/>
-            </a:pPr>
             <a:r>
               <a:rPr lang="en-US" sz="1600" dirty="0">
                 <a:solidFill>
@@ -8820,7 +9108,7 @@
           <a:bodyPr wrap="square" lIns="0" tIns="0" rIns="0" bIns="0" rtlCol="0" anchor="ctr"/>
           <a:lstStyle/>
           <a:p>
-            <a:pPr algn="r" indent="0" marL="0">
+            <a:pPr marL="0" indent="0" algn="r">
               <a:buNone/>
             </a:pPr>
             <a:r>
@@ -8864,6 +9152,13 @@
             <a:prstDash val="solid"/>
           </a:ln>
         </p:spPr>
+        <p:txBody>
+          <a:bodyPr/>
+          <a:lstStyle/>
+          <a:p>
+            <a:endParaRPr lang="it-IT"/>
+          </a:p>
+        </p:txBody>
       </p:sp>
       <p:sp>
         <p:nvSpPr>
@@ -8886,7 +9181,7 @@
           <a:bodyPr wrap="square" lIns="0" tIns="0" rIns="0" bIns="0" rtlCol="0" anchor="ctr"/>
           <a:lstStyle/>
           <a:p>
-            <a:pPr algn="ctr" indent="0" marL="0">
+            <a:pPr marL="0" indent="0" algn="ctr">
               <a:buNone/>
             </a:pPr>
             <a:r>
@@ -8930,6 +9225,13 @@
             <a:prstDash val="solid"/>
           </a:ln>
         </p:spPr>
+        <p:txBody>
+          <a:bodyPr/>
+          <a:lstStyle/>
+          <a:p>
+            <a:endParaRPr lang="it-IT"/>
+          </a:p>
+        </p:txBody>
       </p:sp>
       <p:sp>
         <p:nvSpPr>
@@ -8952,7 +9254,7 @@
           <a:bodyPr wrap="square" lIns="0" tIns="0" rIns="0" bIns="0" rtlCol="0" anchor="ctr"/>
           <a:lstStyle/>
           <a:p>
-            <a:pPr algn="ctr" indent="0" marL="0">
+            <a:pPr marL="0" indent="0" algn="ctr">
               <a:buNone/>
             </a:pPr>
             <a:r>
@@ -8996,6 +9298,13 @@
             <a:prstDash val="solid"/>
           </a:ln>
         </p:spPr>
+        <p:txBody>
+          <a:bodyPr/>
+          <a:lstStyle/>
+          <a:p>
+            <a:endParaRPr lang="it-IT"/>
+          </a:p>
+        </p:txBody>
       </p:sp>
       <p:sp>
         <p:nvSpPr>
@@ -9018,7 +9327,7 @@
           <a:bodyPr wrap="square" lIns="0" tIns="0" rIns="0" bIns="0" rtlCol="0" anchor="ctr"/>
           <a:lstStyle/>
           <a:p>
-            <a:pPr algn="ctr" indent="0" marL="0">
+            <a:pPr marL="0" indent="0" algn="ctr">
               <a:buNone/>
             </a:pPr>
             <a:r>
@@ -9062,6 +9371,13 @@
             <a:prstDash val="solid"/>
           </a:ln>
         </p:spPr>
+        <p:txBody>
+          <a:bodyPr/>
+          <a:lstStyle/>
+          <a:p>
+            <a:endParaRPr lang="it-IT"/>
+          </a:p>
+        </p:txBody>
       </p:sp>
       <p:sp>
         <p:nvSpPr>
@@ -9084,7 +9400,7 @@
           <a:bodyPr wrap="square" lIns="0" tIns="0" rIns="0" bIns="0" rtlCol="0" anchor="ctr"/>
           <a:lstStyle/>
           <a:p>
-            <a:pPr algn="ctr" indent="0" marL="0">
+            <a:pPr marL="0" indent="0" algn="ctr">
               <a:buNone/>
             </a:pPr>
             <a:r>
@@ -9123,7 +9439,7 @@
           <a:bodyPr wrap="square" lIns="0" tIns="0" rIns="0" bIns="0" rtlCol="0" anchor="ctr"/>
           <a:lstStyle/>
           <a:p>
-            <a:pPr algn="r" indent="0" marL="0">
+            <a:pPr marL="0" indent="0" algn="r">
               <a:buNone/>
             </a:pPr>
             <a:r>
@@ -9167,6 +9483,13 @@
             <a:prstDash val="solid"/>
           </a:ln>
         </p:spPr>
+        <p:txBody>
+          <a:bodyPr/>
+          <a:lstStyle/>
+          <a:p>
+            <a:endParaRPr lang="it-IT"/>
+          </a:p>
+        </p:txBody>
       </p:sp>
       <p:sp>
         <p:nvSpPr>
@@ -9189,7 +9512,7 @@
           <a:bodyPr wrap="square" lIns="0" tIns="0" rIns="0" bIns="0" rtlCol="0" anchor="ctr"/>
           <a:lstStyle/>
           <a:p>
-            <a:pPr algn="ctr" indent="0" marL="0">
+            <a:pPr marL="0" indent="0" algn="ctr">
               <a:buNone/>
             </a:pPr>
             <a:r>
@@ -9233,6 +9556,13 @@
             <a:prstDash val="solid"/>
           </a:ln>
         </p:spPr>
+        <p:txBody>
+          <a:bodyPr/>
+          <a:lstStyle/>
+          <a:p>
+            <a:endParaRPr lang="it-IT"/>
+          </a:p>
+        </p:txBody>
       </p:sp>
       <p:sp>
         <p:nvSpPr>
@@ -9255,7 +9585,7 @@
           <a:bodyPr wrap="square" lIns="0" tIns="0" rIns="0" bIns="0" rtlCol="0" anchor="ctr"/>
           <a:lstStyle/>
           <a:p>
-            <a:pPr algn="ctr" indent="0" marL="0">
+            <a:pPr marL="0" indent="0" algn="ctr">
               <a:buNone/>
             </a:pPr>
             <a:r>
@@ -9299,6 +9629,13 @@
             <a:prstDash val="solid"/>
           </a:ln>
         </p:spPr>
+        <p:txBody>
+          <a:bodyPr/>
+          <a:lstStyle/>
+          <a:p>
+            <a:endParaRPr lang="it-IT"/>
+          </a:p>
+        </p:txBody>
       </p:sp>
       <p:sp>
         <p:nvSpPr>
@@ -9321,7 +9658,7 @@
           <a:bodyPr wrap="square" lIns="0" tIns="0" rIns="0" bIns="0" rtlCol="0" anchor="ctr"/>
           <a:lstStyle/>
           <a:p>
-            <a:pPr algn="ctr" indent="0" marL="0">
+            <a:pPr marL="0" indent="0" algn="ctr">
               <a:buNone/>
             </a:pPr>
             <a:r>
@@ -9365,6 +9702,13 @@
             <a:prstDash val="solid"/>
           </a:ln>
         </p:spPr>
+        <p:txBody>
+          <a:bodyPr/>
+          <a:lstStyle/>
+          <a:p>
+            <a:endParaRPr lang="it-IT"/>
+          </a:p>
+        </p:txBody>
       </p:sp>
       <p:sp>
         <p:nvSpPr>
@@ -9387,7 +9731,7 @@
           <a:bodyPr wrap="square" lIns="0" tIns="0" rIns="0" bIns="0" rtlCol="0" anchor="ctr"/>
           <a:lstStyle/>
           <a:p>
-            <a:pPr algn="ctr" indent="0" marL="0">
+            <a:pPr marL="0" indent="0" algn="ctr">
               <a:buNone/>
             </a:pPr>
             <a:r>
@@ -9426,7 +9770,7 @@
           <a:bodyPr wrap="square" lIns="0" tIns="0" rIns="0" bIns="0" rtlCol="0" anchor="ctr"/>
           <a:lstStyle/>
           <a:p>
-            <a:pPr algn="r" indent="0" marL="0">
+            <a:pPr marL="0" indent="0" algn="r">
               <a:buNone/>
             </a:pPr>
             <a:r>
@@ -9470,6 +9814,13 @@
             <a:prstDash val="solid"/>
           </a:ln>
         </p:spPr>
+        <p:txBody>
+          <a:bodyPr/>
+          <a:lstStyle/>
+          <a:p>
+            <a:endParaRPr lang="it-IT"/>
+          </a:p>
+        </p:txBody>
       </p:sp>
       <p:sp>
         <p:nvSpPr>
@@ -9492,7 +9843,7 @@
           <a:bodyPr wrap="square" lIns="0" tIns="0" rIns="0" bIns="0" rtlCol="0" anchor="ctr"/>
           <a:lstStyle/>
           <a:p>
-            <a:pPr algn="ctr" indent="0" marL="0">
+            <a:pPr marL="0" indent="0" algn="ctr">
               <a:buNone/>
             </a:pPr>
             <a:r>
@@ -9536,6 +9887,13 @@
             <a:prstDash val="solid"/>
           </a:ln>
         </p:spPr>
+        <p:txBody>
+          <a:bodyPr/>
+          <a:lstStyle/>
+          <a:p>
+            <a:endParaRPr lang="it-IT"/>
+          </a:p>
+        </p:txBody>
       </p:sp>
       <p:sp>
         <p:nvSpPr>
@@ -9558,7 +9916,7 @@
           <a:bodyPr wrap="square" lIns="0" tIns="0" rIns="0" bIns="0" rtlCol="0" anchor="ctr"/>
           <a:lstStyle/>
           <a:p>
-            <a:pPr algn="ctr" indent="0" marL="0">
+            <a:pPr marL="0" indent="0" algn="ctr">
               <a:buNone/>
             </a:pPr>
             <a:r>
@@ -9602,6 +9960,13 @@
             <a:prstDash val="solid"/>
           </a:ln>
         </p:spPr>
+        <p:txBody>
+          <a:bodyPr/>
+          <a:lstStyle/>
+          <a:p>
+            <a:endParaRPr lang="it-IT"/>
+          </a:p>
+        </p:txBody>
       </p:sp>
       <p:sp>
         <p:nvSpPr>
@@ -9624,7 +9989,7 @@
           <a:bodyPr wrap="square" lIns="0" tIns="0" rIns="0" bIns="0" rtlCol="0" anchor="ctr"/>
           <a:lstStyle/>
           <a:p>
-            <a:pPr algn="ctr" indent="0" marL="0">
+            <a:pPr marL="0" indent="0" algn="ctr">
               <a:buNone/>
             </a:pPr>
             <a:r>
@@ -9668,6 +10033,13 @@
             <a:prstDash val="solid"/>
           </a:ln>
         </p:spPr>
+        <p:txBody>
+          <a:bodyPr/>
+          <a:lstStyle/>
+          <a:p>
+            <a:endParaRPr lang="it-IT"/>
+          </a:p>
+        </p:txBody>
       </p:sp>
       <p:sp>
         <p:nvSpPr>
@@ -9690,7 +10062,7 @@
           <a:bodyPr wrap="square" lIns="0" tIns="0" rIns="0" bIns="0" rtlCol="0" anchor="ctr"/>
           <a:lstStyle/>
           <a:p>
-            <a:pPr algn="ctr" indent="0" marL="0">
+            <a:pPr marL="0" indent="0" algn="ctr">
               <a:buNone/>
             </a:pPr>
             <a:r>
@@ -9729,7 +10101,7 @@
           <a:bodyPr wrap="square" lIns="0" tIns="0" rIns="0" bIns="0" rtlCol="0" anchor="ctr"/>
           <a:lstStyle/>
           <a:p>
-            <a:pPr indent="0" marL="0">
+            <a:pPr marL="0" indent="0">
               <a:buNone/>
             </a:pPr>
             <a:r>
@@ -9773,13 +10145,20 @@
             <a:prstDash val="solid"/>
           </a:ln>
           <a:effectLst>
-            <a:outerShdw sx="100000" sy="100000" kx="0" ky="0" algn="bl" rotWithShape="0" blurRad="88900" dist="25400" dir="2700000">
+            <a:outerShdw blurRad="88900" dist="25400" dir="2700000" algn="bl" rotWithShape="0">
               <a:srgbClr val="000000">
                 <a:alpha val="13000"/>
               </a:srgbClr>
             </a:outerShdw>
           </a:effectLst>
         </p:spPr>
+        <p:txBody>
+          <a:bodyPr/>
+          <a:lstStyle/>
+          <a:p>
+            <a:endParaRPr lang="it-IT"/>
+          </a:p>
+        </p:txBody>
       </p:sp>
       <p:sp>
         <p:nvSpPr>
@@ -9802,7 +10181,7 @@
           <a:bodyPr wrap="square" lIns="0" tIns="0" rIns="0" bIns="0" rtlCol="0" anchor="ctr"/>
           <a:lstStyle/>
           <a:p>
-            <a:pPr indent="0" marL="0">
+            <a:pPr marL="0" indent="0">
               <a:buNone/>
             </a:pPr>
             <a:r>
@@ -9952,6 +10331,13 @@
             <a:prstDash val="solid"/>
           </a:ln>
         </p:spPr>
+        <p:txBody>
+          <a:bodyPr/>
+          <a:lstStyle/>
+          <a:p>
+            <a:endParaRPr lang="it-IT"/>
+          </a:p>
+        </p:txBody>
       </p:sp>
       <p:sp>
         <p:nvSpPr>
@@ -9974,7 +10360,7 @@
           <a:bodyPr wrap="square" lIns="0" tIns="0" rIns="0" bIns="0" rtlCol="0" anchor="ctr"/>
           <a:lstStyle/>
           <a:p>
-            <a:pPr indent="0" marL="0">
+            <a:pPr marL="0" indent="0">
               <a:buNone/>
             </a:pPr>
             <a:r>
@@ -9988,9 +10374,6 @@
               </a:rPr>
               <a:t>Determinismo verificato: </a:t>
             </a:r>
-            <a:pPr indent="0" marL="0">
-              <a:buNone/>
-            </a:pPr>
             <a:r>
               <a:rPr lang="en-US" sz="1400" dirty="0">
                 <a:solidFill>
@@ -10022,6 +10405,7 @@
         <a:solidFill>
           <a:srgbClr val="FFFFFF"/>
         </a:solidFill>
+        <a:effectLst/>
       </p:bgPr>
     </p:bg>
     <p:spTree>
@@ -10059,11 +10443,11 @@
           <a:bodyPr wrap="square" lIns="0" tIns="0" rIns="0" bIns="0" rtlCol="0" anchor="ctr"/>
           <a:lstStyle/>
           <a:p>
-            <a:pPr indent="0" marL="0">
-              <a:buNone/>
-            </a:pPr>
-            <a:r>
-              <a:rPr lang="en-US" sz="1100" b="1" spc="300" kern="0" dirty="0">
+            <a:pPr marL="0" indent="0">
+              <a:buNone/>
+            </a:pPr>
+            <a:r>
+              <a:rPr lang="en-US" sz="1100" b="1" kern="0" spc="300" dirty="0">
                 <a:solidFill>
                   <a:srgbClr val="0B7A63"/>
                 </a:solidFill>
@@ -10098,7 +10482,7 @@
           <a:bodyPr wrap="square" lIns="0" tIns="0" rIns="0" bIns="0" rtlCol="0" anchor="ctr"/>
           <a:lstStyle/>
           <a:p>
-            <a:pPr indent="0" marL="0">
+            <a:pPr marL="0" indent="0">
               <a:buNone/>
             </a:pPr>
             <a:r>
@@ -10142,6 +10526,13 @@
             <a:prstDash val="solid"/>
           </a:ln>
         </p:spPr>
+        <p:txBody>
+          <a:bodyPr/>
+          <a:lstStyle/>
+          <a:p>
+            <a:endParaRPr lang="it-IT"/>
+          </a:p>
+        </p:txBody>
       </p:sp>
       <p:sp>
         <p:nvSpPr>
@@ -10164,9 +10555,11 @@
           <a:bodyPr wrap="square" lIns="0" tIns="0" rIns="0" bIns="0" rtlCol="0" anchor="ctr"/>
           <a:lstStyle/>
           <a:p>
-            <a:pPr algn="ctr" indent="0" marL="0">
-              <a:buNone/>
-            </a:pPr>
+            <a:pPr algn="ctr"/>
+            <a:r>
+              <a:rPr lang="it-IT" sz="1600" b="1" dirty="0"/>
+              <a:t>d̃</a:t>
+            </a:r>
             <a:r>
               <a:rPr lang="en-US" sz="1700" b="1" dirty="0">
                 <a:solidFill>
@@ -10176,7 +10569,7 @@
                 <a:ea typeface="Courier New" pitchFamily="34" charset="-122"/>
                 <a:cs typeface="Courier New" pitchFamily="34" charset="-120"/>
               </a:rPr>
-              <a:t>d~(v, w)  =  (v⁺·w⁺) + (v⁻·w⁻) − (v⁺·w⁻) − (v⁻·w⁺)          intero ∈ [−x, +x]</a:t>
+              <a:t>(v, w)  =  (v⁺·w⁺) + (v⁻·w⁻) − (v⁺·w⁻) − (v⁻·w⁺)          intero ∈ [−x, +x]</a:t>
             </a:r>
             <a:endParaRPr lang="en-US" sz="1700" dirty="0"/>
           </a:p>
@@ -10208,13 +10601,20 @@
             <a:prstDash val="solid"/>
           </a:ln>
           <a:effectLst>
-            <a:outerShdw sx="100000" sy="100000" kx="0" ky="0" algn="bl" rotWithShape="0" blurRad="88900" dist="25400" dir="2700000">
+            <a:outerShdw blurRad="88900" dist="25400" dir="2700000" algn="bl" rotWithShape="0">
               <a:srgbClr val="000000">
                 <a:alpha val="13000"/>
               </a:srgbClr>
             </a:outerShdw>
           </a:effectLst>
         </p:spPr>
+        <p:txBody>
+          <a:bodyPr/>
+          <a:lstStyle/>
+          <a:p>
+            <a:endParaRPr lang="it-IT"/>
+          </a:p>
+        </p:txBody>
       </p:sp>
       <p:sp>
         <p:nvSpPr>
@@ -10237,7 +10637,7 @@
           <a:bodyPr wrap="square" lIns="0" tIns="0" rIns="0" bIns="0" rtlCol="0" anchor="ctr"/>
           <a:lstStyle/>
           <a:p>
-            <a:pPr indent="0" marL="0">
+            <a:pPr marL="0" indent="0">
               <a:buNone/>
             </a:pPr>
             <a:r>
@@ -10251,9 +10651,6 @@
               </a:rPr>
               <a:t>pp</a:t>
             </a:r>
-            <a:pPr indent="0" marL="0">
-              <a:buNone/>
-            </a:pPr>
             <a:r>
               <a:rPr lang="en-US" sz="2100" b="1" dirty="0">
                 <a:solidFill>
@@ -10290,7 +10687,7 @@
           <a:bodyPr wrap="square" lIns="0" tIns="0" rIns="0" bIns="0" rtlCol="0" anchor="ctr"/>
           <a:lstStyle/>
           <a:p>
-            <a:pPr indent="0" marL="0">
+            <a:pPr marL="0" indent="0">
               <a:buNone/>
             </a:pPr>
             <a:r>
@@ -10307,7 +10704,7 @@
             <a:endParaRPr lang="en-US" sz="1250" dirty="0"/>
           </a:p>
           <a:p>
-            <a:pPr indent="0" marL="0">
+            <a:pPr marL="0" indent="0">
               <a:buNone/>
             </a:pPr>
             <a:r>
@@ -10351,13 +10748,20 @@
             <a:prstDash val="solid"/>
           </a:ln>
           <a:effectLst>
-            <a:outerShdw sx="100000" sy="100000" kx="0" ky="0" algn="bl" rotWithShape="0" blurRad="88900" dist="25400" dir="2700000">
+            <a:outerShdw blurRad="88900" dist="25400" dir="2700000" algn="bl" rotWithShape="0">
               <a:srgbClr val="000000">
                 <a:alpha val="13000"/>
               </a:srgbClr>
             </a:outerShdw>
           </a:effectLst>
         </p:spPr>
+        <p:txBody>
+          <a:bodyPr/>
+          <a:lstStyle/>
+          <a:p>
+            <a:endParaRPr lang="it-IT"/>
+          </a:p>
+        </p:txBody>
       </p:sp>
       <p:sp>
         <p:nvSpPr>
@@ -10380,7 +10784,7 @@
           <a:bodyPr wrap="square" lIns="0" tIns="0" rIns="0" bIns="0" rtlCol="0" anchor="ctr"/>
           <a:lstStyle/>
           <a:p>
-            <a:pPr indent="0" marL="0">
+            <a:pPr marL="0" indent="0">
               <a:buNone/>
             </a:pPr>
             <a:r>
@@ -10394,9 +10798,6 @@
               </a:rPr>
               <a:t>nn</a:t>
             </a:r>
-            <a:pPr indent="0" marL="0">
-              <a:buNone/>
-            </a:pPr>
             <a:r>
               <a:rPr lang="en-US" sz="2100" b="1" dirty="0">
                 <a:solidFill>
@@ -10433,7 +10834,7 @@
           <a:bodyPr wrap="square" lIns="0" tIns="0" rIns="0" bIns="0" rtlCol="0" anchor="ctr"/>
           <a:lstStyle/>
           <a:p>
-            <a:pPr indent="0" marL="0">
+            <a:pPr marL="0" indent="0">
               <a:buNone/>
             </a:pPr>
             <a:r>
@@ -10450,7 +10851,7 @@
             <a:endParaRPr lang="en-US" sz="1250" dirty="0"/>
           </a:p>
           <a:p>
-            <a:pPr indent="0" marL="0">
+            <a:pPr marL="0" indent="0">
               <a:buNone/>
             </a:pPr>
             <a:r>
@@ -10494,13 +10895,20 @@
             <a:prstDash val="solid"/>
           </a:ln>
           <a:effectLst>
-            <a:outerShdw sx="100000" sy="100000" kx="0" ky="0" algn="bl" rotWithShape="0" blurRad="88900" dist="25400" dir="2700000">
+            <a:outerShdw blurRad="88900" dist="25400" dir="2700000" algn="bl" rotWithShape="0">
               <a:srgbClr val="000000">
                 <a:alpha val="13000"/>
               </a:srgbClr>
             </a:outerShdw>
           </a:effectLst>
         </p:spPr>
+        <p:txBody>
+          <a:bodyPr/>
+          <a:lstStyle/>
+          <a:p>
+            <a:endParaRPr lang="it-IT"/>
+          </a:p>
+        </p:txBody>
       </p:sp>
       <p:sp>
         <p:nvSpPr>
@@ -10523,7 +10931,7 @@
           <a:bodyPr wrap="square" lIns="0" tIns="0" rIns="0" bIns="0" rtlCol="0" anchor="ctr"/>
           <a:lstStyle/>
           <a:p>
-            <a:pPr indent="0" marL="0">
+            <a:pPr marL="0" indent="0">
               <a:buNone/>
             </a:pPr>
             <a:r>
@@ -10537,9 +10945,6 @@
               </a:rPr>
               <a:t>pn</a:t>
             </a:r>
-            <a:pPr indent="0" marL="0">
-              <a:buNone/>
-            </a:pPr>
             <a:r>
               <a:rPr lang="en-US" sz="2100" b="1" dirty="0">
                 <a:solidFill>
@@ -10576,7 +10981,7 @@
           <a:bodyPr wrap="square" lIns="0" tIns="0" rIns="0" bIns="0" rtlCol="0" anchor="ctr"/>
           <a:lstStyle/>
           <a:p>
-            <a:pPr indent="0" marL="0">
+            <a:pPr marL="0" indent="0">
               <a:buNone/>
             </a:pPr>
             <a:r>
@@ -10593,7 +10998,7 @@
             <a:endParaRPr lang="en-US" sz="1250" dirty="0"/>
           </a:p>
           <a:p>
-            <a:pPr indent="0" marL="0">
+            <a:pPr marL="0" indent="0">
               <a:buNone/>
             </a:pPr>
             <a:r>
@@ -10637,13 +11042,20 @@
             <a:prstDash val="solid"/>
           </a:ln>
           <a:effectLst>
-            <a:outerShdw sx="100000" sy="100000" kx="0" ky="0" algn="bl" rotWithShape="0" blurRad="88900" dist="25400" dir="2700000">
+            <a:outerShdw blurRad="88900" dist="25400" dir="2700000" algn="bl" rotWithShape="0">
               <a:srgbClr val="000000">
                 <a:alpha val="13000"/>
               </a:srgbClr>
             </a:outerShdw>
           </a:effectLst>
         </p:spPr>
+        <p:txBody>
+          <a:bodyPr/>
+          <a:lstStyle/>
+          <a:p>
+            <a:endParaRPr lang="it-IT"/>
+          </a:p>
+        </p:txBody>
       </p:sp>
       <p:sp>
         <p:nvSpPr>
@@ -10666,7 +11078,7 @@
           <a:bodyPr wrap="square" lIns="0" tIns="0" rIns="0" bIns="0" rtlCol="0" anchor="ctr"/>
           <a:lstStyle/>
           <a:p>
-            <a:pPr indent="0" marL="0">
+            <a:pPr marL="0" indent="0">
               <a:buNone/>
             </a:pPr>
             <a:r>
@@ -10680,9 +11092,6 @@
               </a:rPr>
               <a:t>np</a:t>
             </a:r>
-            <a:pPr indent="0" marL="0">
-              <a:buNone/>
-            </a:pPr>
             <a:r>
               <a:rPr lang="en-US" sz="2100" b="1" dirty="0">
                 <a:solidFill>
@@ -10719,7 +11128,7 @@
           <a:bodyPr wrap="square" lIns="0" tIns="0" rIns="0" bIns="0" rtlCol="0" anchor="ctr"/>
           <a:lstStyle/>
           <a:p>
-            <a:pPr indent="0" marL="0">
+            <a:pPr marL="0" indent="0">
               <a:buNone/>
             </a:pPr>
             <a:r>
@@ -10736,7 +11145,7 @@
             <a:endParaRPr lang="en-US" sz="1250" dirty="0"/>
           </a:p>
           <a:p>
-            <a:pPr indent="0" marL="0">
+            <a:pPr marL="0" indent="0">
               <a:buNone/>
             </a:pPr>
             <a:r>
@@ -10775,9 +11184,6 @@
           <a:bodyPr wrap="square" lIns="0" tIns="0" rIns="0" bIns="0" rtlCol="0" anchor="ctr"/>
           <a:lstStyle/>
           <a:p>
-            <a:pPr indent="0" marL="0">
-              <a:buNone/>
-            </a:pPr>
             <a:r>
               <a:rPr lang="en-US" sz="1450" b="1" dirty="0">
                 <a:solidFill>
@@ -10789,9 +11195,6 @@
               </a:rPr>
               <a:t>Esempio: </a:t>
             </a:r>
-            <a:pPr indent="0" marL="0">
-              <a:buNone/>
-            </a:pPr>
             <a:r>
               <a:rPr lang="en-US" sz="1450" dirty="0">
                 <a:solidFill>
@@ -10803,9 +11206,14 @@
               </a:rPr>
               <a:t>v = [2.3, 1.5, −6.7, 4.5]   w = [−3.2, 0.5, 7.1, −2.0]   →   np = 1, gli altri 0   →   </a:t>
             </a:r>
-            <a:pPr indent="0" marL="0">
-              <a:buNone/>
-            </a:pPr>
+            <a:r>
+              <a:rPr lang="it-IT" sz="1600" b="1" dirty="0">
+                <a:solidFill>
+                  <a:srgbClr val="FF0000"/>
+                </a:solidFill>
+              </a:rPr>
+              <a:t>d̃ </a:t>
+            </a:r>
             <a:r>
               <a:rPr lang="en-US" sz="1450" b="1" dirty="0">
                 <a:solidFill>
@@ -10815,11 +11223,8 @@
                 <a:ea typeface="Courier New" pitchFamily="34" charset="-122"/>
                 <a:cs typeface="Courier New" pitchFamily="34" charset="-120"/>
               </a:rPr>
-              <a:t>d~ = −1</a:t>
-            </a:r>
-            <a:pPr indent="0" marL="0">
-              <a:buNone/>
-            </a:pPr>
+              <a:t>= −1</a:t>
+            </a:r>
             <a:r>
               <a:rPr lang="en-US" sz="1450" i="1" dirty="0">
                 <a:solidFill>
@@ -10861,13 +11266,20 @@
             <a:prstDash val="solid"/>
           </a:ln>
           <a:effectLst>
-            <a:outerShdw sx="100000" sy="100000" kx="0" ky="0" algn="bl" rotWithShape="0" blurRad="88900" dist="25400" dir="2700000">
+            <a:outerShdw blurRad="88900" dist="25400" dir="2700000" algn="bl" rotWithShape="0">
               <a:srgbClr val="000000">
                 <a:alpha val="13000"/>
               </a:srgbClr>
             </a:outerShdw>
           </a:effectLst>
         </p:spPr>
+        <p:txBody>
+          <a:bodyPr/>
+          <a:lstStyle/>
+          <a:p>
+            <a:endParaRPr lang="it-IT"/>
+          </a:p>
+        </p:txBody>
       </p:sp>
       <p:sp>
         <p:nvSpPr>
@@ -10890,11 +11302,11 @@
           <a:bodyPr wrap="square" lIns="0" tIns="0" rIns="0" bIns="0" rtlCol="0" anchor="ctr"/>
           <a:lstStyle/>
           <a:p>
-            <a:pPr indent="0" marL="0">
-              <a:buNone/>
-            </a:pPr>
-            <a:r>
-              <a:rPr lang="en-US" sz="1100" b="1" spc="200" kern="0" dirty="0">
+            <a:pPr marL="0" indent="0">
+              <a:buNone/>
+            </a:pPr>
+            <a:r>
+              <a:rPr lang="en-US" sz="1100" b="1" kern="0" spc="200" dirty="0">
                 <a:solidFill>
                   <a:srgbClr val="B23A2F"/>
                 </a:solidFill>
@@ -10902,7 +11314,7 @@
                 <a:ea typeface="Courier New" pitchFamily="34" charset="-122"/>
                 <a:cs typeface="Courier New" pitchFamily="34" charset="-120"/>
               </a:rPr>
-              <a:t>OSSERVAZIONE CRITICA (da discussione)</a:t>
+              <a:t>OSSERVAZIONE CRITICA</a:t>
             </a:r>
             <a:endParaRPr lang="en-US" sz="1100" dirty="0"/>
           </a:p>
@@ -10929,7 +11341,7 @@
           <a:bodyPr wrap="square" lIns="0" tIns="0" rIns="0" bIns="0" rtlCol="0" anchor="ctr"/>
           <a:lstStyle/>
           <a:p>
-            <a:pPr indent="0" marL="0">
+            <a:pPr marL="0" indent="0">
               <a:buNone/>
             </a:pPr>
             <a:r>
@@ -10943,9 +11355,6 @@
               </a:rPr>
               <a:t>d̃(v, v) = +x, il valore massimo: formalmente è una </a:t>
             </a:r>
-            <a:pPr indent="0" marL="0">
-              <a:buNone/>
-            </a:pPr>
             <a:r>
               <a:rPr lang="en-US" sz="1350" b="1" dirty="0">
                 <a:solidFill>
@@ -10957,9 +11366,6 @@
               </a:rPr>
               <a:t>similarità</a:t>
             </a:r>
-            <a:pPr indent="0" marL="0">
-              <a:buNone/>
-            </a:pPr>
             <a:r>
               <a:rPr lang="en-US" sz="1350" dirty="0">
                 <a:solidFill>
@@ -10991,6 +11397,7 @@
         <a:solidFill>
           <a:srgbClr val="FFFFFF"/>
         </a:solidFill>
+        <a:effectLst/>
       </p:bgPr>
     </p:bg>
     <p:spTree>
@@ -11028,11 +11435,11 @@
           <a:bodyPr wrap="square" lIns="0" tIns="0" rIns="0" bIns="0" rtlCol="0" anchor="ctr"/>
           <a:lstStyle/>
           <a:p>
-            <a:pPr indent="0" marL="0">
-              <a:buNone/>
-            </a:pPr>
-            <a:r>
-              <a:rPr lang="en-US" sz="1100" b="1" spc="300" kern="0" dirty="0">
+            <a:pPr marL="0" indent="0">
+              <a:buNone/>
+            </a:pPr>
+            <a:r>
+              <a:rPr lang="en-US" sz="1100" b="1" kern="0" spc="300" dirty="0">
                 <a:solidFill>
                   <a:srgbClr val="0B7A63"/>
                 </a:solidFill>
@@ -11040,7 +11447,7 @@
                 <a:ea typeface="Courier New" pitchFamily="34" charset="-122"/>
                 <a:cs typeface="Courier New" pitchFamily="34" charset="-120"/>
               </a:rPr>
-              <a:t>§ 4 · SECONDA LEVA</a:t>
+              <a:t>§ 4 · SECONDO INTERVENTO</a:t>
             </a:r>
             <a:endParaRPr lang="en-US" sz="1100" dirty="0"/>
           </a:p>
@@ -11067,7 +11474,7 @@
           <a:bodyPr wrap="square" lIns="0" tIns="0" rIns="0" bIns="0" rtlCol="0" anchor="ctr"/>
           <a:lstStyle/>
           <a:p>
-            <a:pPr indent="0" marL="0">
+            <a:pPr marL="0" indent="0">
               <a:buNone/>
             </a:pPr>
             <a:r>
@@ -11106,7 +11513,7 @@
           <a:bodyPr wrap="square" lIns="0" tIns="0" rIns="0" bIns="0" rtlCol="0" anchor="ctr"/>
           <a:lstStyle/>
           <a:p>
-            <a:pPr indent="0" marL="0">
+            <a:pPr marL="0" indent="0">
               <a:buNone/>
             </a:pPr>
             <a:r>
@@ -11120,9 +11527,6 @@
               </a:rPr>
               <a:t>Selezione (da traccia): </a:t>
             </a:r>
-            <a:pPr indent="0" marL="0">
-              <a:buNone/>
-            </a:pPr>
             <a:r>
               <a:rPr lang="en-US" sz="1550" b="1" dirty="0">
                 <a:solidFill>
@@ -11134,9 +11538,6 @@
               </a:rPr>
               <a:t>pⱼ = ⌊n/h⌋ · j,  j = 0 … h−1</a:t>
             </a:r>
-            <a:pPr indent="0" marL="0">
-              <a:buNone/>
-            </a:pPr>
             <a:r>
               <a:rPr lang="en-US" sz="1550" dirty="0">
                 <a:solidFill>
@@ -11178,13 +11579,20 @@
             <a:prstDash val="solid"/>
           </a:ln>
           <a:effectLst>
-            <a:outerShdw sx="100000" sy="100000" kx="0" ky="0" algn="bl" rotWithShape="0" blurRad="88900" dist="25400" dir="2700000">
+            <a:outerShdw blurRad="88900" dist="25400" dir="2700000" algn="bl" rotWithShape="0">
               <a:srgbClr val="000000">
                 <a:alpha val="13000"/>
               </a:srgbClr>
             </a:outerShdw>
           </a:effectLst>
         </p:spPr>
+        <p:txBody>
+          <a:bodyPr/>
+          <a:lstStyle/>
+          <a:p>
+            <a:endParaRPr lang="it-IT"/>
+          </a:p>
+        </p:txBody>
       </p:sp>
       <p:sp>
         <p:nvSpPr>
@@ -11210,6 +11618,13 @@
             <a:prstDash val="solid"/>
           </a:ln>
         </p:spPr>
+        <p:txBody>
+          <a:bodyPr/>
+          <a:lstStyle/>
+          <a:p>
+            <a:endParaRPr lang="it-IT"/>
+          </a:p>
+        </p:txBody>
       </p:sp>
       <p:sp>
         <p:nvSpPr>
@@ -11232,7 +11647,7 @@
           <a:bodyPr wrap="square" lIns="0" tIns="0" rIns="0" bIns="0" rtlCol="0" anchor="ctr"/>
           <a:lstStyle/>
           <a:p>
-            <a:pPr algn="ctr" indent="0" marL="0">
+            <a:pPr marL="0" indent="0" algn="ctr">
               <a:buNone/>
             </a:pPr>
             <a:r>
@@ -11271,7 +11686,7 @@
           <a:bodyPr wrap="square" lIns="0" tIns="0" rIns="0" bIns="0" rtlCol="0" anchor="ctr"/>
           <a:lstStyle/>
           <a:p>
-            <a:pPr indent="0" marL="0">
+            <a:pPr marL="0" indent="0">
               <a:buNone/>
             </a:pPr>
             <a:r>
@@ -11310,7 +11725,7 @@
           <a:bodyPr wrap="square" lIns="0" tIns="0" rIns="0" bIns="0" rtlCol="0" anchor="ctr"/>
           <a:lstStyle/>
           <a:p>
-            <a:pPr indent="0" marL="0">
+            <a:pPr marL="0" indent="0">
               <a:buNone/>
             </a:pPr>
             <a:r>
@@ -11354,13 +11769,20 @@
             <a:prstDash val="solid"/>
           </a:ln>
           <a:effectLst>
-            <a:outerShdw sx="100000" sy="100000" kx="0" ky="0" algn="bl" rotWithShape="0" blurRad="88900" dist="25400" dir="2700000">
+            <a:outerShdw blurRad="88900" dist="25400" dir="2700000" algn="bl" rotWithShape="0">
               <a:srgbClr val="000000">
                 <a:alpha val="13000"/>
               </a:srgbClr>
             </a:outerShdw>
           </a:effectLst>
         </p:spPr>
+        <p:txBody>
+          <a:bodyPr/>
+          <a:lstStyle/>
+          <a:p>
+            <a:endParaRPr lang="it-IT"/>
+          </a:p>
+        </p:txBody>
       </p:sp>
       <p:sp>
         <p:nvSpPr>
@@ -11386,6 +11808,13 @@
             <a:prstDash val="solid"/>
           </a:ln>
         </p:spPr>
+        <p:txBody>
+          <a:bodyPr/>
+          <a:lstStyle/>
+          <a:p>
+            <a:endParaRPr lang="it-IT"/>
+          </a:p>
+        </p:txBody>
       </p:sp>
       <p:sp>
         <p:nvSpPr>
@@ -11408,7 +11837,7 @@
           <a:bodyPr wrap="square" lIns="0" tIns="0" rIns="0" bIns="0" rtlCol="0" anchor="ctr"/>
           <a:lstStyle/>
           <a:p>
-            <a:pPr algn="ctr" indent="0" marL="0">
+            <a:pPr marL="0" indent="0" algn="ctr">
               <a:buNone/>
             </a:pPr>
             <a:r>
@@ -11447,7 +11876,7 @@
           <a:bodyPr wrap="square" lIns="0" tIns="0" rIns="0" bIns="0" rtlCol="0" anchor="ctr"/>
           <a:lstStyle/>
           <a:p>
-            <a:pPr indent="0" marL="0">
+            <a:pPr marL="0" indent="0">
               <a:buNone/>
             </a:pPr>
             <a:r>
@@ -11486,7 +11915,7 @@
           <a:bodyPr wrap="square" lIns="0" tIns="0" rIns="0" bIns="0" rtlCol="0" anchor="ctr"/>
           <a:lstStyle/>
           <a:p>
-            <a:pPr indent="0" marL="0">
+            <a:pPr marL="0" indent="0">
               <a:buNone/>
             </a:pPr>
             <a:r>
@@ -11530,13 +11959,20 @@
             <a:prstDash val="solid"/>
           </a:ln>
           <a:effectLst>
-            <a:outerShdw sx="100000" sy="100000" kx="0" ky="0" algn="bl" rotWithShape="0" blurRad="88900" dist="25400" dir="2700000">
+            <a:outerShdw blurRad="88900" dist="25400" dir="2700000" algn="bl" rotWithShape="0">
               <a:srgbClr val="000000">
                 <a:alpha val="13000"/>
               </a:srgbClr>
             </a:outerShdw>
           </a:effectLst>
         </p:spPr>
+        <p:txBody>
+          <a:bodyPr/>
+          <a:lstStyle/>
+          <a:p>
+            <a:endParaRPr lang="it-IT"/>
+          </a:p>
+        </p:txBody>
       </p:sp>
       <p:sp>
         <p:nvSpPr>
@@ -11562,6 +11998,13 @@
             <a:prstDash val="solid"/>
           </a:ln>
         </p:spPr>
+        <p:txBody>
+          <a:bodyPr/>
+          <a:lstStyle/>
+          <a:p>
+            <a:endParaRPr lang="it-IT"/>
+          </a:p>
+        </p:txBody>
       </p:sp>
       <p:sp>
         <p:nvSpPr>
@@ -11584,7 +12027,7 @@
           <a:bodyPr wrap="square" lIns="0" tIns="0" rIns="0" bIns="0" rtlCol="0" anchor="ctr"/>
           <a:lstStyle/>
           <a:p>
-            <a:pPr algn="ctr" indent="0" marL="0">
+            <a:pPr marL="0" indent="0" algn="ctr">
               <a:buNone/>
             </a:pPr>
             <a:r>
@@ -11623,7 +12066,7 @@
           <a:bodyPr wrap="square" lIns="0" tIns="0" rIns="0" bIns="0" rtlCol="0" anchor="ctr"/>
           <a:lstStyle/>
           <a:p>
-            <a:pPr indent="0" marL="0">
+            <a:pPr marL="0" indent="0">
               <a:buNone/>
             </a:pPr>
             <a:r>
@@ -11662,7 +12105,7 @@
           <a:bodyPr wrap="square" lIns="0" tIns="0" rIns="0" bIns="0" rtlCol="0" anchor="ctr"/>
           <a:lstStyle/>
           <a:p>
-            <a:pPr indent="0" marL="0">
+            <a:pPr marL="0" indent="0">
               <a:buNone/>
             </a:pPr>
             <a:r>
@@ -11706,13 +12149,20 @@
             <a:prstDash val="solid"/>
           </a:ln>
           <a:effectLst>
-            <a:outerShdw sx="100000" sy="100000" kx="0" ky="0" algn="bl" rotWithShape="0" blurRad="88900" dist="25400" dir="2700000">
+            <a:outerShdw blurRad="88900" dist="25400" dir="2700000" algn="bl" rotWithShape="0">
               <a:srgbClr val="000000">
                 <a:alpha val="13000"/>
               </a:srgbClr>
             </a:outerShdw>
           </a:effectLst>
         </p:spPr>
+        <p:txBody>
+          <a:bodyPr/>
+          <a:lstStyle/>
+          <a:p>
+            <a:endParaRPr lang="it-IT"/>
+          </a:p>
+        </p:txBody>
       </p:sp>
       <p:sp>
         <p:nvSpPr>
@@ -11735,7 +12185,7 @@
           <a:bodyPr wrap="square" lIns="0" tIns="0" rIns="0" bIns="0" rtlCol="0" anchor="ctr"/>
           <a:lstStyle/>
           <a:p>
-            <a:pPr indent="0" marL="0">
+            <a:pPr marL="0" indent="0">
               <a:buNone/>
             </a:pPr>
             <a:r>
@@ -11774,7 +12224,7 @@
           <a:bodyPr wrap="square" lIns="0" tIns="0" rIns="0" bIns="0" rtlCol="0" anchor="ctr"/>
           <a:lstStyle/>
           <a:p>
-            <a:pPr indent="0" marL="0">
+            <a:pPr marL="0" indent="0">
               <a:buNone/>
             </a:pPr>
             <a:r>
@@ -11791,7 +12241,7 @@
             <a:endParaRPr lang="en-US" sz="2200" dirty="0"/>
           </a:p>
           <a:p>
-            <a:pPr indent="0" marL="0">
+            <a:pPr marL="0" indent="0">
               <a:buNone/>
             </a:pPr>
             <a:r>
@@ -11808,13 +12258,13 @@
             <a:endParaRPr lang="en-US" sz="2200" dirty="0"/>
           </a:p>
           <a:p>
-            <a:pPr indent="0" marL="0">
+            <a:pPr marL="0" indent="0">
               <a:buNone/>
             </a:pPr>
             <a:endParaRPr lang="en-US" sz="2200" dirty="0"/>
           </a:p>
           <a:p>
-            <a:pPr indent="0" marL="0">
+            <a:pPr marL="0" indent="0">
               <a:buNone/>
             </a:pPr>
             <a:r>
@@ -11831,7 +12281,7 @@
             <a:endParaRPr lang="en-US" sz="2200" dirty="0"/>
           </a:p>
           <a:p>
-            <a:pPr indent="0" marL="0">
+            <a:pPr marL="0" indent="0">
               <a:buNone/>
             </a:pPr>
             <a:r>
@@ -11848,13 +12298,13 @@
             <a:endParaRPr lang="en-US" sz="2200" dirty="0"/>
           </a:p>
           <a:p>
-            <a:pPr indent="0" marL="0">
+            <a:pPr marL="0" indent="0">
               <a:buNone/>
             </a:pPr>
             <a:endParaRPr lang="en-US" sz="2200" dirty="0"/>
           </a:p>
           <a:p>
-            <a:pPr indent="0" marL="0">
+            <a:pPr marL="0" indent="0">
               <a:buNone/>
             </a:pPr>
             <a:r>
@@ -11893,7 +12343,7 @@
           <a:bodyPr wrap="square" lIns="0" tIns="0" rIns="0" bIns="0" rtlCol="0" anchor="ctr"/>
           <a:lstStyle/>
           <a:p>
-            <a:pPr indent="0" marL="0">
+            <a:pPr marL="0" indent="0">
               <a:buNone/>
             </a:pPr>
             <a:r>
@@ -11905,7 +12355,7 @@
                 <a:ea typeface="Calibri" pitchFamily="34" charset="-122"/>
                 <a:cs typeface="Calibri" pitchFamily="34" charset="-120"/>
               </a:rPr>
-              <a:t>Il build si paga una volta sola (67–193 ms) e l'indice è riutilizzato da tutte le query.</a:t>
+              <a:t>Il build si paga una volta sola e l'indice è riutilizzato da tutte le query.</a:t>
             </a:r>
             <a:endParaRPr lang="en-US" sz="1400" dirty="0"/>
           </a:p>
@@ -11927,6 +12377,7 @@
         <a:solidFill>
           <a:srgbClr val="FFFFFF"/>
         </a:solidFill>
+        <a:effectLst/>
       </p:bgPr>
     </p:bg>
     <p:spTree>
@@ -11964,11 +12415,11 @@
           <a:bodyPr wrap="square" lIns="0" tIns="0" rIns="0" bIns="0" rtlCol="0" anchor="ctr"/>
           <a:lstStyle/>
           <a:p>
-            <a:pPr indent="0" marL="0">
-              <a:buNone/>
-            </a:pPr>
-            <a:r>
-              <a:rPr lang="en-US" sz="1100" b="1" spc="300" kern="0" dirty="0">
+            <a:pPr marL="0" indent="0">
+              <a:buNone/>
+            </a:pPr>
+            <a:r>
+              <a:rPr lang="en-US" sz="1100" b="1" kern="0" spc="300" dirty="0">
                 <a:solidFill>
                   <a:srgbClr val="0B7A63"/>
                 </a:solidFill>
@@ -12003,7 +12454,7 @@
           <a:bodyPr wrap="square" lIns="0" tIns="0" rIns="0" bIns="0" rtlCol="0" anchor="ctr"/>
           <a:lstStyle/>
           <a:p>
-            <a:pPr indent="0" marL="0">
+            <a:pPr marL="0" indent="0">
               <a:buNone/>
             </a:pPr>
             <a:r>
@@ -12047,13 +12498,20 @@
             <a:prstDash val="solid"/>
           </a:ln>
           <a:effectLst>
-            <a:outerShdw sx="100000" sy="100000" kx="0" ky="0" algn="bl" rotWithShape="0" blurRad="88900" dist="25400" dir="2700000">
+            <a:outerShdw blurRad="88900" dist="25400" dir="2700000" algn="bl" rotWithShape="0">
               <a:srgbClr val="000000">
                 <a:alpha val="13000"/>
               </a:srgbClr>
             </a:outerShdw>
           </a:effectLst>
         </p:spPr>
+        <p:txBody>
+          <a:bodyPr/>
+          <a:lstStyle/>
+          <a:p>
+            <a:endParaRPr lang="it-IT"/>
+          </a:p>
+        </p:txBody>
       </p:sp>
       <p:sp>
         <p:nvSpPr>
@@ -12076,11 +12534,11 @@
           <a:bodyPr wrap="square" lIns="0" tIns="0" rIns="0" bIns="0" rtlCol="0" anchor="ctr"/>
           <a:lstStyle/>
           <a:p>
-            <a:pPr indent="0" marL="0">
-              <a:buNone/>
-            </a:pPr>
-            <a:r>
-              <a:rPr lang="en-US" sz="1150" b="1" spc="150" kern="0" dirty="0">
+            <a:pPr marL="0" indent="0">
+              <a:buNone/>
+            </a:pPr>
+            <a:r>
+              <a:rPr lang="en-US" sz="1150" b="1" kern="0" spc="150" dirty="0">
                 <a:solidFill>
                   <a:srgbClr val="0B7A63"/>
                 </a:solidFill>
@@ -12115,11 +12573,8 @@
           <a:bodyPr wrap="square" lIns="0" tIns="0" rIns="0" bIns="0" rtlCol="0" anchor="ctr"/>
           <a:lstStyle/>
           <a:p>
-            <a:pPr indent="0" marL="0">
-              <a:buNone/>
-            </a:pPr>
-            <a:r>
-              <a:rPr lang="en-US" sz="1300" b="1" dirty="0">
+            <a:r>
+              <a:rPr lang="en-US" sz="1200" b="1" dirty="0">
                 <a:solidFill>
                   <a:srgbClr val="171A20"/>
                 </a:solidFill>
@@ -12127,9 +12582,28 @@
                 <a:ea typeface="Courier New" pitchFamily="34" charset="-122"/>
                 <a:cs typeface="Courier New" pitchFamily="34" charset="-120"/>
               </a:rPr>
-              <a:t>d* = maxⱼ |d~(v,pⱼ) − d~(q,pⱼ)|</a:t>
-            </a:r>
-            <a:endParaRPr lang="en-US" sz="1300" dirty="0"/>
+              <a:t>d* = maxⱼ |d~(v,pⱼ) − </a:t>
+            </a:r>
+            <a:r>
+              <a:rPr lang="it-IT" sz="1200" b="1" dirty="0"/>
+              <a:t>d̃</a:t>
+            </a:r>
+            <a:r>
+              <a:rPr lang="it-IT" sz="1200" dirty="0"/>
+              <a:t> </a:t>
+            </a:r>
+            <a:r>
+              <a:rPr lang="en-US" sz="1200" b="1" dirty="0">
+                <a:solidFill>
+                  <a:srgbClr val="171A20"/>
+                </a:solidFill>
+                <a:latin typeface="Courier New" pitchFamily="34" charset="0"/>
+                <a:ea typeface="Courier New" pitchFamily="34" charset="-122"/>
+                <a:cs typeface="Courier New" pitchFamily="34" charset="-120"/>
+              </a:rPr>
+              <a:t>(q,pⱼ)|</a:t>
+            </a:r>
+            <a:endParaRPr lang="en-US" sz="1200" dirty="0"/>
           </a:p>
         </p:txBody>
       </p:sp>
@@ -12154,7 +12628,7 @@
           <a:bodyPr wrap="square" lIns="0" tIns="0" rIns="0" bIns="0" rtlCol="0" anchor="ctr"/>
           <a:lstStyle/>
           <a:p>
-            <a:pPr indent="0" marL="0">
+            <a:pPr marL="0" indent="0">
               <a:buNone/>
             </a:pPr>
             <a:r>
@@ -12193,7 +12667,7 @@
           <a:bodyPr wrap="square" lIns="0" tIns="0" rIns="0" bIns="0" rtlCol="0" anchor="ctr"/>
           <a:lstStyle/>
           <a:p>
-            <a:pPr indent="0" marL="0">
+            <a:pPr marL="0" indent="0">
               <a:buNone/>
             </a:pPr>
             <a:r>
@@ -12205,7 +12679,7 @@
                 <a:ea typeface="Arial" pitchFamily="34" charset="-122"/>
                 <a:cs typeface="Arial" pitchFamily="34" charset="-120"/>
               </a:rPr>
-              <a:t>elimina il 39,3%</a:t>
+              <a:t>Elimina il 39,3%</a:t>
             </a:r>
             <a:endParaRPr lang="en-US" sz="1900" dirty="0"/>
           </a:p>
@@ -12232,7 +12706,7 @@
           <a:bodyPr wrap="square" lIns="0" tIns="0" rIns="0" bIns="0" rtlCol="0" anchor="ctr"/>
           <a:lstStyle/>
           <a:p>
-            <a:pPr algn="ctr" indent="0" marL="0">
+            <a:pPr marL="0" indent="0" algn="ctr">
               <a:buNone/>
             </a:pPr>
             <a:r>
@@ -12276,13 +12750,20 @@
             <a:prstDash val="solid"/>
           </a:ln>
           <a:effectLst>
-            <a:outerShdw sx="100000" sy="100000" kx="0" ky="0" algn="bl" rotWithShape="0" blurRad="88900" dist="25400" dir="2700000">
+            <a:outerShdw blurRad="88900" dist="25400" dir="2700000" algn="bl" rotWithShape="0">
               <a:srgbClr val="000000">
                 <a:alpha val="13000"/>
               </a:srgbClr>
             </a:outerShdw>
           </a:effectLst>
         </p:spPr>
+        <p:txBody>
+          <a:bodyPr/>
+          <a:lstStyle/>
+          <a:p>
+            <a:endParaRPr lang="it-IT"/>
+          </a:p>
+        </p:txBody>
       </p:sp>
       <p:sp>
         <p:nvSpPr>
@@ -12305,11 +12786,11 @@
           <a:bodyPr wrap="square" lIns="0" tIns="0" rIns="0" bIns="0" rtlCol="0" anchor="ctr"/>
           <a:lstStyle/>
           <a:p>
-            <a:pPr indent="0" marL="0">
-              <a:buNone/>
-            </a:pPr>
-            <a:r>
-              <a:rPr lang="en-US" sz="1150" b="1" spc="150" kern="0" dirty="0">
+            <a:pPr marL="0" indent="0">
+              <a:buNone/>
+            </a:pPr>
+            <a:r>
+              <a:rPr lang="en-US" sz="1150" b="1" kern="0" spc="150" dirty="0">
                 <a:solidFill>
                   <a:srgbClr val="B23A2F"/>
                 </a:solidFill>
@@ -12344,9 +12825,14 @@
           <a:bodyPr wrap="square" lIns="0" tIns="0" rIns="0" bIns="0" rtlCol="0" anchor="ctr"/>
           <a:lstStyle/>
           <a:p>
-            <a:pPr indent="0" marL="0">
-              <a:buNone/>
-            </a:pPr>
+            <a:r>
+              <a:rPr lang="it-IT" sz="1400" dirty="0"/>
+              <a:t>d</a:t>
+            </a:r>
+            <a:r>
+              <a:rPr lang="it-IT" sz="1400" b="1" dirty="0"/>
+              <a:t>̃</a:t>
+            </a:r>
             <a:r>
               <a:rPr lang="en-US" sz="1300" b="1" dirty="0">
                 <a:solidFill>
@@ -12356,7 +12842,7 @@
                 <a:ea typeface="Courier New" pitchFamily="34" charset="-122"/>
                 <a:cs typeface="Courier New" pitchFamily="34" charset="-120"/>
               </a:rPr>
-              <a:t>d~(q, v) sulle maschere</a:t>
+              <a:t>(q, v) sulle maschere</a:t>
             </a:r>
             <a:endParaRPr lang="en-US" sz="1300" dirty="0"/>
           </a:p>
@@ -12383,7 +12869,7 @@
           <a:bodyPr wrap="square" lIns="0" tIns="0" rIns="0" bIns="0" rtlCol="0" anchor="ctr"/>
           <a:lstStyle/>
           <a:p>
-            <a:pPr indent="0" marL="0">
+            <a:pPr marL="0" indent="0">
               <a:buNone/>
             </a:pPr>
             <a:r>
@@ -12422,7 +12908,7 @@
           <a:bodyPr wrap="square" lIns="0" tIns="0" rIns="0" bIns="0" rtlCol="0" anchor="ctr"/>
           <a:lstStyle/>
           <a:p>
-            <a:pPr indent="0" marL="0">
+            <a:pPr marL="0" indent="0">
               <a:buNone/>
             </a:pPr>
             <a:r>
@@ -12434,7 +12920,7 @@
                 <a:ea typeface="Arial" pitchFamily="34" charset="-122"/>
                 <a:cs typeface="Arial" pitchFamily="34" charset="-120"/>
               </a:rPr>
-              <a:t>l'hot spot</a:t>
+              <a:t>L'hot spot</a:t>
             </a:r>
             <a:endParaRPr lang="en-US" sz="1900" dirty="0"/>
           </a:p>
@@ -12461,7 +12947,7 @@
           <a:bodyPr wrap="square" lIns="0" tIns="0" rIns="0" bIns="0" rtlCol="0" anchor="ctr"/>
           <a:lstStyle/>
           <a:p>
-            <a:pPr algn="ctr" indent="0" marL="0">
+            <a:pPr marL="0" indent="0" algn="ctr">
               <a:buNone/>
             </a:pPr>
             <a:r>
@@ -12505,13 +12991,20 @@
             <a:prstDash val="solid"/>
           </a:ln>
           <a:effectLst>
-            <a:outerShdw sx="100000" sy="100000" kx="0" ky="0" algn="bl" rotWithShape="0" blurRad="88900" dist="25400" dir="2700000">
+            <a:outerShdw blurRad="88900" dist="25400" dir="2700000" algn="bl" rotWithShape="0">
               <a:srgbClr val="000000">
                 <a:alpha val="13000"/>
               </a:srgbClr>
             </a:outerShdw>
           </a:effectLst>
         </p:spPr>
+        <p:txBody>
+          <a:bodyPr/>
+          <a:lstStyle/>
+          <a:p>
+            <a:endParaRPr lang="it-IT"/>
+          </a:p>
+        </p:txBody>
       </p:sp>
       <p:sp>
         <p:nvSpPr>
@@ -12534,11 +13027,11 @@
           <a:bodyPr wrap="square" lIns="0" tIns="0" rIns="0" bIns="0" rtlCol="0" anchor="ctr"/>
           <a:lstStyle/>
           <a:p>
-            <a:pPr indent="0" marL="0">
-              <a:buNone/>
-            </a:pPr>
-            <a:r>
-              <a:rPr lang="en-US" sz="1150" b="1" spc="150" kern="0" dirty="0">
+            <a:pPr marL="0" indent="0">
+              <a:buNone/>
+            </a:pPr>
+            <a:r>
+              <a:rPr lang="en-US" sz="1150" b="1" kern="0" spc="150" dirty="0">
                 <a:solidFill>
                   <a:srgbClr val="0B7A63"/>
                 </a:solidFill>
@@ -12573,7 +13066,7 @@
           <a:bodyPr wrap="square" lIns="0" tIns="0" rIns="0" bIns="0" rtlCol="0" anchor="ctr"/>
           <a:lstStyle/>
           <a:p>
-            <a:pPr indent="0" marL="0">
+            <a:pPr marL="0" indent="0">
               <a:buNone/>
             </a:pPr>
             <a:r>
@@ -12612,7 +13105,7 @@
           <a:bodyPr wrap="square" lIns="0" tIns="0" rIns="0" bIns="0" rtlCol="0" anchor="ctr"/>
           <a:lstStyle/>
           <a:p>
-            <a:pPr indent="0" marL="0">
+            <a:pPr marL="0" indent="0">
               <a:buNone/>
             </a:pPr>
             <a:r>
@@ -12651,7 +13144,7 @@
           <a:bodyPr wrap="square" lIns="0" tIns="0" rIns="0" bIns="0" rtlCol="0" anchor="ctr"/>
           <a:lstStyle/>
           <a:p>
-            <a:pPr indent="0" marL="0">
+            <a:pPr marL="0" indent="0">
               <a:buNone/>
             </a:pPr>
             <a:r>
@@ -12690,7 +13183,7 @@
           <a:bodyPr wrap="square" lIns="0" tIns="0" rIns="0" bIns="0" rtlCol="0" anchor="ctr"/>
           <a:lstStyle/>
           <a:p>
-            <a:pPr indent="0" marL="0">
+            <a:pPr marL="0" indent="0">
               <a:buNone/>
             </a:pPr>
             <a:r>
@@ -12704,9 +13197,6 @@
               </a:rPr>
               <a:t>Risultato per query: </a:t>
             </a:r>
-            <a:pPr indent="0" marL="0">
-              <a:buNone/>
-            </a:pPr>
             <a:r>
               <a:rPr lang="en-US" sz="1450" dirty="0">
                 <a:solidFill>
@@ -12716,7 +13206,51 @@
                 <a:ea typeface="Calibri" pitchFamily="34" charset="-122"/>
                 <a:cs typeface="Calibri" pitchFamily="34" charset="-120"/>
               </a:rPr>
-              <a:t>k coppie ⟨id, δ⟩ con δ = distanza euclidea vera — stessa convenzione (ordine degli slot) dei file di riferimento ufficiali.</a:t>
+              <a:t>k coppie ⟨id, </a:t>
+            </a:r>
+            <a:r>
+              <a:rPr lang="en-US" sz="1450" dirty="0" err="1">
+                <a:solidFill>
+                  <a:srgbClr val="171A20"/>
+                </a:solidFill>
+                <a:latin typeface="Calibri" pitchFamily="34" charset="0"/>
+                <a:ea typeface="Calibri" pitchFamily="34" charset="-122"/>
+                <a:cs typeface="Calibri" pitchFamily="34" charset="-120"/>
+              </a:rPr>
+              <a:t>dist</a:t>
+            </a:r>
+            <a:r>
+              <a:rPr lang="en-US" sz="1450" dirty="0">
+                <a:solidFill>
+                  <a:srgbClr val="171A20"/>
+                </a:solidFill>
+                <a:latin typeface="Calibri" pitchFamily="34" charset="0"/>
+                <a:ea typeface="Calibri" pitchFamily="34" charset="-122"/>
+                <a:cs typeface="Calibri" pitchFamily="34" charset="-120"/>
+              </a:rPr>
+              <a:t>⟩ con </a:t>
+            </a:r>
+            <a:r>
+              <a:rPr lang="en-US" sz="1450" dirty="0" err="1">
+                <a:solidFill>
+                  <a:srgbClr val="171A20"/>
+                </a:solidFill>
+                <a:latin typeface="Calibri" pitchFamily="34" charset="0"/>
+                <a:ea typeface="Calibri" pitchFamily="34" charset="-122"/>
+                <a:cs typeface="Calibri" pitchFamily="34" charset="-120"/>
+              </a:rPr>
+              <a:t>dist</a:t>
+            </a:r>
+            <a:r>
+              <a:rPr lang="en-US" sz="1450" dirty="0">
+                <a:solidFill>
+                  <a:srgbClr val="171A20"/>
+                </a:solidFill>
+                <a:latin typeface="Calibri" pitchFamily="34" charset="0"/>
+                <a:ea typeface="Calibri" pitchFamily="34" charset="-122"/>
+                <a:cs typeface="Calibri" pitchFamily="34" charset="-120"/>
+              </a:rPr>
+              <a:t> = distanza euclidea vera — stessa convenzione (ordine degli slot) dei file di riferimento ufficiali.</a:t>
             </a:r>
             <a:endParaRPr lang="en-US" sz="1450" dirty="0"/>
           </a:p>
@@ -12738,6 +13272,7 @@
         <a:solidFill>
           <a:srgbClr val="FFFFFF"/>
         </a:solidFill>
+        <a:effectLst/>
       </p:bgPr>
     </p:bg>
     <p:spTree>
@@ -12775,11 +13310,11 @@
           <a:bodyPr wrap="square" lIns="0" tIns="0" rIns="0" bIns="0" rtlCol="0" anchor="ctr"/>
           <a:lstStyle/>
           <a:p>
-            <a:pPr indent="0" marL="0">
-              <a:buNone/>
-            </a:pPr>
-            <a:r>
-              <a:rPr lang="en-US" sz="1100" b="1" spc="300" kern="0" dirty="0">
+            <a:pPr marL="0" indent="0">
+              <a:buNone/>
+            </a:pPr>
+            <a:r>
+              <a:rPr lang="en-US" sz="1100" b="1" kern="0" spc="300" dirty="0">
                 <a:solidFill>
                   <a:srgbClr val="0B7A63"/>
                 </a:solidFill>
@@ -12814,7 +13349,7 @@
           <a:bodyPr wrap="square" lIns="0" tIns="0" rIns="0" bIns="0" rtlCol="0" anchor="ctr"/>
           <a:lstStyle/>
           <a:p>
-            <a:pPr indent="0" marL="0">
+            <a:pPr marL="0" indent="0">
               <a:buNone/>
             </a:pPr>
             <a:r>
@@ -12858,13 +13393,20 @@
             <a:prstDash val="solid"/>
           </a:ln>
           <a:effectLst>
-            <a:outerShdw sx="100000" sy="100000" kx="0" ky="0" algn="bl" rotWithShape="0" blurRad="88900" dist="25400" dir="2700000">
+            <a:outerShdw blurRad="88900" dist="25400" dir="2700000" algn="bl" rotWithShape="0">
               <a:srgbClr val="000000">
                 <a:alpha val="13000"/>
               </a:srgbClr>
             </a:outerShdw>
           </a:effectLst>
         </p:spPr>
+        <p:txBody>
+          <a:bodyPr/>
+          <a:lstStyle/>
+          <a:p>
+            <a:endParaRPr lang="it-IT"/>
+          </a:p>
+        </p:txBody>
       </p:sp>
       <p:sp>
         <p:nvSpPr>
@@ -12887,7 +13429,7 @@
           <a:bodyPr wrap="square" lIns="0" tIns="0" rIns="0" bIns="0" rtlCol="0" anchor="ctr"/>
           <a:lstStyle/>
           <a:p>
-            <a:pPr indent="0" marL="0">
+            <a:pPr marL="0" indent="0">
               <a:buNone/>
             </a:pPr>
             <a:r>
@@ -12904,7 +13446,7 @@
             <a:endParaRPr lang="en-US" sz="1500" dirty="0"/>
           </a:p>
           <a:p>
-            <a:pPr indent="0" marL="0">
+            <a:pPr marL="0" indent="0">
               <a:buNone/>
             </a:pPr>
             <a:r>
@@ -12943,7 +13485,7 @@
           <a:bodyPr wrap="square" lIns="0" tIns="0" rIns="0" bIns="0" rtlCol="0" anchor="ctr"/>
           <a:lstStyle/>
           <a:p>
-            <a:pPr algn="ctr" indent="0" marL="0">
+            <a:pPr marL="0" indent="0" algn="ctr">
               <a:buNone/>
             </a:pPr>
             <a:r>
@@ -12987,13 +13529,20 @@
             <a:prstDash val="solid"/>
           </a:ln>
           <a:effectLst>
-            <a:outerShdw sx="100000" sy="100000" kx="0" ky="0" algn="bl" rotWithShape="0" blurRad="88900" dist="25400" dir="2700000">
+            <a:outerShdw blurRad="88900" dist="25400" dir="2700000" algn="bl" rotWithShape="0">
               <a:srgbClr val="000000">
                 <a:alpha val="13000"/>
               </a:srgbClr>
             </a:outerShdw>
           </a:effectLst>
         </p:spPr>
+        <p:txBody>
+          <a:bodyPr/>
+          <a:lstStyle/>
+          <a:p>
+            <a:endParaRPr lang="it-IT"/>
+          </a:p>
+        </p:txBody>
       </p:sp>
       <p:sp>
         <p:nvSpPr>
@@ -13016,7 +13565,7 @@
           <a:bodyPr wrap="square" lIns="0" tIns="0" rIns="0" bIns="0" rtlCol="0" anchor="ctr"/>
           <a:lstStyle/>
           <a:p>
-            <a:pPr indent="0" marL="0">
+            <a:pPr marL="0" indent="0">
               <a:buNone/>
             </a:pPr>
             <a:r>
@@ -13055,7 +13604,7 @@
           <a:bodyPr wrap="square" lIns="0" tIns="0" rIns="0" bIns="0" rtlCol="0" anchor="ctr"/>
           <a:lstStyle/>
           <a:p>
-            <a:pPr indent="0" marL="0">
+            <a:pPr marL="0" indent="0">
               <a:buNone/>
             </a:pPr>
             <a:r>
@@ -13072,7 +13621,7 @@
             <a:endParaRPr lang="en-US" sz="1200" dirty="0"/>
           </a:p>
           <a:p>
-            <a:pPr indent="0" marL="0">
+            <a:pPr marL="0" indent="0">
               <a:buNone/>
             </a:pPr>
             <a:r>
@@ -13111,7 +13660,7 @@
           <a:bodyPr wrap="square" lIns="0" tIns="0" rIns="0" bIns="0" rtlCol="0" anchor="ctr"/>
           <a:lstStyle/>
           <a:p>
-            <a:pPr indent="0" marL="0">
+            <a:pPr marL="0" indent="0">
               <a:buNone/>
             </a:pPr>
             <a:r>
@@ -13155,13 +13704,20 @@
             <a:prstDash val="solid"/>
           </a:ln>
           <a:effectLst>
-            <a:outerShdw sx="100000" sy="100000" kx="0" ky="0" algn="bl" rotWithShape="0" blurRad="88900" dist="25400" dir="2700000">
+            <a:outerShdw blurRad="88900" dist="25400" dir="2700000" algn="bl" rotWithShape="0">
               <a:srgbClr val="000000">
                 <a:alpha val="13000"/>
               </a:srgbClr>
             </a:outerShdw>
           </a:effectLst>
         </p:spPr>
+        <p:txBody>
+          <a:bodyPr/>
+          <a:lstStyle/>
+          <a:p>
+            <a:endParaRPr lang="it-IT"/>
+          </a:p>
+        </p:txBody>
       </p:sp>
       <p:sp>
         <p:nvSpPr>
@@ -13184,7 +13740,7 @@
           <a:bodyPr wrap="square" lIns="0" tIns="0" rIns="0" bIns="0" rtlCol="0" anchor="ctr"/>
           <a:lstStyle/>
           <a:p>
-            <a:pPr indent="0" marL="0">
+            <a:pPr marL="0" indent="0">
               <a:buNone/>
             </a:pPr>
             <a:r>
@@ -13223,7 +13779,7 @@
           <a:bodyPr wrap="square" lIns="0" tIns="0" rIns="0" bIns="0" rtlCol="0" anchor="ctr"/>
           <a:lstStyle/>
           <a:p>
-            <a:pPr indent="0" marL="0">
+            <a:pPr marL="0" indent="0">
               <a:buNone/>
             </a:pPr>
             <a:r>
@@ -13240,7 +13796,7 @@
             <a:endParaRPr lang="en-US" sz="1200" dirty="0"/>
           </a:p>
           <a:p>
-            <a:pPr indent="0" marL="0">
+            <a:pPr marL="0" indent="0">
               <a:buNone/>
             </a:pPr>
             <a:r>
@@ -13279,7 +13835,7 @@
           <a:bodyPr wrap="square" lIns="0" tIns="0" rIns="0" bIns="0" rtlCol="0" anchor="ctr"/>
           <a:lstStyle/>
           <a:p>
-            <a:pPr indent="0" marL="0">
+            <a:pPr marL="0" indent="0">
               <a:buNone/>
             </a:pPr>
             <a:r>
@@ -13323,13 +13879,20 @@
             <a:prstDash val="solid"/>
           </a:ln>
           <a:effectLst>
-            <a:outerShdw sx="100000" sy="100000" kx="0" ky="0" algn="bl" rotWithShape="0" blurRad="88900" dist="25400" dir="2700000">
+            <a:outerShdw blurRad="88900" dist="25400" dir="2700000" algn="bl" rotWithShape="0">
               <a:srgbClr val="000000">
                 <a:alpha val="13000"/>
               </a:srgbClr>
             </a:outerShdw>
           </a:effectLst>
         </p:spPr>
+        <p:txBody>
+          <a:bodyPr/>
+          <a:lstStyle/>
+          <a:p>
+            <a:endParaRPr lang="it-IT"/>
+          </a:p>
+        </p:txBody>
       </p:sp>
       <p:sp>
         <p:nvSpPr>
@@ -13352,7 +13915,7 @@
           <a:bodyPr wrap="square" lIns="0" tIns="0" rIns="0" bIns="0" rtlCol="0" anchor="ctr"/>
           <a:lstStyle/>
           <a:p>
-            <a:pPr indent="0" marL="0">
+            <a:pPr marL="0" indent="0">
               <a:buNone/>
             </a:pPr>
             <a:r>
@@ -13391,7 +13954,7 @@
           <a:bodyPr wrap="square" lIns="0" tIns="0" rIns="0" bIns="0" rtlCol="0" anchor="ctr"/>
           <a:lstStyle/>
           <a:p>
-            <a:pPr indent="0" marL="0">
+            <a:pPr marL="0" indent="0">
               <a:buNone/>
             </a:pPr>
             <a:r>
@@ -13408,7 +13971,7 @@
             <a:endParaRPr lang="en-US" sz="1200" dirty="0"/>
           </a:p>
           <a:p>
-            <a:pPr indent="0" marL="0">
+            <a:pPr marL="0" indent="0">
               <a:buNone/>
             </a:pPr>
             <a:r>
@@ -13447,7 +14010,7 @@
           <a:bodyPr wrap="square" lIns="0" tIns="0" rIns="0" bIns="0" rtlCol="0" anchor="ctr"/>
           <a:lstStyle/>
           <a:p>
-            <a:pPr indent="0" marL="0">
+            <a:pPr marL="0" indent="0">
               <a:buNone/>
             </a:pPr>
             <a:r>
@@ -13491,13 +14054,20 @@
             <a:prstDash val="solid"/>
           </a:ln>
           <a:effectLst>
-            <a:outerShdw sx="100000" sy="100000" kx="0" ky="0" algn="bl" rotWithShape="0" blurRad="88900" dist="25400" dir="2700000">
+            <a:outerShdw blurRad="88900" dist="25400" dir="2700000" algn="bl" rotWithShape="0">
               <a:srgbClr val="000000">
                 <a:alpha val="13000"/>
               </a:srgbClr>
             </a:outerShdw>
           </a:effectLst>
         </p:spPr>
+        <p:txBody>
+          <a:bodyPr/>
+          <a:lstStyle/>
+          <a:p>
+            <a:endParaRPr lang="it-IT"/>
+          </a:p>
+        </p:txBody>
       </p:sp>
       <p:sp>
         <p:nvSpPr>
@@ -13520,7 +14090,7 @@
           <a:bodyPr wrap="square" lIns="0" tIns="0" rIns="0" bIns="0" rtlCol="0" anchor="ctr"/>
           <a:lstStyle/>
           <a:p>
-            <a:pPr indent="0" marL="0">
+            <a:pPr marL="0" indent="0">
               <a:buNone/>
             </a:pPr>
             <a:r>
@@ -13559,7 +14129,7 @@
           <a:bodyPr wrap="square" lIns="0" tIns="0" rIns="0" bIns="0" rtlCol="0" anchor="ctr"/>
           <a:lstStyle/>
           <a:p>
-            <a:pPr indent="0" marL="0">
+            <a:pPr marL="0" indent="0">
               <a:buNone/>
             </a:pPr>
             <a:r>
@@ -13576,7 +14146,7 @@
             <a:endParaRPr lang="en-US" sz="1200" dirty="0"/>
           </a:p>
           <a:p>
-            <a:pPr indent="0" marL="0">
+            <a:pPr marL="0" indent="0">
               <a:buNone/>
             </a:pPr>
             <a:r>
@@ -13615,7 +14185,7 @@
           <a:bodyPr wrap="square" lIns="0" tIns="0" rIns="0" bIns="0" rtlCol="0" anchor="ctr"/>
           <a:lstStyle/>
           <a:p>
-            <a:pPr indent="0" marL="0">
+            <a:pPr marL="0" indent="0">
               <a:buNone/>
             </a:pPr>
             <a:r>
@@ -13659,6 +14229,13 @@
             <a:prstDash val="solid"/>
           </a:ln>
         </p:spPr>
+        <p:txBody>
+          <a:bodyPr/>
+          <a:lstStyle/>
+          <a:p>
+            <a:endParaRPr lang="it-IT"/>
+          </a:p>
+        </p:txBody>
       </p:sp>
       <p:sp>
         <p:nvSpPr>
@@ -13681,7 +14258,7 @@
           <a:bodyPr wrap="square" lIns="0" tIns="0" rIns="0" bIns="0" rtlCol="0" anchor="ctr"/>
           <a:lstStyle/>
           <a:p>
-            <a:pPr indent="0" marL="0">
+            <a:pPr marL="0" indent="0">
               <a:buNone/>
             </a:pPr>
             <a:r>
@@ -13695,9 +14272,6 @@
               </a:rPr>
               <a:t>Perché conta: </a:t>
             </a:r>
-            <a:pPr indent="0" marL="0">
-              <a:buNone/>
-            </a:pPr>
             <a:r>
               <a:rPr lang="en-US" sz="1400" dirty="0">
                 <a:solidFill>
@@ -13729,6 +14303,7 @@
         <a:solidFill>
           <a:srgbClr val="FFFFFF"/>
         </a:solidFill>
+        <a:effectLst/>
       </p:bgPr>
     </p:bg>
     <p:spTree>
@@ -13766,11 +14341,11 @@
           <a:bodyPr wrap="square" lIns="0" tIns="0" rIns="0" bIns="0" rtlCol="0" anchor="ctr"/>
           <a:lstStyle/>
           <a:p>
-            <a:pPr indent="0" marL="0">
-              <a:buNone/>
-            </a:pPr>
-            <a:r>
-              <a:rPr lang="en-US" sz="1100" b="1" spc="300" kern="0" dirty="0">
+            <a:pPr marL="0" indent="0">
+              <a:buNone/>
+            </a:pPr>
+            <a:r>
+              <a:rPr lang="en-US" sz="1100" b="1" kern="0" spc="300" dirty="0">
                 <a:solidFill>
                   <a:srgbClr val="0B7A63"/>
                 </a:solidFill>
@@ -13805,7 +14380,7 @@
           <a:bodyPr wrap="square" lIns="0" tIns="0" rIns="0" bIns="0" rtlCol="0" anchor="ctr"/>
           <a:lstStyle/>
           <a:p>
-            <a:pPr indent="0" marL="0">
+            <a:pPr marL="0" indent="0">
               <a:buNone/>
             </a:pPr>
             <a:r>
@@ -13849,6 +14424,13 @@
             <a:prstDash val="solid"/>
           </a:ln>
         </p:spPr>
+        <p:txBody>
+          <a:bodyPr/>
+          <a:lstStyle/>
+          <a:p>
+            <a:endParaRPr lang="it-IT"/>
+          </a:p>
+        </p:txBody>
       </p:sp>
       <p:sp>
         <p:nvSpPr>
@@ -13871,7 +14453,7 @@
           <a:bodyPr wrap="square" lIns="0" tIns="0" rIns="0" bIns="0" rtlCol="0" anchor="t"/>
           <a:lstStyle/>
           <a:p>
-            <a:pPr indent="0" marL="0">
+            <a:pPr marL="0" indent="0">
               <a:buNone/>
             </a:pPr>
             <a:r>
@@ -13888,7 +14470,7 @@
             <a:endParaRPr lang="en-US" sz="1400" dirty="0"/>
           </a:p>
           <a:p>
-            <a:pPr indent="0" marL="0">
+            <a:pPr marL="0" indent="0">
               <a:buNone/>
             </a:pPr>
             <a:r>
@@ -13902,9 +14484,6 @@
               </a:rPr>
               <a:t>vpand   </a:t>
             </a:r>
-            <a:pPr indent="0" marL="0">
-              <a:buNone/>
-            </a:pPr>
             <a:r>
               <a:rPr lang="en-US" sz="1400" dirty="0">
                 <a:solidFill>
@@ -13916,9 +14495,6 @@
               </a:rPr>
               <a:t>ymm4, ymm0, ymm2 </a:t>
             </a:r>
-            <a:pPr indent="0" marL="0">
-              <a:buNone/>
-            </a:pPr>
             <a:r>
               <a:rPr lang="en-US" sz="1400" dirty="0">
                 <a:solidFill>
@@ -13933,7 +14509,7 @@
             <a:endParaRPr lang="en-US" sz="1400" dirty="0"/>
           </a:p>
           <a:p>
-            <a:pPr indent="0" marL="0">
+            <a:pPr marL="0" indent="0">
               <a:buNone/>
             </a:pPr>
             <a:r>
@@ -13947,9 +14523,6 @@
               </a:rPr>
               <a:t>vpsadbw </a:t>
             </a:r>
-            <a:pPr indent="0" marL="0">
-              <a:buNone/>
-            </a:pPr>
             <a:r>
               <a:rPr lang="en-US" sz="1400" dirty="0">
                 <a:solidFill>
@@ -13961,9 +14534,6 @@
               </a:rPr>
               <a:t>ymm4, ymm4, ymm15</a:t>
             </a:r>
-            <a:pPr indent="0" marL="0">
-              <a:buNone/>
-            </a:pPr>
             <a:r>
               <a:rPr lang="en-US" sz="1400" dirty="0">
                 <a:solidFill>
@@ -13978,7 +14548,7 @@
             <a:endParaRPr lang="en-US" sz="1400" dirty="0"/>
           </a:p>
           <a:p>
-            <a:pPr indent="0" marL="0">
+            <a:pPr marL="0" indent="0">
               <a:buNone/>
             </a:pPr>
             <a:r>
@@ -13992,9 +14562,6 @@
               </a:rPr>
               <a:t>vpaddq  </a:t>
             </a:r>
-            <a:pPr indent="0" marL="0">
-              <a:buNone/>
-            </a:pPr>
             <a:r>
               <a:rPr lang="en-US" sz="1400" dirty="0">
                 <a:solidFill>
@@ -14006,9 +14573,6 @@
               </a:rPr>
               <a:t>ymm8, ymm8, ymm4 </a:t>
             </a:r>
-            <a:pPr indent="0" marL="0">
-              <a:buNone/>
-            </a:pPr>
             <a:r>
               <a:rPr lang="en-US" sz="1400" dirty="0">
                 <a:solidFill>
@@ -14045,7 +14609,7 @@
           <a:bodyPr wrap="square" lIns="0" tIns="0" rIns="0" bIns="0" rtlCol="0" anchor="ctr"/>
           <a:lstStyle/>
           <a:p>
-            <a:pPr indent="0" marL="0">
+            <a:pPr marL="0" indent="0">
               <a:buNone/>
             </a:pPr>
             <a:r>
@@ -14059,9 +14623,6 @@
               </a:rPr>
               <a:t>PSADBW</a:t>
             </a:r>
-            <a:pPr indent="0" marL="0">
-              <a:buNone/>
-            </a:pPr>
             <a:r>
               <a:rPr lang="en-US" sz="1450" dirty="0">
                 <a:solidFill>
@@ -14073,9 +14634,6 @@
               </a:rPr>
               <a:t> (somma di differenze assolute, nata per i codec video) usata </a:t>
             </a:r>
-            <a:pPr indent="0" marL="0">
-              <a:buNone/>
-            </a:pPr>
             <a:r>
               <a:rPr lang="en-US" sz="1450" b="1" dirty="0">
                 <a:solidFill>
@@ -14087,9 +14645,6 @@
               </a:rPr>
               <a:t>contro il registro zero</a:t>
             </a:r>
-            <a:pPr indent="0" marL="0">
-              <a:buNone/>
-            </a:pPr>
             <a:r>
               <a:rPr lang="en-US" sz="1450" dirty="0">
                 <a:solidFill>
@@ -14126,7 +14681,7 @@
           <a:bodyPr wrap="square" lIns="0" tIns="0" rIns="0" bIns="0" rtlCol="0" anchor="ctr"/>
           <a:lstStyle/>
           <a:p>
-            <a:pPr indent="0" marL="0">
+            <a:pPr marL="0" indent="0">
               <a:buNone/>
             </a:pPr>
             <a:r>
@@ -14170,13 +14725,20 @@
             <a:prstDash val="solid"/>
           </a:ln>
           <a:effectLst>
-            <a:outerShdw sx="100000" sy="100000" kx="0" ky="0" algn="bl" rotWithShape="0" blurRad="88900" dist="25400" dir="2700000">
+            <a:outerShdw blurRad="88900" dist="25400" dir="2700000" algn="bl" rotWithShape="0">
               <a:srgbClr val="000000">
                 <a:alpha val="13000"/>
               </a:srgbClr>
             </a:outerShdw>
           </a:effectLst>
         </p:spPr>
+        <p:txBody>
+          <a:bodyPr/>
+          <a:lstStyle/>
+          <a:p>
+            <a:endParaRPr lang="it-IT"/>
+          </a:p>
+        </p:txBody>
       </p:sp>
       <p:sp>
         <p:nvSpPr>
@@ -14199,7 +14761,7 @@
           <a:bodyPr wrap="square" lIns="0" tIns="0" rIns="0" bIns="0" rtlCol="0" anchor="ctr"/>
           <a:lstStyle/>
           <a:p>
-            <a:pPr indent="0" marL="0">
+            <a:pPr marL="0" indent="0">
               <a:buNone/>
             </a:pPr>
             <a:r>
@@ -14238,7 +14800,7 @@
           <a:bodyPr wrap="square" lIns="0" tIns="0" rIns="0" bIns="0" rtlCol="0" anchor="ctr"/>
           <a:lstStyle/>
           <a:p>
-            <a:pPr indent="0" marL="0">
+            <a:pPr marL="0" indent="0">
               <a:buNone/>
             </a:pPr>
             <a:r>
@@ -14282,13 +14844,20 @@
             <a:prstDash val="solid"/>
           </a:ln>
           <a:effectLst>
-            <a:outerShdw sx="100000" sy="100000" kx="0" ky="0" algn="bl" rotWithShape="0" blurRad="88900" dist="25400" dir="2700000">
+            <a:outerShdw blurRad="88900" dist="25400" dir="2700000" algn="bl" rotWithShape="0">
               <a:srgbClr val="000000">
                 <a:alpha val="13000"/>
               </a:srgbClr>
             </a:outerShdw>
           </a:effectLst>
         </p:spPr>
+        <p:txBody>
+          <a:bodyPr/>
+          <a:lstStyle/>
+          <a:p>
+            <a:endParaRPr lang="it-IT"/>
+          </a:p>
+        </p:txBody>
       </p:sp>
       <p:sp>
         <p:nvSpPr>
@@ -14311,7 +14880,7 @@
           <a:bodyPr wrap="square" lIns="0" tIns="0" rIns="0" bIns="0" rtlCol="0" anchor="ctr"/>
           <a:lstStyle/>
           <a:p>
-            <a:pPr indent="0" marL="0">
+            <a:pPr marL="0" indent="0">
               <a:buNone/>
             </a:pPr>
             <a:r>
@@ -14350,7 +14919,7 @@
           <a:bodyPr wrap="square" lIns="0" tIns="0" rIns="0" bIns="0" rtlCol="0" anchor="ctr"/>
           <a:lstStyle/>
           <a:p>
-            <a:pPr indent="0" marL="0">
+            <a:pPr marL="0" indent="0">
               <a:buNone/>
             </a:pPr>
             <a:r>
@@ -14394,13 +14963,20 @@
             <a:prstDash val="solid"/>
           </a:ln>
           <a:effectLst>
-            <a:outerShdw sx="100000" sy="100000" kx="0" ky="0" algn="bl" rotWithShape="0" blurRad="88900" dist="25400" dir="2700000">
+            <a:outerShdw blurRad="88900" dist="25400" dir="2700000" algn="bl" rotWithShape="0">
               <a:srgbClr val="000000">
                 <a:alpha val="13000"/>
               </a:srgbClr>
             </a:outerShdw>
           </a:effectLst>
         </p:spPr>
+        <p:txBody>
+          <a:bodyPr/>
+          <a:lstStyle/>
+          <a:p>
+            <a:endParaRPr lang="it-IT"/>
+          </a:p>
+        </p:txBody>
       </p:sp>
       <p:sp>
         <p:nvSpPr>
@@ -14423,7 +14999,7 @@
           <a:bodyPr wrap="square" lIns="0" tIns="0" rIns="0" bIns="0" rtlCol="0" anchor="ctr"/>
           <a:lstStyle/>
           <a:p>
-            <a:pPr indent="0" marL="0">
+            <a:pPr marL="0" indent="0">
               <a:buNone/>
             </a:pPr>
             <a:r>
@@ -14462,7 +15038,7 @@
           <a:bodyPr wrap="square" lIns="0" tIns="0" rIns="0" bIns="0" rtlCol="0" anchor="ctr"/>
           <a:lstStyle/>
           <a:p>
-            <a:pPr indent="0" marL="0">
+            <a:pPr marL="0" indent="0">
               <a:buNone/>
             </a:pPr>
             <a:r>
@@ -14496,6 +15072,7 @@
         <a:solidFill>
           <a:srgbClr val="FFFFFF"/>
         </a:solidFill>
+        <a:effectLst/>
       </p:bgPr>
     </p:bg>
     <p:spTree>
@@ -14533,11 +15110,11 @@
           <a:bodyPr wrap="square" lIns="0" tIns="0" rIns="0" bIns="0" rtlCol="0" anchor="ctr"/>
           <a:lstStyle/>
           <a:p>
-            <a:pPr indent="0" marL="0">
-              <a:buNone/>
-            </a:pPr>
-            <a:r>
-              <a:rPr lang="en-US" sz="1100" b="1" spc="300" kern="0" dirty="0">
+            <a:pPr marL="0" indent="0">
+              <a:buNone/>
+            </a:pPr>
+            <a:r>
+              <a:rPr lang="en-US" sz="1100" b="1" kern="0" spc="300" dirty="0">
                 <a:solidFill>
                   <a:srgbClr val="0B7A63"/>
                 </a:solidFill>
@@ -14572,7 +15149,7 @@
           <a:bodyPr wrap="square" lIns="0" tIns="0" rIns="0" bIns="0" rtlCol="0" anchor="ctr"/>
           <a:lstStyle/>
           <a:p>
-            <a:pPr indent="0" marL="0">
+            <a:pPr marL="0" indent="0">
               <a:buNone/>
             </a:pPr>
             <a:r>
@@ -14616,6 +15193,13 @@
             <a:prstDash val="solid"/>
           </a:ln>
         </p:spPr>
+        <p:txBody>
+          <a:bodyPr/>
+          <a:lstStyle/>
+          <a:p>
+            <a:endParaRPr lang="it-IT"/>
+          </a:p>
+        </p:txBody>
       </p:sp>
       <p:sp>
         <p:nvSpPr>
@@ -14638,7 +15222,7 @@
           <a:bodyPr wrap="square" lIns="0" tIns="0" rIns="0" bIns="0" rtlCol="0" anchor="t"/>
           <a:lstStyle/>
           <a:p>
-            <a:pPr indent="0" marL="0">
+            <a:pPr marL="0" indent="0">
               <a:buNone/>
             </a:pPr>
             <a:r>
@@ -14655,7 +15239,7 @@
             <a:endParaRPr lang="en-US" sz="1300" dirty="0"/>
           </a:p>
           <a:p>
-            <a:pPr indent="0" marL="0">
+            <a:pPr marL="0" indent="0">
               <a:buNone/>
             </a:pPr>
             <a:r>
@@ -14672,7 +15256,7 @@
             <a:endParaRPr lang="en-US" sz="1300" dirty="0"/>
           </a:p>
           <a:p>
-            <a:pPr indent="0" marL="0">
+            <a:pPr marL="0" indent="0">
               <a:buNone/>
             </a:pPr>
             <a:r>
@@ -14689,7 +15273,7 @@
             <a:endParaRPr lang="en-US" sz="1300" dirty="0"/>
           </a:p>
           <a:p>
-            <a:pPr indent="0" marL="0">
+            <a:pPr marL="0" indent="0">
               <a:buNone/>
             </a:pPr>
             <a:r>
@@ -14733,13 +15317,20 @@
             <a:prstDash val="solid"/>
           </a:ln>
           <a:effectLst>
-            <a:outerShdw sx="100000" sy="100000" kx="0" ky="0" algn="bl" rotWithShape="0" blurRad="88900" dist="25400" dir="2700000">
+            <a:outerShdw blurRad="88900" dist="25400" dir="2700000" algn="bl" rotWithShape="0">
               <a:srgbClr val="000000">
                 <a:alpha val="13000"/>
               </a:srgbClr>
             </a:outerShdw>
           </a:effectLst>
         </p:spPr>
+        <p:txBody>
+          <a:bodyPr/>
+          <a:lstStyle/>
+          <a:p>
+            <a:endParaRPr lang="it-IT"/>
+          </a:p>
+        </p:txBody>
       </p:sp>
       <p:sp>
         <p:nvSpPr>
@@ -14762,7 +15353,7 @@
           <a:bodyPr wrap="square" lIns="0" tIns="0" rIns="0" bIns="0" rtlCol="0" anchor="ctr"/>
           <a:lstStyle/>
           <a:p>
-            <a:pPr indent="0" marL="0">
+            <a:pPr marL="0" indent="0">
               <a:buNone/>
             </a:pPr>
             <a:r>
@@ -14801,7 +15392,7 @@
           <a:bodyPr wrap="square" lIns="0" tIns="0" rIns="0" bIns="0" rtlCol="0" anchor="ctr"/>
           <a:lstStyle/>
           <a:p>
-            <a:pPr indent="0" marL="0">
+            <a:pPr marL="0" indent="0">
               <a:buNone/>
             </a:pPr>
             <a:r>
@@ -14845,13 +15436,20 @@
             <a:prstDash val="solid"/>
           </a:ln>
           <a:effectLst>
-            <a:outerShdw sx="100000" sy="100000" kx="0" ky="0" algn="bl" rotWithShape="0" blurRad="88900" dist="25400" dir="2700000">
+            <a:outerShdw blurRad="88900" dist="25400" dir="2700000" algn="bl" rotWithShape="0">
               <a:srgbClr val="000000">
                 <a:alpha val="13000"/>
               </a:srgbClr>
             </a:outerShdw>
           </a:effectLst>
         </p:spPr>
+        <p:txBody>
+          <a:bodyPr/>
+          <a:lstStyle/>
+          <a:p>
+            <a:endParaRPr lang="it-IT"/>
+          </a:p>
+        </p:txBody>
       </p:sp>
       <p:sp>
         <p:nvSpPr>
@@ -14874,7 +15472,7 @@
           <a:bodyPr wrap="square" lIns="0" tIns="0" rIns="0" bIns="0" rtlCol="0" anchor="ctr"/>
           <a:lstStyle/>
           <a:p>
-            <a:pPr indent="0" marL="0">
+            <a:pPr marL="0" indent="0">
               <a:buNone/>
             </a:pPr>
             <a:r>
@@ -14913,7 +15511,7 @@
           <a:bodyPr wrap="square" lIns="0" tIns="0" rIns="0" bIns="0" rtlCol="0" anchor="ctr"/>
           <a:lstStyle/>
           <a:p>
-            <a:pPr indent="0" marL="0">
+            <a:pPr marL="0" indent="0">
               <a:buNone/>
             </a:pPr>
             <a:r>
@@ -14957,13 +15555,20 @@
             <a:prstDash val="solid"/>
           </a:ln>
           <a:effectLst>
-            <a:outerShdw sx="100000" sy="100000" kx="0" ky="0" algn="bl" rotWithShape="0" blurRad="88900" dist="25400" dir="2700000">
+            <a:outerShdw blurRad="88900" dist="25400" dir="2700000" algn="bl" rotWithShape="0">
               <a:srgbClr val="000000">
                 <a:alpha val="13000"/>
               </a:srgbClr>
             </a:outerShdw>
           </a:effectLst>
         </p:spPr>
+        <p:txBody>
+          <a:bodyPr/>
+          <a:lstStyle/>
+          <a:p>
+            <a:endParaRPr lang="it-IT"/>
+          </a:p>
+        </p:txBody>
       </p:sp>
       <p:sp>
         <p:nvSpPr>
@@ -14986,7 +15591,7 @@
           <a:bodyPr wrap="square" lIns="0" tIns="0" rIns="0" bIns="0" rtlCol="0" anchor="ctr"/>
           <a:lstStyle/>
           <a:p>
-            <a:pPr indent="0" marL="0">
+            <a:pPr marL="0" indent="0">
               <a:buNone/>
             </a:pPr>
             <a:r>
@@ -15025,7 +15630,7 @@
           <a:bodyPr wrap="square" lIns="0" tIns="0" rIns="0" bIns="0" rtlCol="0" anchor="ctr"/>
           <a:lstStyle/>
           <a:p>
-            <a:pPr indent="0" marL="0">
+            <a:pPr marL="0" indent="0">
               <a:buNone/>
             </a:pPr>
             <a:r>
@@ -15069,13 +15674,20 @@
             <a:prstDash val="solid"/>
           </a:ln>
           <a:effectLst>
-            <a:outerShdw sx="100000" sy="100000" kx="0" ky="0" algn="bl" rotWithShape="0" blurRad="88900" dist="25400" dir="2700000">
+            <a:outerShdw blurRad="88900" dist="25400" dir="2700000" algn="bl" rotWithShape="0">
               <a:srgbClr val="000000">
                 <a:alpha val="13000"/>
               </a:srgbClr>
             </a:outerShdw>
           </a:effectLst>
         </p:spPr>
+        <p:txBody>
+          <a:bodyPr/>
+          <a:lstStyle/>
+          <a:p>
+            <a:endParaRPr lang="it-IT"/>
+          </a:p>
+        </p:txBody>
       </p:sp>
       <p:sp>
         <p:nvSpPr>
@@ -15098,7 +15710,7 @@
           <a:bodyPr wrap="square" lIns="0" tIns="0" rIns="0" bIns="0" rtlCol="0" anchor="ctr"/>
           <a:lstStyle/>
           <a:p>
-            <a:pPr indent="0" marL="0">
+            <a:pPr marL="0" indent="0">
               <a:buNone/>
             </a:pPr>
             <a:r>
@@ -15137,7 +15749,7 @@
           <a:bodyPr wrap="square" lIns="0" tIns="0" rIns="0" bIns="0" rtlCol="0" anchor="t"/>
           <a:lstStyle/>
           <a:p>
-            <a:pPr indent="0" marL="0">
+            <a:pPr marL="0" indent="0">
               <a:buNone/>
             </a:pPr>
             <a:r>
@@ -15154,7 +15766,7 @@
             <a:endParaRPr lang="en-US" sz="1400" dirty="0"/>
           </a:p>
           <a:p>
-            <a:pPr indent="0" marL="0">
+            <a:pPr marL="0" indent="0">
               <a:buNone/>
             </a:pPr>
             <a:r>
@@ -15171,13 +15783,13 @@
             <a:endParaRPr lang="en-US" sz="1400" dirty="0"/>
           </a:p>
           <a:p>
-            <a:pPr indent="0" marL="0">
+            <a:pPr marL="0" indent="0">
               <a:buNone/>
             </a:pPr>
             <a:endParaRPr lang="en-US" sz="1400" dirty="0"/>
           </a:p>
           <a:p>
-            <a:pPr indent="0" marL="0">
+            <a:pPr marL="0" indent="0">
               <a:buNone/>
             </a:pPr>
             <a:r>
@@ -15194,13 +15806,13 @@
             <a:endParaRPr lang="en-US" sz="1400" dirty="0"/>
           </a:p>
           <a:p>
-            <a:pPr indent="0" marL="0">
+            <a:pPr marL="0" indent="0">
               <a:buNone/>
             </a:pPr>
             <a:endParaRPr lang="en-US" sz="1400" dirty="0"/>
           </a:p>
           <a:p>
-            <a:pPr indent="0" marL="0">
+            <a:pPr marL="0" indent="0">
               <a:buNone/>
             </a:pPr>
             <a:r>
@@ -15217,7 +15829,7 @@
             <a:endParaRPr lang="en-US" sz="1400" dirty="0"/>
           </a:p>
           <a:p>
-            <a:pPr indent="0" marL="0">
+            <a:pPr marL="0" indent="0">
               <a:buNone/>
             </a:pPr>
             <a:r>
@@ -15536,4 +16148,319 @@
     </a:ext>
   </a:extLst>
 </a:theme>
+</file>
+
+<file path=ppt/theme/theme2.xml><?xml version="1.0" encoding="utf-8"?>
+<a:theme xmlns:a="http://schemas.openxmlformats.org/drawingml/2006/main" name="Tema di Office">
+  <a:themeElements>
+    <a:clrScheme name="Office">
+      <a:dk1>
+        <a:sysClr val="windowText" lastClr="000000"/>
+      </a:dk1>
+      <a:lt1>
+        <a:sysClr val="window" lastClr="FFFFFF"/>
+      </a:lt1>
+      <a:dk2>
+        <a:srgbClr val="0E2841"/>
+      </a:dk2>
+      <a:lt2>
+        <a:srgbClr val="E8E8E8"/>
+      </a:lt2>
+      <a:accent1>
+        <a:srgbClr val="156082"/>
+      </a:accent1>
+      <a:accent2>
+        <a:srgbClr val="E97132"/>
+      </a:accent2>
+      <a:accent3>
+        <a:srgbClr val="196B24"/>
+      </a:accent3>
+      <a:accent4>
+        <a:srgbClr val="0F9ED5"/>
+      </a:accent4>
+      <a:accent5>
+        <a:srgbClr val="A02B93"/>
+      </a:accent5>
+      <a:accent6>
+        <a:srgbClr val="4EA72E"/>
+      </a:accent6>
+      <a:hlink>
+        <a:srgbClr val="467886"/>
+      </a:hlink>
+      <a:folHlink>
+        <a:srgbClr val="96607D"/>
+      </a:folHlink>
+    </a:clrScheme>
+    <a:fontScheme name="Office">
+      <a:majorFont>
+        <a:latin typeface="Aptos Display" panose="02110004020202020204"/>
+        <a:ea typeface=""/>
+        <a:cs typeface=""/>
+        <a:font script="Jpan" typeface="游ゴシック Light"/>
+        <a:font script="Hang" typeface="맑은 고딕"/>
+        <a:font script="Hans" typeface="等线 Light"/>
+        <a:font script="Hant" typeface="新細明體"/>
+        <a:font script="Arab" typeface="Times New Roman"/>
+        <a:font script="Hebr" typeface="Times New Roman"/>
+        <a:font script="Thai" typeface="Angsana New"/>
+        <a:font script="Ethi" typeface="Nyala"/>
+        <a:font script="Beng" typeface="Vrinda"/>
+        <a:font script="Gujr" typeface="Shruti"/>
+        <a:font script="Khmr" typeface="MoolBoran"/>
+        <a:font script="Knda" typeface="Tunga"/>
+        <a:font script="Guru" typeface="Raavi"/>
+        <a:font script="Cans" typeface="Euphemia"/>
+        <a:font script="Cher" typeface="Plantagenet Cherokee"/>
+        <a:font script="Yiii" typeface="Microsoft Yi Baiti"/>
+        <a:font script="Tibt" typeface="Microsoft Himalaya"/>
+        <a:font script="Thaa" typeface="MV Boli"/>
+        <a:font script="Deva" typeface="Mangal"/>
+        <a:font script="Telu" typeface="Gautami"/>
+        <a:font script="Taml" typeface="Latha"/>
+        <a:font script="Syrc" typeface="Estrangelo Edessa"/>
+        <a:font script="Orya" typeface="Kalinga"/>
+        <a:font script="Mlym" typeface="Kartika"/>
+        <a:font script="Laoo" typeface="DokChampa"/>
+        <a:font script="Sinh" typeface="Iskoola Pota"/>
+        <a:font script="Mong" typeface="Mongolian Baiti"/>
+        <a:font script="Viet" typeface="Times New Roman"/>
+        <a:font script="Uigh" typeface="Microsoft Uighur"/>
+        <a:font script="Geor" typeface="Sylfaen"/>
+        <a:font script="Armn" typeface="Arial"/>
+        <a:font script="Bugi" typeface="Leelawadee UI"/>
+        <a:font script="Bopo" typeface="Microsoft JhengHei"/>
+        <a:font script="Java" typeface="Javanese Text"/>
+        <a:font script="Lisu" typeface="Segoe UI"/>
+        <a:font script="Mymr" typeface="Myanmar Text"/>
+        <a:font script="Nkoo" typeface="Ebrima"/>
+        <a:font script="Olck" typeface="Nirmala UI"/>
+        <a:font script="Osma" typeface="Ebrima"/>
+        <a:font script="Phag" typeface="Phagspa"/>
+        <a:font script="Syrn" typeface="Estrangelo Edessa"/>
+        <a:font script="Syrj" typeface="Estrangelo Edessa"/>
+        <a:font script="Syre" typeface="Estrangelo Edessa"/>
+        <a:font script="Sora" typeface="Nirmala UI"/>
+        <a:font script="Tale" typeface="Microsoft Tai Le"/>
+        <a:font script="Talu" typeface="Microsoft New Tai Lue"/>
+        <a:font script="Tfng" typeface="Ebrima"/>
+      </a:majorFont>
+      <a:minorFont>
+        <a:latin typeface="Aptos" panose="02110004020202020204"/>
+        <a:ea typeface=""/>
+        <a:cs typeface=""/>
+        <a:font script="Jpan" typeface="游ゴシック"/>
+        <a:font script="Hang" typeface="맑은 고딕"/>
+        <a:font script="Hans" typeface="等线"/>
+        <a:font script="Hant" typeface="新細明體"/>
+        <a:font script="Arab" typeface="Arial"/>
+        <a:font script="Hebr" typeface="Arial"/>
+        <a:font script="Thai" typeface="Cordia New"/>
+        <a:font script="Ethi" typeface="Nyala"/>
+        <a:font script="Beng" typeface="Vrinda"/>
+        <a:font script="Gujr" typeface="Shruti"/>
+        <a:font script="Khmr" typeface="DaunPenh"/>
+        <a:font script="Knda" typeface="Tunga"/>
+        <a:font script="Guru" typeface="Raavi"/>
+        <a:font script="Cans" typeface="Euphemia"/>
+        <a:font script="Cher" typeface="Plantagenet Cherokee"/>
+        <a:font script="Yiii" typeface="Microsoft Yi Baiti"/>
+        <a:font script="Tibt" typeface="Microsoft Himalaya"/>
+        <a:font script="Thaa" typeface="MV Boli"/>
+        <a:font script="Deva" typeface="Mangal"/>
+        <a:font script="Telu" typeface="Gautami"/>
+        <a:font script="Taml" typeface="Latha"/>
+        <a:font script="Syrc" typeface="Estrangelo Edessa"/>
+        <a:font script="Orya" typeface="Kalinga"/>
+        <a:font script="Mlym" typeface="Kartika"/>
+        <a:font script="Laoo" typeface="DokChampa"/>
+        <a:font script="Sinh" typeface="Iskoola Pota"/>
+        <a:font script="Mong" typeface="Mongolian Baiti"/>
+        <a:font script="Viet" typeface="Arial"/>
+        <a:font script="Uigh" typeface="Microsoft Uighur"/>
+        <a:font script="Geor" typeface="Sylfaen"/>
+        <a:font script="Armn" typeface="Arial"/>
+        <a:font script="Bugi" typeface="Leelawadee UI"/>
+        <a:font script="Bopo" typeface="Microsoft JhengHei"/>
+        <a:font script="Java" typeface="Javanese Text"/>
+        <a:font script="Lisu" typeface="Segoe UI"/>
+        <a:font script="Mymr" typeface="Myanmar Text"/>
+        <a:font script="Nkoo" typeface="Ebrima"/>
+        <a:font script="Olck" typeface="Nirmala UI"/>
+        <a:font script="Osma" typeface="Ebrima"/>
+        <a:font script="Phag" typeface="Phagspa"/>
+        <a:font script="Syrn" typeface="Estrangelo Edessa"/>
+        <a:font script="Syrj" typeface="Estrangelo Edessa"/>
+        <a:font script="Syre" typeface="Estrangelo Edessa"/>
+        <a:font script="Sora" typeface="Nirmala UI"/>
+        <a:font script="Tale" typeface="Microsoft Tai Le"/>
+        <a:font script="Talu" typeface="Microsoft New Tai Lue"/>
+        <a:font script="Tfng" typeface="Ebrima"/>
+      </a:minorFont>
+    </a:fontScheme>
+    <a:fmtScheme name="Office">
+      <a:fillStyleLst>
+        <a:solidFill>
+          <a:schemeClr val="phClr"/>
+        </a:solidFill>
+        <a:gradFill rotWithShape="1">
+          <a:gsLst>
+            <a:gs pos="0">
+              <a:schemeClr val="phClr">
+                <a:lumMod val="110000"/>
+                <a:satMod val="105000"/>
+                <a:tint val="67000"/>
+              </a:schemeClr>
+            </a:gs>
+            <a:gs pos="50000">
+              <a:schemeClr val="phClr">
+                <a:lumMod val="105000"/>
+                <a:satMod val="103000"/>
+                <a:tint val="73000"/>
+              </a:schemeClr>
+            </a:gs>
+            <a:gs pos="100000">
+              <a:schemeClr val="phClr">
+                <a:lumMod val="105000"/>
+                <a:satMod val="109000"/>
+                <a:tint val="81000"/>
+              </a:schemeClr>
+            </a:gs>
+          </a:gsLst>
+          <a:lin ang="5400000" scaled="0"/>
+        </a:gradFill>
+        <a:gradFill rotWithShape="1">
+          <a:gsLst>
+            <a:gs pos="0">
+              <a:schemeClr val="phClr">
+                <a:satMod val="103000"/>
+                <a:lumMod val="102000"/>
+                <a:tint val="94000"/>
+              </a:schemeClr>
+            </a:gs>
+            <a:gs pos="50000">
+              <a:schemeClr val="phClr">
+                <a:satMod val="110000"/>
+                <a:lumMod val="100000"/>
+                <a:shade val="100000"/>
+              </a:schemeClr>
+            </a:gs>
+            <a:gs pos="100000">
+              <a:schemeClr val="phClr">
+                <a:lumMod val="99000"/>
+                <a:satMod val="120000"/>
+                <a:shade val="78000"/>
+              </a:schemeClr>
+            </a:gs>
+          </a:gsLst>
+          <a:lin ang="5400000" scaled="0"/>
+        </a:gradFill>
+      </a:fillStyleLst>
+      <a:lnStyleLst>
+        <a:ln w="12700" cap="flat" cmpd="sng" algn="ctr">
+          <a:solidFill>
+            <a:schemeClr val="phClr"/>
+          </a:solidFill>
+          <a:prstDash val="solid"/>
+          <a:miter lim="800000"/>
+        </a:ln>
+        <a:ln w="19050" cap="flat" cmpd="sng" algn="ctr">
+          <a:solidFill>
+            <a:schemeClr val="phClr"/>
+          </a:solidFill>
+          <a:prstDash val="solid"/>
+          <a:miter lim="800000"/>
+        </a:ln>
+        <a:ln w="25400" cap="flat" cmpd="sng" algn="ctr">
+          <a:solidFill>
+            <a:schemeClr val="phClr"/>
+          </a:solidFill>
+          <a:prstDash val="solid"/>
+          <a:miter lim="800000"/>
+        </a:ln>
+      </a:lnStyleLst>
+      <a:effectStyleLst>
+        <a:effectStyle>
+          <a:effectLst/>
+        </a:effectStyle>
+        <a:effectStyle>
+          <a:effectLst/>
+        </a:effectStyle>
+        <a:effectStyle>
+          <a:effectLst>
+            <a:outerShdw blurRad="57150" dist="19050" dir="5400000" algn="ctr" rotWithShape="0">
+              <a:srgbClr val="000000">
+                <a:alpha val="63000"/>
+              </a:srgbClr>
+            </a:outerShdw>
+          </a:effectLst>
+        </a:effectStyle>
+      </a:effectStyleLst>
+      <a:bgFillStyleLst>
+        <a:solidFill>
+          <a:schemeClr val="phClr"/>
+        </a:solidFill>
+        <a:solidFill>
+          <a:schemeClr val="phClr">
+            <a:tint val="95000"/>
+            <a:satMod val="170000"/>
+          </a:schemeClr>
+        </a:solidFill>
+        <a:gradFill rotWithShape="1">
+          <a:gsLst>
+            <a:gs pos="0">
+              <a:schemeClr val="phClr">
+                <a:tint val="93000"/>
+                <a:satMod val="150000"/>
+                <a:shade val="98000"/>
+                <a:lumMod val="102000"/>
+              </a:schemeClr>
+            </a:gs>
+            <a:gs pos="50000">
+              <a:schemeClr val="phClr">
+                <a:tint val="98000"/>
+                <a:satMod val="130000"/>
+                <a:shade val="90000"/>
+                <a:lumMod val="103000"/>
+              </a:schemeClr>
+            </a:gs>
+            <a:gs pos="100000">
+              <a:schemeClr val="phClr">
+                <a:shade val="63000"/>
+                <a:satMod val="120000"/>
+              </a:schemeClr>
+            </a:gs>
+          </a:gsLst>
+          <a:lin ang="5400000" scaled="0"/>
+        </a:gradFill>
+      </a:bgFillStyleLst>
+    </a:fmtScheme>
+  </a:themeElements>
+  <a:objectDefaults>
+    <a:lnDef>
+      <a:spPr/>
+      <a:bodyPr/>
+      <a:lstStyle/>
+      <a:style>
+        <a:lnRef idx="2">
+          <a:schemeClr val="accent1"/>
+        </a:lnRef>
+        <a:fillRef idx="0">
+          <a:schemeClr val="accent1"/>
+        </a:fillRef>
+        <a:effectRef idx="1">
+          <a:schemeClr val="accent1"/>
+        </a:effectRef>
+        <a:fontRef idx="minor">
+          <a:schemeClr val="tx1"/>
+        </a:fontRef>
+      </a:style>
+    </a:lnDef>
+  </a:objectDefaults>
+  <a:extraClrSchemeLst/>
+  <a:extLst>
+    <a:ext uri="{05A4C25C-085E-4340-85A3-A5531E510DB2}">
+      <thm15:themeFamily xmlns:thm15="http://schemas.microsoft.com/office/thememl/2012/main" name="Office Theme" id="{2E142A2C-CD16-42D6-873A-C26D2A0506FA}" vid="{1BDDFF52-6CD6-40A5-AB3C-68EB2F1E4D0A}"/>
+    </a:ext>
+  </a:extLst>
+</a:theme>
 </file>